--- a/Toxicity analysis in Greek Text.pptx
+++ b/Toxicity analysis in Greek Text.pptx
@@ -26,23 +26,22 @@
     <p:sldId id="274" r:id="rId20"/>
     <p:sldId id="275" r:id="rId21"/>
     <p:sldId id="276" r:id="rId22"/>
-    <p:sldId id="278" r:id="rId23"/>
+    <p:sldId id="280" r:id="rId23"/>
     <p:sldId id="277" r:id="rId24"/>
-    <p:sldId id="280" r:id="rId25"/>
-    <p:sldId id="281" r:id="rId26"/>
-    <p:sldId id="285" r:id="rId27"/>
-    <p:sldId id="284" r:id="rId28"/>
-    <p:sldId id="286" r:id="rId29"/>
-    <p:sldId id="287" r:id="rId30"/>
-    <p:sldId id="288" r:id="rId31"/>
-    <p:sldId id="289" r:id="rId32"/>
-    <p:sldId id="290" r:id="rId33"/>
-    <p:sldId id="291" r:id="rId34"/>
-    <p:sldId id="292" r:id="rId35"/>
-    <p:sldId id="293" r:id="rId36"/>
-    <p:sldId id="294" r:id="rId37"/>
-    <p:sldId id="295" r:id="rId38"/>
-    <p:sldId id="296" r:id="rId39"/>
+    <p:sldId id="281" r:id="rId25"/>
+    <p:sldId id="285" r:id="rId26"/>
+    <p:sldId id="284" r:id="rId27"/>
+    <p:sldId id="286" r:id="rId28"/>
+    <p:sldId id="287" r:id="rId29"/>
+    <p:sldId id="288" r:id="rId30"/>
+    <p:sldId id="289" r:id="rId31"/>
+    <p:sldId id="290" r:id="rId32"/>
+    <p:sldId id="291" r:id="rId33"/>
+    <p:sldId id="292" r:id="rId34"/>
+    <p:sldId id="293" r:id="rId35"/>
+    <p:sldId id="294" r:id="rId36"/>
+    <p:sldId id="295" r:id="rId37"/>
+    <p:sldId id="296" r:id="rId38"/>
   </p:sldIdLst>
   <p:sldSz cx="12192000" cy="6858000"/>
   <p:notesSz cx="6858000" cy="9144000"/>
@@ -150,469 +149,6 @@
 </file>
 
 <file path=ppt/charts/chart1.xml><?xml version="1.0" encoding="utf-8"?>
-<c:chartSpace xmlns:c="http://schemas.openxmlformats.org/drawingml/2006/chart" xmlns:a="http://schemas.openxmlformats.org/drawingml/2006/main" xmlns:r="http://schemas.openxmlformats.org/officeDocument/2006/relationships" xmlns:c16r2="http://schemas.microsoft.com/office/drawing/2015/06/chart">
-  <c:date1904 val="0"/>
-  <c:lang val="en-US"/>
-  <c:roundedCorners val="0"/>
-  <mc:AlternateContent xmlns:mc="http://schemas.openxmlformats.org/markup-compatibility/2006">
-    <mc:Choice xmlns:c14="http://schemas.microsoft.com/office/drawing/2007/8/2/chart" Requires="c14">
-      <c14:style val="102"/>
-    </mc:Choice>
-    <mc:Fallback>
-      <c:style val="2"/>
-    </mc:Fallback>
-  </mc:AlternateContent>
-  <c:chart>
-    <c:autoTitleDeleted val="1"/>
-    <c:plotArea>
-      <c:layout/>
-      <c:barChart>
-        <c:barDir val="col"/>
-        <c:grouping val="clustered"/>
-        <c:varyColors val="0"/>
-        <c:ser>
-          <c:idx val="0"/>
-          <c:order val="0"/>
-          <c:tx>
-            <c:strRef>
-              <c:f>Sheet1!$B$1</c:f>
-              <c:strCache>
-                <c:ptCount val="1"/>
-                <c:pt idx="0">
-                  <c:v>Before</c:v>
-                </c:pt>
-              </c:strCache>
-            </c:strRef>
-          </c:tx>
-          <c:spPr>
-            <a:solidFill>
-              <a:schemeClr val="accent1"/>
-            </a:solidFill>
-            <a:ln>
-              <a:noFill/>
-            </a:ln>
-            <a:effectLst/>
-          </c:spPr>
-          <c:invertIfNegative val="0"/>
-          <c:dLbls>
-            <c:spPr>
-              <a:noFill/>
-              <a:ln>
-                <a:noFill/>
-              </a:ln>
-              <a:effectLst/>
-            </c:spPr>
-            <c:txPr>
-              <a:bodyPr rot="0" spcFirstLastPara="1" vertOverflow="ellipsis" vert="horz" wrap="square" lIns="38100" tIns="19050" rIns="38100" bIns="19050" anchor="ctr" anchorCtr="1">
-                <a:spAutoFit/>
-              </a:bodyPr>
-              <a:lstStyle/>
-              <a:p>
-                <a:pPr>
-                  <a:defRPr sz="1197" b="0" i="0" u="none" strike="noStrike" kern="1200" baseline="0">
-                    <a:solidFill>
-                      <a:schemeClr val="tx1">
-                        <a:lumMod val="75000"/>
-                        <a:lumOff val="25000"/>
-                      </a:schemeClr>
-                    </a:solidFill>
-                    <a:latin typeface="+mn-lt"/>
-                    <a:ea typeface="+mn-ea"/>
-                    <a:cs typeface="+mn-cs"/>
-                  </a:defRPr>
-                </a:pPr>
-                <a:endParaRPr lang="en-US"/>
-              </a:p>
-            </c:txPr>
-            <c:dLblPos val="outEnd"/>
-            <c:showLegendKey val="0"/>
-            <c:showVal val="1"/>
-            <c:showCatName val="0"/>
-            <c:showSerName val="0"/>
-            <c:showPercent val="0"/>
-            <c:showBubbleSize val="0"/>
-            <c:showLeaderLines val="0"/>
-            <c:extLst>
-              <c:ext xmlns:c15="http://schemas.microsoft.com/office/drawing/2012/chart" uri="{CE6537A1-D6FC-4f65-9D91-7224C49458BB}">
-                <c15:showLeaderLines val="1"/>
-                <c15:leaderLines>
-                  <c:spPr>
-                    <a:ln w="9525" cap="flat" cmpd="sng" algn="ctr">
-                      <a:solidFill>
-                        <a:schemeClr val="tx1">
-                          <a:lumMod val="35000"/>
-                          <a:lumOff val="65000"/>
-                        </a:schemeClr>
-                      </a:solidFill>
-                      <a:round/>
-                    </a:ln>
-                    <a:effectLst/>
-                  </c:spPr>
-                </c15:leaderLines>
-              </c:ext>
-            </c:extLst>
-          </c:dLbls>
-          <c:cat>
-            <c:strRef>
-              <c:f>Sheet1!$A$2:$A$4</c:f>
-              <c:strCache>
-                <c:ptCount val="3"/>
-                <c:pt idx="0">
-                  <c:v>Baseline</c:v>
-                </c:pt>
-                <c:pt idx="1">
-                  <c:v>Intermediate</c:v>
-                </c:pt>
-                <c:pt idx="2">
-                  <c:v>Advanced</c:v>
-                </c:pt>
-              </c:strCache>
-            </c:strRef>
-          </c:cat>
-          <c:val>
-            <c:numRef>
-              <c:f>Sheet1!$B$2:$B$4</c:f>
-              <c:numCache>
-                <c:formatCode>General</c:formatCode>
-                <c:ptCount val="3"/>
-                <c:pt idx="0">
-                  <c:v>86</c:v>
-                </c:pt>
-                <c:pt idx="1">
-                  <c:v>57</c:v>
-                </c:pt>
-                <c:pt idx="2">
-                  <c:v>82</c:v>
-                </c:pt>
-              </c:numCache>
-            </c:numRef>
-          </c:val>
-          <c:extLst>
-            <c:ext xmlns:c16="http://schemas.microsoft.com/office/drawing/2014/chart" uri="{C3380CC4-5D6E-409C-BE32-E72D297353CC}">
-              <c16:uniqueId val="{00000000-D41E-459A-AF93-4F83AFC9D961}"/>
-            </c:ext>
-          </c:extLst>
-        </c:ser>
-        <c:ser>
-          <c:idx val="1"/>
-          <c:order val="1"/>
-          <c:tx>
-            <c:strRef>
-              <c:f>Sheet1!$C$1</c:f>
-              <c:strCache>
-                <c:ptCount val="1"/>
-                <c:pt idx="0">
-                  <c:v>After</c:v>
-                </c:pt>
-              </c:strCache>
-            </c:strRef>
-          </c:tx>
-          <c:spPr>
-            <a:solidFill>
-              <a:schemeClr val="accent2"/>
-            </a:solidFill>
-            <a:ln>
-              <a:noFill/>
-            </a:ln>
-            <a:effectLst/>
-          </c:spPr>
-          <c:invertIfNegative val="0"/>
-          <c:dLbls>
-            <c:spPr>
-              <a:noFill/>
-              <a:ln>
-                <a:noFill/>
-              </a:ln>
-              <a:effectLst/>
-            </c:spPr>
-            <c:txPr>
-              <a:bodyPr rot="0" spcFirstLastPara="1" vertOverflow="ellipsis" vert="horz" wrap="square" lIns="38100" tIns="19050" rIns="38100" bIns="19050" anchor="ctr" anchorCtr="1">
-                <a:spAutoFit/>
-              </a:bodyPr>
-              <a:lstStyle/>
-              <a:p>
-                <a:pPr>
-                  <a:defRPr sz="1197" b="0" i="0" u="none" strike="noStrike" kern="1200" baseline="0">
-                    <a:solidFill>
-                      <a:schemeClr val="tx1">
-                        <a:lumMod val="75000"/>
-                        <a:lumOff val="25000"/>
-                      </a:schemeClr>
-                    </a:solidFill>
-                    <a:latin typeface="+mn-lt"/>
-                    <a:ea typeface="+mn-ea"/>
-                    <a:cs typeface="+mn-cs"/>
-                  </a:defRPr>
-                </a:pPr>
-                <a:endParaRPr lang="en-US"/>
-              </a:p>
-            </c:txPr>
-            <c:dLblPos val="outEnd"/>
-            <c:showLegendKey val="0"/>
-            <c:showVal val="1"/>
-            <c:showCatName val="0"/>
-            <c:showSerName val="0"/>
-            <c:showPercent val="0"/>
-            <c:showBubbleSize val="0"/>
-            <c:showLeaderLines val="0"/>
-            <c:extLst>
-              <c:ext xmlns:c15="http://schemas.microsoft.com/office/drawing/2012/chart" uri="{CE6537A1-D6FC-4f65-9D91-7224C49458BB}">
-                <c15:showLeaderLines val="1"/>
-                <c15:leaderLines>
-                  <c:spPr>
-                    <a:ln w="9525" cap="flat" cmpd="sng" algn="ctr">
-                      <a:solidFill>
-                        <a:schemeClr val="tx1">
-                          <a:lumMod val="35000"/>
-                          <a:lumOff val="65000"/>
-                        </a:schemeClr>
-                      </a:solidFill>
-                      <a:round/>
-                    </a:ln>
-                    <a:effectLst/>
-                  </c:spPr>
-                </c15:leaderLines>
-              </c:ext>
-            </c:extLst>
-          </c:dLbls>
-          <c:cat>
-            <c:strRef>
-              <c:f>Sheet1!$A$2:$A$4</c:f>
-              <c:strCache>
-                <c:ptCount val="3"/>
-                <c:pt idx="0">
-                  <c:v>Baseline</c:v>
-                </c:pt>
-                <c:pt idx="1">
-                  <c:v>Intermediate</c:v>
-                </c:pt>
-                <c:pt idx="2">
-                  <c:v>Advanced</c:v>
-                </c:pt>
-              </c:strCache>
-            </c:strRef>
-          </c:cat>
-          <c:val>
-            <c:numRef>
-              <c:f>Sheet1!$C$2:$C$4</c:f>
-              <c:numCache>
-                <c:formatCode>General</c:formatCode>
-                <c:ptCount val="3"/>
-                <c:pt idx="0">
-                  <c:v>89</c:v>
-                </c:pt>
-                <c:pt idx="1">
-                  <c:v>85</c:v>
-                </c:pt>
-                <c:pt idx="2">
-                  <c:v>84</c:v>
-                </c:pt>
-              </c:numCache>
-            </c:numRef>
-          </c:val>
-          <c:extLst>
-            <c:ext xmlns:c16="http://schemas.microsoft.com/office/drawing/2014/chart" uri="{C3380CC4-5D6E-409C-BE32-E72D297353CC}">
-              <c16:uniqueId val="{00000001-D41E-459A-AF93-4F83AFC9D961}"/>
-            </c:ext>
-          </c:extLst>
-        </c:ser>
-        <c:dLbls>
-          <c:dLblPos val="outEnd"/>
-          <c:showLegendKey val="0"/>
-          <c:showVal val="1"/>
-          <c:showCatName val="0"/>
-          <c:showSerName val="0"/>
-          <c:showPercent val="0"/>
-          <c:showBubbleSize val="0"/>
-        </c:dLbls>
-        <c:gapWidth val="219"/>
-        <c:overlap val="-27"/>
-        <c:axId val="878155472"/>
-        <c:axId val="878153552"/>
-      </c:barChart>
-      <c:catAx>
-        <c:axId val="878155472"/>
-        <c:scaling>
-          <c:orientation val="minMax"/>
-        </c:scaling>
-        <c:delete val="0"/>
-        <c:axPos val="b"/>
-        <c:numFmt formatCode="General" sourceLinked="1"/>
-        <c:majorTickMark val="none"/>
-        <c:minorTickMark val="none"/>
-        <c:tickLblPos val="nextTo"/>
-        <c:spPr>
-          <a:noFill/>
-          <a:ln w="9525" cap="flat" cmpd="sng" algn="ctr">
-            <a:solidFill>
-              <a:schemeClr val="tx1">
-                <a:lumMod val="15000"/>
-                <a:lumOff val="85000"/>
-              </a:schemeClr>
-            </a:solidFill>
-            <a:round/>
-          </a:ln>
-          <a:effectLst/>
-        </c:spPr>
-        <c:txPr>
-          <a:bodyPr rot="-60000000" spcFirstLastPara="1" vertOverflow="ellipsis" vert="horz" wrap="square" anchor="ctr" anchorCtr="1"/>
-          <a:lstStyle/>
-          <a:p>
-            <a:pPr>
-              <a:defRPr sz="1197" b="0" i="0" u="none" strike="noStrike" kern="1200" baseline="0">
-                <a:solidFill>
-                  <a:schemeClr val="tx1">
-                    <a:lumMod val="65000"/>
-                    <a:lumOff val="35000"/>
-                  </a:schemeClr>
-                </a:solidFill>
-                <a:latin typeface="+mn-lt"/>
-                <a:ea typeface="+mn-ea"/>
-                <a:cs typeface="+mn-cs"/>
-              </a:defRPr>
-            </a:pPr>
-            <a:endParaRPr lang="en-US"/>
-          </a:p>
-        </c:txPr>
-        <c:crossAx val="878153552"/>
-        <c:crosses val="autoZero"/>
-        <c:auto val="1"/>
-        <c:lblAlgn val="ctr"/>
-        <c:lblOffset val="100"/>
-        <c:noMultiLvlLbl val="0"/>
-      </c:catAx>
-      <c:valAx>
-        <c:axId val="878153552"/>
-        <c:scaling>
-          <c:orientation val="minMax"/>
-          <c:max val="100"/>
-          <c:min val="50"/>
-        </c:scaling>
-        <c:delete val="0"/>
-        <c:axPos val="l"/>
-        <c:majorGridlines>
-          <c:spPr>
-            <a:ln w="9525" cap="flat" cmpd="sng" algn="ctr">
-              <a:solidFill>
-                <a:schemeClr val="tx1">
-                  <a:lumMod val="15000"/>
-                  <a:lumOff val="85000"/>
-                </a:schemeClr>
-              </a:solidFill>
-              <a:round/>
-            </a:ln>
-            <a:effectLst/>
-          </c:spPr>
-        </c:majorGridlines>
-        <c:numFmt formatCode="General" sourceLinked="1"/>
-        <c:majorTickMark val="none"/>
-        <c:minorTickMark val="none"/>
-        <c:tickLblPos val="nextTo"/>
-        <c:spPr>
-          <a:noFill/>
-          <a:ln>
-            <a:noFill/>
-          </a:ln>
-          <a:effectLst/>
-        </c:spPr>
-        <c:txPr>
-          <a:bodyPr rot="-60000000" spcFirstLastPara="1" vertOverflow="ellipsis" vert="horz" wrap="square" anchor="ctr" anchorCtr="1"/>
-          <a:lstStyle/>
-          <a:p>
-            <a:pPr>
-              <a:defRPr sz="1197" b="0" i="0" u="none" strike="noStrike" kern="1200" baseline="0">
-                <a:solidFill>
-                  <a:schemeClr val="tx1">
-                    <a:lumMod val="65000"/>
-                    <a:lumOff val="35000"/>
-                  </a:schemeClr>
-                </a:solidFill>
-                <a:latin typeface="+mn-lt"/>
-                <a:ea typeface="+mn-ea"/>
-                <a:cs typeface="+mn-cs"/>
-              </a:defRPr>
-            </a:pPr>
-            <a:endParaRPr lang="en-US"/>
-          </a:p>
-        </c:txPr>
-        <c:crossAx val="878155472"/>
-        <c:crosses val="autoZero"/>
-        <c:crossBetween val="between"/>
-      </c:valAx>
-      <c:spPr>
-        <a:noFill/>
-        <a:ln>
-          <a:noFill/>
-        </a:ln>
-        <a:effectLst/>
-      </c:spPr>
-    </c:plotArea>
-    <c:legend>
-      <c:legendPos val="b"/>
-      <c:overlay val="0"/>
-      <c:spPr>
-        <a:noFill/>
-        <a:ln>
-          <a:noFill/>
-        </a:ln>
-        <a:effectLst/>
-      </c:spPr>
-      <c:txPr>
-        <a:bodyPr rot="0" spcFirstLastPara="1" vertOverflow="ellipsis" vert="horz" wrap="square" anchor="ctr" anchorCtr="1"/>
-        <a:lstStyle/>
-        <a:p>
-          <a:pPr>
-            <a:defRPr sz="1197" b="0" i="0" u="none" strike="noStrike" kern="1200" baseline="0">
-              <a:solidFill>
-                <a:schemeClr val="tx1">
-                  <a:lumMod val="65000"/>
-                  <a:lumOff val="35000"/>
-                </a:schemeClr>
-              </a:solidFill>
-              <a:latin typeface="+mn-lt"/>
-              <a:ea typeface="+mn-ea"/>
-              <a:cs typeface="+mn-cs"/>
-            </a:defRPr>
-          </a:pPr>
-          <a:endParaRPr lang="en-US"/>
-        </a:p>
-      </c:txPr>
-    </c:legend>
-    <c:plotVisOnly val="1"/>
-    <c:dispBlanksAs val="gap"/>
-    <c:showDLblsOverMax val="0"/>
-    <c:extLst>
-      <c:ext xmlns:c16r3="http://schemas.microsoft.com/office/drawing/2017/03/chart" uri="{56B9EC1D-385E-4148-901F-78D8002777C0}">
-        <c16r3:dataDisplayOptions16>
-          <c16r3:dispNaAsBlank val="1"/>
-        </c16r3:dataDisplayOptions16>
-      </c:ext>
-    </c:extLst>
-  </c:chart>
-  <c:spPr>
-    <a:noFill/>
-    <a:ln>
-      <a:noFill/>
-    </a:ln>
-    <a:effectLst/>
-  </c:spPr>
-  <c:txPr>
-    <a:bodyPr/>
-    <a:lstStyle/>
-    <a:p>
-      <a:pPr>
-        <a:defRPr/>
-      </a:pPr>
-      <a:endParaRPr lang="en-US"/>
-    </a:p>
-  </c:txPr>
-  <c:externalData r:id="rId3">
-    <c:autoUpdate val="0"/>
-  </c:externalData>
-</c:chartSpace>
-</file>
-
-<file path=ppt/charts/chart2.xml><?xml version="1.0" encoding="utf-8"?>
 <c:chartSpace xmlns:c="http://schemas.openxmlformats.org/drawingml/2006/chart" xmlns:a="http://schemas.openxmlformats.org/drawingml/2006/main" xmlns:r="http://schemas.openxmlformats.org/officeDocument/2006/relationships" xmlns:c16r2="http://schemas.microsoft.com/office/drawing/2015/06/chart">
   <c:date1904 val="0"/>
   <c:lang val="en-US"/>
@@ -1288,6 +824,520 @@
 </c:chartSpace>
 </file>
 
+<file path=ppt/charts/chart2.xml><?xml version="1.0" encoding="utf-8"?>
+<c:chartSpace xmlns:c="http://schemas.openxmlformats.org/drawingml/2006/chart" xmlns:a="http://schemas.openxmlformats.org/drawingml/2006/main" xmlns:r="http://schemas.openxmlformats.org/officeDocument/2006/relationships" xmlns:c16r2="http://schemas.microsoft.com/office/drawing/2015/06/chart">
+  <c:date1904 val="0"/>
+  <c:lang val="en-US"/>
+  <c:roundedCorners val="0"/>
+  <mc:AlternateContent xmlns:mc="http://schemas.openxmlformats.org/markup-compatibility/2006">
+    <mc:Choice xmlns:c14="http://schemas.microsoft.com/office/drawing/2007/8/2/chart" Requires="c14">
+      <c14:style val="102"/>
+    </mc:Choice>
+    <mc:Fallback>
+      <c:style val="2"/>
+    </mc:Fallback>
+  </mc:AlternateContent>
+  <c:chart>
+    <c:title>
+      <c:tx>
+        <c:rich>
+          <a:bodyPr rot="0" spcFirstLastPara="1" vertOverflow="ellipsis" vert="horz" wrap="square" anchor="ctr" anchorCtr="1"/>
+          <a:lstStyle/>
+          <a:p>
+            <a:pPr>
+              <a:defRPr sz="1862" b="0" i="0" u="none" strike="noStrike" kern="1200" spc="0" baseline="0">
+                <a:solidFill>
+                  <a:schemeClr val="tx1">
+                    <a:lumMod val="65000"/>
+                    <a:lumOff val="35000"/>
+                  </a:schemeClr>
+                </a:solidFill>
+                <a:latin typeface="+mn-lt"/>
+                <a:ea typeface="+mn-ea"/>
+                <a:cs typeface="+mn-cs"/>
+              </a:defRPr>
+            </a:pPr>
+            <a:r>
+              <a:rPr lang="en-US" dirty="0"/>
+              <a:t>Performance of each model before and after pre-processing</a:t>
+            </a:r>
+          </a:p>
+        </c:rich>
+      </c:tx>
+      <c:overlay val="0"/>
+      <c:spPr>
+        <a:noFill/>
+        <a:ln>
+          <a:noFill/>
+        </a:ln>
+        <a:effectLst/>
+      </c:spPr>
+      <c:txPr>
+        <a:bodyPr rot="0" spcFirstLastPara="1" vertOverflow="ellipsis" vert="horz" wrap="square" anchor="ctr" anchorCtr="1"/>
+        <a:lstStyle/>
+        <a:p>
+          <a:pPr>
+            <a:defRPr sz="1862" b="0" i="0" u="none" strike="noStrike" kern="1200" spc="0" baseline="0">
+              <a:solidFill>
+                <a:schemeClr val="tx1">
+                  <a:lumMod val="65000"/>
+                  <a:lumOff val="35000"/>
+                </a:schemeClr>
+              </a:solidFill>
+              <a:latin typeface="+mn-lt"/>
+              <a:ea typeface="+mn-ea"/>
+              <a:cs typeface="+mn-cs"/>
+            </a:defRPr>
+          </a:pPr>
+          <a:endParaRPr lang="en-US"/>
+        </a:p>
+      </c:txPr>
+    </c:title>
+    <c:autoTitleDeleted val="0"/>
+    <c:plotArea>
+      <c:layout/>
+      <c:barChart>
+        <c:barDir val="col"/>
+        <c:grouping val="clustered"/>
+        <c:varyColors val="0"/>
+        <c:ser>
+          <c:idx val="0"/>
+          <c:order val="0"/>
+          <c:tx>
+            <c:strRef>
+              <c:f>Sheet1!$B$1</c:f>
+              <c:strCache>
+                <c:ptCount val="1"/>
+                <c:pt idx="0">
+                  <c:v>Before</c:v>
+                </c:pt>
+              </c:strCache>
+            </c:strRef>
+          </c:tx>
+          <c:spPr>
+            <a:solidFill>
+              <a:schemeClr val="accent1"/>
+            </a:solidFill>
+            <a:ln>
+              <a:noFill/>
+            </a:ln>
+            <a:effectLst/>
+          </c:spPr>
+          <c:invertIfNegative val="0"/>
+          <c:dLbls>
+            <c:spPr>
+              <a:noFill/>
+              <a:ln>
+                <a:noFill/>
+              </a:ln>
+              <a:effectLst/>
+            </c:spPr>
+            <c:txPr>
+              <a:bodyPr rot="0" spcFirstLastPara="1" vertOverflow="ellipsis" vert="horz" wrap="square" lIns="38100" tIns="19050" rIns="38100" bIns="19050" anchor="ctr" anchorCtr="1">
+                <a:spAutoFit/>
+              </a:bodyPr>
+              <a:lstStyle/>
+              <a:p>
+                <a:pPr>
+                  <a:defRPr sz="1197" b="0" i="0" u="none" strike="noStrike" kern="1200" baseline="0">
+                    <a:solidFill>
+                      <a:schemeClr val="tx1">
+                        <a:lumMod val="75000"/>
+                        <a:lumOff val="25000"/>
+                      </a:schemeClr>
+                    </a:solidFill>
+                    <a:latin typeface="+mn-lt"/>
+                    <a:ea typeface="+mn-ea"/>
+                    <a:cs typeface="+mn-cs"/>
+                  </a:defRPr>
+                </a:pPr>
+                <a:endParaRPr lang="en-US"/>
+              </a:p>
+            </c:txPr>
+            <c:showLegendKey val="0"/>
+            <c:showVal val="1"/>
+            <c:showCatName val="0"/>
+            <c:showSerName val="0"/>
+            <c:showPercent val="0"/>
+            <c:showBubbleSize val="0"/>
+            <c:showLeaderLines val="0"/>
+            <c:extLst>
+              <c:ext xmlns:c15="http://schemas.microsoft.com/office/drawing/2012/chart" uri="{CE6537A1-D6FC-4f65-9D91-7224C49458BB}">
+                <c15:showLeaderLines val="1"/>
+                <c15:leaderLines>
+                  <c:spPr>
+                    <a:ln w="9525" cap="flat" cmpd="sng" algn="ctr">
+                      <a:solidFill>
+                        <a:schemeClr val="tx1">
+                          <a:lumMod val="35000"/>
+                          <a:lumOff val="65000"/>
+                        </a:schemeClr>
+                      </a:solidFill>
+                      <a:round/>
+                    </a:ln>
+                    <a:effectLst/>
+                  </c:spPr>
+                </c15:leaderLines>
+              </c:ext>
+            </c:extLst>
+          </c:dLbls>
+          <c:cat>
+            <c:strRef>
+              <c:f>Sheet1!$A$2:$A$4</c:f>
+              <c:strCache>
+                <c:ptCount val="3"/>
+                <c:pt idx="0">
+                  <c:v>Baseline</c:v>
+                </c:pt>
+                <c:pt idx="1">
+                  <c:v>Intermediate</c:v>
+                </c:pt>
+                <c:pt idx="2">
+                  <c:v>Advanced</c:v>
+                </c:pt>
+              </c:strCache>
+            </c:strRef>
+          </c:cat>
+          <c:val>
+            <c:numRef>
+              <c:f>Sheet1!$B$2:$B$4</c:f>
+              <c:numCache>
+                <c:formatCode>General</c:formatCode>
+                <c:ptCount val="3"/>
+                <c:pt idx="0">
+                  <c:v>86</c:v>
+                </c:pt>
+                <c:pt idx="1">
+                  <c:v>57</c:v>
+                </c:pt>
+                <c:pt idx="2">
+                  <c:v>82</c:v>
+                </c:pt>
+              </c:numCache>
+            </c:numRef>
+          </c:val>
+          <c:extLst>
+            <c:ext xmlns:c16="http://schemas.microsoft.com/office/drawing/2014/chart" uri="{C3380CC4-5D6E-409C-BE32-E72D297353CC}">
+              <c16:uniqueId val="{00000000-1863-4A12-B1AD-CBE06067C796}"/>
+            </c:ext>
+          </c:extLst>
+        </c:ser>
+        <c:ser>
+          <c:idx val="1"/>
+          <c:order val="1"/>
+          <c:tx>
+            <c:strRef>
+              <c:f>Sheet1!$C$1</c:f>
+              <c:strCache>
+                <c:ptCount val="1"/>
+                <c:pt idx="0">
+                  <c:v>After</c:v>
+                </c:pt>
+              </c:strCache>
+            </c:strRef>
+          </c:tx>
+          <c:spPr>
+            <a:solidFill>
+              <a:schemeClr val="accent2"/>
+            </a:solidFill>
+            <a:ln>
+              <a:noFill/>
+            </a:ln>
+            <a:effectLst/>
+          </c:spPr>
+          <c:invertIfNegative val="0"/>
+          <c:dLbls>
+            <c:spPr>
+              <a:noFill/>
+              <a:ln>
+                <a:noFill/>
+              </a:ln>
+              <a:effectLst/>
+            </c:spPr>
+            <c:txPr>
+              <a:bodyPr rot="0" spcFirstLastPara="1" vertOverflow="ellipsis" vert="horz" wrap="square" lIns="38100" tIns="19050" rIns="38100" bIns="19050" anchor="ctr" anchorCtr="1">
+                <a:spAutoFit/>
+              </a:bodyPr>
+              <a:lstStyle/>
+              <a:p>
+                <a:pPr>
+                  <a:defRPr sz="1197" b="0" i="0" u="none" strike="noStrike" kern="1200" baseline="0">
+                    <a:solidFill>
+                      <a:schemeClr val="tx1">
+                        <a:lumMod val="75000"/>
+                        <a:lumOff val="25000"/>
+                      </a:schemeClr>
+                    </a:solidFill>
+                    <a:latin typeface="+mn-lt"/>
+                    <a:ea typeface="+mn-ea"/>
+                    <a:cs typeface="+mn-cs"/>
+                  </a:defRPr>
+                </a:pPr>
+                <a:endParaRPr lang="en-US"/>
+              </a:p>
+            </c:txPr>
+            <c:showLegendKey val="0"/>
+            <c:showVal val="1"/>
+            <c:showCatName val="0"/>
+            <c:showSerName val="0"/>
+            <c:showPercent val="0"/>
+            <c:showBubbleSize val="0"/>
+            <c:showLeaderLines val="0"/>
+            <c:extLst>
+              <c:ext xmlns:c15="http://schemas.microsoft.com/office/drawing/2012/chart" uri="{CE6537A1-D6FC-4f65-9D91-7224C49458BB}">
+                <c15:showLeaderLines val="1"/>
+                <c15:leaderLines>
+                  <c:spPr>
+                    <a:ln w="9525" cap="flat" cmpd="sng" algn="ctr">
+                      <a:solidFill>
+                        <a:schemeClr val="tx1">
+                          <a:lumMod val="35000"/>
+                          <a:lumOff val="65000"/>
+                        </a:schemeClr>
+                      </a:solidFill>
+                      <a:round/>
+                    </a:ln>
+                    <a:effectLst/>
+                  </c:spPr>
+                </c15:leaderLines>
+              </c:ext>
+            </c:extLst>
+          </c:dLbls>
+          <c:cat>
+            <c:strRef>
+              <c:f>Sheet1!$A$2:$A$4</c:f>
+              <c:strCache>
+                <c:ptCount val="3"/>
+                <c:pt idx="0">
+                  <c:v>Baseline</c:v>
+                </c:pt>
+                <c:pt idx="1">
+                  <c:v>Intermediate</c:v>
+                </c:pt>
+                <c:pt idx="2">
+                  <c:v>Advanced</c:v>
+                </c:pt>
+              </c:strCache>
+            </c:strRef>
+          </c:cat>
+          <c:val>
+            <c:numRef>
+              <c:f>Sheet1!$C$2:$C$4</c:f>
+              <c:numCache>
+                <c:formatCode>General</c:formatCode>
+                <c:ptCount val="3"/>
+                <c:pt idx="0">
+                  <c:v>89</c:v>
+                </c:pt>
+                <c:pt idx="1">
+                  <c:v>85</c:v>
+                </c:pt>
+                <c:pt idx="2">
+                  <c:v>84</c:v>
+                </c:pt>
+              </c:numCache>
+            </c:numRef>
+          </c:val>
+          <c:extLst>
+            <c:ext xmlns:c16="http://schemas.microsoft.com/office/drawing/2014/chart" uri="{C3380CC4-5D6E-409C-BE32-E72D297353CC}">
+              <c16:uniqueId val="{00000001-1863-4A12-B1AD-CBE06067C796}"/>
+            </c:ext>
+          </c:extLst>
+        </c:ser>
+        <c:dLbls>
+          <c:showLegendKey val="0"/>
+          <c:showVal val="0"/>
+          <c:showCatName val="0"/>
+          <c:showSerName val="0"/>
+          <c:showPercent val="0"/>
+          <c:showBubbleSize val="0"/>
+        </c:dLbls>
+        <c:gapWidth val="219"/>
+        <c:overlap val="-27"/>
+        <c:axId val="1307464303"/>
+        <c:axId val="1307447983"/>
+      </c:barChart>
+      <c:catAx>
+        <c:axId val="1307464303"/>
+        <c:scaling>
+          <c:orientation val="minMax"/>
+        </c:scaling>
+        <c:delete val="0"/>
+        <c:axPos val="b"/>
+        <c:numFmt formatCode="General" sourceLinked="1"/>
+        <c:majorTickMark val="none"/>
+        <c:minorTickMark val="none"/>
+        <c:tickLblPos val="nextTo"/>
+        <c:spPr>
+          <a:noFill/>
+          <a:ln w="9525" cap="flat" cmpd="sng" algn="ctr">
+            <a:solidFill>
+              <a:schemeClr val="tx1">
+                <a:lumMod val="15000"/>
+                <a:lumOff val="85000"/>
+              </a:schemeClr>
+            </a:solidFill>
+            <a:round/>
+          </a:ln>
+          <a:effectLst/>
+        </c:spPr>
+        <c:txPr>
+          <a:bodyPr rot="-60000000" spcFirstLastPara="1" vertOverflow="ellipsis" vert="horz" wrap="square" anchor="ctr" anchorCtr="1"/>
+          <a:lstStyle/>
+          <a:p>
+            <a:pPr>
+              <a:defRPr sz="1197" b="0" i="0" u="none" strike="noStrike" kern="1200" baseline="0">
+                <a:solidFill>
+                  <a:schemeClr val="tx1">
+                    <a:lumMod val="65000"/>
+                    <a:lumOff val="35000"/>
+                  </a:schemeClr>
+                </a:solidFill>
+                <a:latin typeface="+mn-lt"/>
+                <a:ea typeface="+mn-ea"/>
+                <a:cs typeface="+mn-cs"/>
+              </a:defRPr>
+            </a:pPr>
+            <a:endParaRPr lang="en-US"/>
+          </a:p>
+        </c:txPr>
+        <c:crossAx val="1307447983"/>
+        <c:crosses val="autoZero"/>
+        <c:auto val="1"/>
+        <c:lblAlgn val="ctr"/>
+        <c:lblOffset val="100"/>
+        <c:noMultiLvlLbl val="0"/>
+      </c:catAx>
+      <c:valAx>
+        <c:axId val="1307447983"/>
+        <c:scaling>
+          <c:orientation val="minMax"/>
+          <c:min val="50"/>
+        </c:scaling>
+        <c:delete val="0"/>
+        <c:axPos val="l"/>
+        <c:majorGridlines>
+          <c:spPr>
+            <a:ln w="9525" cap="flat" cmpd="sng" algn="ctr">
+              <a:solidFill>
+                <a:schemeClr val="tx1">
+                  <a:lumMod val="15000"/>
+                  <a:lumOff val="85000"/>
+                </a:schemeClr>
+              </a:solidFill>
+              <a:round/>
+            </a:ln>
+            <a:effectLst/>
+          </c:spPr>
+        </c:majorGridlines>
+        <c:numFmt formatCode="General" sourceLinked="1"/>
+        <c:majorTickMark val="none"/>
+        <c:minorTickMark val="none"/>
+        <c:tickLblPos val="nextTo"/>
+        <c:spPr>
+          <a:noFill/>
+          <a:ln>
+            <a:noFill/>
+          </a:ln>
+          <a:effectLst/>
+        </c:spPr>
+        <c:txPr>
+          <a:bodyPr rot="-60000000" spcFirstLastPara="1" vertOverflow="ellipsis" vert="horz" wrap="square" anchor="ctr" anchorCtr="1"/>
+          <a:lstStyle/>
+          <a:p>
+            <a:pPr>
+              <a:defRPr sz="1197" b="0" i="0" u="none" strike="noStrike" kern="1200" baseline="0">
+                <a:solidFill>
+                  <a:schemeClr val="tx1">
+                    <a:lumMod val="65000"/>
+                    <a:lumOff val="35000"/>
+                  </a:schemeClr>
+                </a:solidFill>
+                <a:latin typeface="+mn-lt"/>
+                <a:ea typeface="+mn-ea"/>
+                <a:cs typeface="+mn-cs"/>
+              </a:defRPr>
+            </a:pPr>
+            <a:endParaRPr lang="en-US"/>
+          </a:p>
+        </c:txPr>
+        <c:crossAx val="1307464303"/>
+        <c:crosses val="autoZero"/>
+        <c:crossBetween val="between"/>
+      </c:valAx>
+      <c:spPr>
+        <a:noFill/>
+        <a:ln>
+          <a:noFill/>
+        </a:ln>
+        <a:effectLst/>
+      </c:spPr>
+    </c:plotArea>
+    <c:legend>
+      <c:legendPos val="b"/>
+      <c:overlay val="0"/>
+      <c:spPr>
+        <a:noFill/>
+        <a:ln>
+          <a:noFill/>
+        </a:ln>
+        <a:effectLst/>
+      </c:spPr>
+      <c:txPr>
+        <a:bodyPr rot="0" spcFirstLastPara="1" vertOverflow="ellipsis" vert="horz" wrap="square" anchor="ctr" anchorCtr="1"/>
+        <a:lstStyle/>
+        <a:p>
+          <a:pPr>
+            <a:defRPr sz="1197" b="0" i="0" u="none" strike="noStrike" kern="1200" baseline="0">
+              <a:solidFill>
+                <a:schemeClr val="tx1">
+                  <a:lumMod val="65000"/>
+                  <a:lumOff val="35000"/>
+                </a:schemeClr>
+              </a:solidFill>
+              <a:latin typeface="+mn-lt"/>
+              <a:ea typeface="+mn-ea"/>
+              <a:cs typeface="+mn-cs"/>
+            </a:defRPr>
+          </a:pPr>
+          <a:endParaRPr lang="en-US"/>
+        </a:p>
+      </c:txPr>
+    </c:legend>
+    <c:plotVisOnly val="1"/>
+    <c:dispBlanksAs val="gap"/>
+    <c:showDLblsOverMax val="0"/>
+    <c:extLst>
+      <c:ext xmlns:c16r3="http://schemas.microsoft.com/office/drawing/2017/03/chart" uri="{56B9EC1D-385E-4148-901F-78D8002777C0}">
+        <c16r3:dataDisplayOptions16>
+          <c16r3:dispNaAsBlank val="1"/>
+        </c16r3:dataDisplayOptions16>
+      </c:ext>
+    </c:extLst>
+  </c:chart>
+  <c:spPr>
+    <a:noFill/>
+    <a:ln>
+      <a:noFill/>
+    </a:ln>
+    <a:effectLst/>
+  </c:spPr>
+  <c:txPr>
+    <a:bodyPr/>
+    <a:lstStyle/>
+    <a:p>
+      <a:pPr>
+        <a:defRPr/>
+      </a:pPr>
+      <a:endParaRPr lang="en-US"/>
+    </a:p>
+  </c:txPr>
+  <c:externalData r:id="rId3">
+    <c:autoUpdate val="0"/>
+  </c:externalData>
+</c:chartSpace>
+</file>
+
 <file path=ppt/charts/chart3.xml><?xml version="1.0" encoding="utf-8"?>
 <c:chartSpace xmlns:c="http://schemas.openxmlformats.org/drawingml/2006/chart" xmlns:a="http://schemas.openxmlformats.org/drawingml/2006/main" xmlns:r="http://schemas.openxmlformats.org/officeDocument/2006/relationships" xmlns:c16r2="http://schemas.microsoft.com/office/drawing/2015/06/chart">
   <c:date1904 val="0"/>
@@ -7080,7 +7130,7 @@
           <a:p>
             <a:fld id="{3A0D4510-12A4-45D4-A475-E15EB597DE64}" type="datetimeFigureOut">
               <a:rPr lang="en-US" smtClean="0"/>
-              <a:t>08-Feb-26</a:t>
+              <a:t>11-Feb-26</a:t>
             </a:fld>
             <a:endParaRPr lang="en-US"/>
           </a:p>
@@ -7278,7 +7328,7 @@
           <a:p>
             <a:fld id="{3A0D4510-12A4-45D4-A475-E15EB597DE64}" type="datetimeFigureOut">
               <a:rPr lang="en-US" smtClean="0"/>
-              <a:t>08-Feb-26</a:t>
+              <a:t>11-Feb-26</a:t>
             </a:fld>
             <a:endParaRPr lang="en-US"/>
           </a:p>
@@ -7486,7 +7536,7 @@
           <a:p>
             <a:fld id="{3A0D4510-12A4-45D4-A475-E15EB597DE64}" type="datetimeFigureOut">
               <a:rPr lang="en-US" smtClean="0"/>
-              <a:t>08-Feb-26</a:t>
+              <a:t>11-Feb-26</a:t>
             </a:fld>
             <a:endParaRPr lang="en-US"/>
           </a:p>
@@ -7684,7 +7734,7 @@
           <a:p>
             <a:fld id="{3A0D4510-12A4-45D4-A475-E15EB597DE64}" type="datetimeFigureOut">
               <a:rPr lang="en-US" smtClean="0"/>
-              <a:t>08-Feb-26</a:t>
+              <a:t>11-Feb-26</a:t>
             </a:fld>
             <a:endParaRPr lang="en-US"/>
           </a:p>
@@ -7959,7 +8009,7 @@
           <a:p>
             <a:fld id="{3A0D4510-12A4-45D4-A475-E15EB597DE64}" type="datetimeFigureOut">
               <a:rPr lang="en-US" smtClean="0"/>
-              <a:t>08-Feb-26</a:t>
+              <a:t>11-Feb-26</a:t>
             </a:fld>
             <a:endParaRPr lang="en-US"/>
           </a:p>
@@ -8224,7 +8274,7 @@
           <a:p>
             <a:fld id="{3A0D4510-12A4-45D4-A475-E15EB597DE64}" type="datetimeFigureOut">
               <a:rPr lang="en-US" smtClean="0"/>
-              <a:t>08-Feb-26</a:t>
+              <a:t>11-Feb-26</a:t>
             </a:fld>
             <a:endParaRPr lang="en-US"/>
           </a:p>
@@ -8636,7 +8686,7 @@
           <a:p>
             <a:fld id="{3A0D4510-12A4-45D4-A475-E15EB597DE64}" type="datetimeFigureOut">
               <a:rPr lang="en-US" smtClean="0"/>
-              <a:t>08-Feb-26</a:t>
+              <a:t>11-Feb-26</a:t>
             </a:fld>
             <a:endParaRPr lang="en-US"/>
           </a:p>
@@ -8777,7 +8827,7 @@
           <a:p>
             <a:fld id="{3A0D4510-12A4-45D4-A475-E15EB597DE64}" type="datetimeFigureOut">
               <a:rPr lang="en-US" smtClean="0"/>
-              <a:t>08-Feb-26</a:t>
+              <a:t>11-Feb-26</a:t>
             </a:fld>
             <a:endParaRPr lang="en-US"/>
           </a:p>
@@ -8890,7 +8940,7 @@
           <a:p>
             <a:fld id="{3A0D4510-12A4-45D4-A475-E15EB597DE64}" type="datetimeFigureOut">
               <a:rPr lang="en-US" smtClean="0"/>
-              <a:t>08-Feb-26</a:t>
+              <a:t>11-Feb-26</a:t>
             </a:fld>
             <a:endParaRPr lang="en-US"/>
           </a:p>
@@ -9201,7 +9251,7 @@
           <a:p>
             <a:fld id="{3A0D4510-12A4-45D4-A475-E15EB597DE64}" type="datetimeFigureOut">
               <a:rPr lang="en-US" smtClean="0"/>
-              <a:t>08-Feb-26</a:t>
+              <a:t>11-Feb-26</a:t>
             </a:fld>
             <a:endParaRPr lang="en-US"/>
           </a:p>
@@ -9489,7 +9539,7 @@
           <a:p>
             <a:fld id="{3A0D4510-12A4-45D4-A475-E15EB597DE64}" type="datetimeFigureOut">
               <a:rPr lang="en-US" smtClean="0"/>
-              <a:t>08-Feb-26</a:t>
+              <a:t>11-Feb-26</a:t>
             </a:fld>
             <a:endParaRPr lang="en-US"/>
           </a:p>
@@ -9730,7 +9780,7 @@
           <a:p>
             <a:fld id="{3A0D4510-12A4-45D4-A475-E15EB597DE64}" type="datetimeFigureOut">
               <a:rPr lang="en-US" smtClean="0"/>
-              <a:t>08-Feb-26</a:t>
+              <a:t>11-Feb-26</a:t>
             </a:fld>
             <a:endParaRPr lang="en-US"/>
           </a:p>
@@ -10176,16 +10226,22 @@
           <a:lstStyle/>
           <a:p>
             <a:br>
-              <a:rPr lang="en-US" sz="4000" dirty="0">
+              <a:rPr lang="en-US" sz="4000">
                 <a:latin typeface="Times New Roman" panose="02020603050405020304" pitchFamily="18" charset="0"/>
                 <a:cs typeface="Times New Roman" panose="02020603050405020304" pitchFamily="18" charset="0"/>
               </a:rPr>
             </a:br>
             <a:r>
+              <a:rPr lang="en-US" sz="4000">
+                <a:cs typeface="Times New Roman" panose="02020603050405020304" pitchFamily="18" charset="0"/>
+              </a:rPr>
+              <a:t>BSc </a:t>
+            </a:r>
+            <a:r>
               <a:rPr lang="en-US" sz="4000" dirty="0">
                 <a:cs typeface="Times New Roman" panose="02020603050405020304" pitchFamily="18" charset="0"/>
               </a:rPr>
-              <a:t>Graduate thesis</a:t>
+              <a:t>thesis</a:t>
             </a:r>
             <a:br>
               <a:rPr lang="en-US" sz="4000" dirty="0">
@@ -11864,7 +11920,13 @@
   <p:cSld>
     <p:spTree>
       <p:nvGrpSpPr>
-        <p:cNvPr id="1" name=""/>
+        <p:cNvPr id="1" name="">
+          <a:extLst>
+            <a:ext uri="{FF2B5EF4-FFF2-40B4-BE49-F238E27FC236}">
+              <a16:creationId xmlns:a16="http://schemas.microsoft.com/office/drawing/2014/main" id="{771EFCE4-B72B-01DD-2065-239F138E3581}"/>
+            </a:ext>
+          </a:extLst>
+        </p:cNvPr>
         <p:cNvGrpSpPr/>
         <p:nvPr/>
       </p:nvGrpSpPr>
@@ -11881,7 +11943,7 @@
           <p:cNvPr id="2" name="Title 1">
             <a:extLst>
               <a:ext uri="{FF2B5EF4-FFF2-40B4-BE49-F238E27FC236}">
-                <a16:creationId xmlns:a16="http://schemas.microsoft.com/office/drawing/2014/main" id="{09ED17D6-2FAD-11AF-04F1-7CEF8DC576FC}"/>
+                <a16:creationId xmlns:a16="http://schemas.microsoft.com/office/drawing/2014/main" id="{D89B38D0-7E3A-04A6-6FF1-562C3E83CD83}"/>
               </a:ext>
             </a:extLst>
           </p:cNvPr>
@@ -11892,54 +11954,30 @@
             <p:ph type="title"/>
           </p:nvPr>
         </p:nvSpPr>
-        <p:spPr/>
+        <p:spPr>
+          <a:xfrm>
+            <a:off x="838200" y="2766218"/>
+            <a:ext cx="10515600" cy="1325563"/>
+          </a:xfrm>
+        </p:spPr>
         <p:txBody>
-          <a:bodyPr/>
+          <a:bodyPr>
+            <a:normAutofit/>
+          </a:bodyPr>
           <a:lstStyle/>
           <a:p>
             <a:pPr algn="ctr"/>
             <a:r>
-              <a:rPr lang="en-US" dirty="0"/>
-              <a:t>Impact of Pre-Processing</a:t>
+              <a:rPr lang="en-US" sz="6000" dirty="0"/>
+              <a:t>Review of the Data</a:t>
             </a:r>
           </a:p>
         </p:txBody>
       </p:sp>
-      <p:graphicFrame>
-        <p:nvGraphicFramePr>
-          <p:cNvPr id="6" name="Content Placeholder 5">
-            <a:extLst>
-              <a:ext uri="{FF2B5EF4-FFF2-40B4-BE49-F238E27FC236}">
-                <a16:creationId xmlns:a16="http://schemas.microsoft.com/office/drawing/2014/main" id="{EE1216B5-8CD6-DAB2-13BB-8A866401F04E}"/>
-              </a:ext>
-            </a:extLst>
-          </p:cNvPr>
-          <p:cNvGraphicFramePr>
-            <a:graphicFrameLocks noGrp="1"/>
-          </p:cNvGraphicFramePr>
-          <p:nvPr>
-            <p:ph idx="1"/>
-            <p:extLst>
-              <p:ext uri="{D42A27DB-BD31-4B8C-83A1-F6EECF244321}">
-                <p14:modId xmlns:p14="http://schemas.microsoft.com/office/powerpoint/2010/main" val="210559654"/>
-              </p:ext>
-            </p:extLst>
-          </p:nvPr>
-        </p:nvGraphicFramePr>
-        <p:xfrm>
-          <a:off x="838200" y="1825625"/>
-          <a:ext cx="10515600" cy="4351338"/>
-        </p:xfrm>
-        <a:graphic>
-          <a:graphicData uri="http://schemas.openxmlformats.org/drawingml/2006/chart">
-            <c:chart xmlns:c="http://schemas.openxmlformats.org/drawingml/2006/chart" xmlns:r="http://schemas.openxmlformats.org/officeDocument/2006/relationships" r:id="rId2"/>
-          </a:graphicData>
-        </a:graphic>
-      </p:graphicFrame>
     </p:spTree>
     <p:extLst>
       <p:ext uri="{BB962C8B-B14F-4D97-AF65-F5344CB8AC3E}">
-        <p14:creationId xmlns:p14="http://schemas.microsoft.com/office/powerpoint/2010/main" val="4165979918"/>
+        <p14:creationId xmlns:p14="http://schemas.microsoft.com/office/powerpoint/2010/main" val="1541240894"/>
       </p:ext>
     </p:extLst>
   </p:cSld>
@@ -12044,78 +12082,6 @@
   <p:cSld>
     <p:spTree>
       <p:nvGrpSpPr>
-        <p:cNvPr id="1" name="">
-          <a:extLst>
-            <a:ext uri="{FF2B5EF4-FFF2-40B4-BE49-F238E27FC236}">
-              <a16:creationId xmlns:a16="http://schemas.microsoft.com/office/drawing/2014/main" id="{771EFCE4-B72B-01DD-2065-239F138E3581}"/>
-            </a:ext>
-          </a:extLst>
-        </p:cNvPr>
-        <p:cNvGrpSpPr/>
-        <p:nvPr/>
-      </p:nvGrpSpPr>
-      <p:grpSpPr>
-        <a:xfrm>
-          <a:off x="0" y="0"/>
-          <a:ext cx="0" cy="0"/>
-          <a:chOff x="0" y="0"/>
-          <a:chExt cx="0" cy="0"/>
-        </a:xfrm>
-      </p:grpSpPr>
-      <p:sp>
-        <p:nvSpPr>
-          <p:cNvPr id="2" name="Title 1">
-            <a:extLst>
-              <a:ext uri="{FF2B5EF4-FFF2-40B4-BE49-F238E27FC236}">
-                <a16:creationId xmlns:a16="http://schemas.microsoft.com/office/drawing/2014/main" id="{D89B38D0-7E3A-04A6-6FF1-562C3E83CD83}"/>
-              </a:ext>
-            </a:extLst>
-          </p:cNvPr>
-          <p:cNvSpPr>
-            <a:spLocks noGrp="1"/>
-          </p:cNvSpPr>
-          <p:nvPr>
-            <p:ph type="title"/>
-          </p:nvPr>
-        </p:nvSpPr>
-        <p:spPr>
-          <a:xfrm>
-            <a:off x="838200" y="2766218"/>
-            <a:ext cx="10515600" cy="1325563"/>
-          </a:xfrm>
-        </p:spPr>
-        <p:txBody>
-          <a:bodyPr>
-            <a:normAutofit/>
-          </a:bodyPr>
-          <a:lstStyle/>
-          <a:p>
-            <a:pPr algn="ctr"/>
-            <a:r>
-              <a:rPr lang="en-US" sz="6000" dirty="0"/>
-              <a:t>Review of the Data</a:t>
-            </a:r>
-          </a:p>
-        </p:txBody>
-      </p:sp>
-    </p:spTree>
-    <p:extLst>
-      <p:ext uri="{BB962C8B-B14F-4D97-AF65-F5344CB8AC3E}">
-        <p14:creationId xmlns:p14="http://schemas.microsoft.com/office/powerpoint/2010/main" val="1541240894"/>
-      </p:ext>
-    </p:extLst>
-  </p:cSld>
-  <p:clrMapOvr>
-    <a:masterClrMapping/>
-  </p:clrMapOvr>
-</p:sld>
-</file>
-
-<file path=ppt/slides/slide25.xml><?xml version="1.0" encoding="utf-8"?>
-<p:sld xmlns:a="http://schemas.openxmlformats.org/drawingml/2006/main" xmlns:r="http://schemas.openxmlformats.org/officeDocument/2006/relationships" xmlns:p="http://schemas.openxmlformats.org/presentationml/2006/main">
-  <p:cSld>
-    <p:spTree>
-      <p:nvGrpSpPr>
         <p:cNvPr id="1" name=""/>
         <p:cNvGrpSpPr/>
         <p:nvPr/>
@@ -12144,7 +12110,12 @@
             <p:ph type="title"/>
           </p:nvPr>
         </p:nvSpPr>
-        <p:spPr/>
+        <p:spPr>
+          <a:xfrm>
+            <a:off x="839788" y="457200"/>
+            <a:ext cx="3932237" cy="1196109"/>
+          </a:xfrm>
+        </p:spPr>
         <p:txBody>
           <a:bodyPr>
             <a:normAutofit/>
@@ -12153,18 +12124,49 @@
           <a:p>
             <a:pPr algn="ctr"/>
             <a:r>
-              <a:rPr lang="en-US" sz="6000" dirty="0"/>
+              <a:rPr lang="en-US" dirty="0"/>
               <a:t>What does the data tell us?</a:t>
             </a:r>
           </a:p>
         </p:txBody>
       </p:sp>
+      <p:graphicFrame>
+        <p:nvGraphicFramePr>
+          <p:cNvPr id="7" name="Content Placeholder 6">
+            <a:extLst>
+              <a:ext uri="{FF2B5EF4-FFF2-40B4-BE49-F238E27FC236}">
+                <a16:creationId xmlns:a16="http://schemas.microsoft.com/office/drawing/2014/main" id="{F4840992-6D81-E278-65C2-E6663D1BF144}"/>
+              </a:ext>
+            </a:extLst>
+          </p:cNvPr>
+          <p:cNvGraphicFramePr>
+            <a:graphicFrameLocks noGrp="1"/>
+          </p:cNvGraphicFramePr>
+          <p:nvPr>
+            <p:ph idx="1"/>
+            <p:extLst>
+              <p:ext uri="{D42A27DB-BD31-4B8C-83A1-F6EECF244321}">
+                <p14:modId xmlns:p14="http://schemas.microsoft.com/office/powerpoint/2010/main" val="149139517"/>
+              </p:ext>
+            </p:extLst>
+          </p:nvPr>
+        </p:nvGraphicFramePr>
+        <p:xfrm>
+          <a:off x="5183188" y="987425"/>
+          <a:ext cx="6172200" cy="4873625"/>
+        </p:xfrm>
+        <a:graphic>
+          <a:graphicData uri="http://schemas.openxmlformats.org/drawingml/2006/chart">
+            <c:chart xmlns:c="http://schemas.openxmlformats.org/drawingml/2006/chart" xmlns:r="http://schemas.openxmlformats.org/officeDocument/2006/relationships" r:id="rId2"/>
+          </a:graphicData>
+        </a:graphic>
+      </p:graphicFrame>
       <p:sp>
         <p:nvSpPr>
-          <p:cNvPr id="3" name="Content Placeholder 2">
+          <p:cNvPr id="4" name="Text Placeholder 3">
             <a:extLst>
               <a:ext uri="{FF2B5EF4-FFF2-40B4-BE49-F238E27FC236}">
-                <a16:creationId xmlns:a16="http://schemas.microsoft.com/office/drawing/2014/main" id="{BEBFCF2F-198A-7539-640B-B6A7038D27C5}"/>
+                <a16:creationId xmlns:a16="http://schemas.microsoft.com/office/drawing/2014/main" id="{4484BB56-089B-F4FC-9140-29BBA904EB29}"/>
               </a:ext>
             </a:extLst>
           </p:cNvPr>
@@ -12172,7 +12174,7 @@
             <a:spLocks noGrp="1"/>
           </p:cNvSpPr>
           <p:nvPr>
-            <p:ph idx="1"/>
+            <p:ph type="body" sz="half" idx="2"/>
           </p:nvPr>
         </p:nvSpPr>
         <p:spPr/>
@@ -12180,22 +12182,31 @@
           <a:bodyPr/>
           <a:lstStyle/>
           <a:p>
-            <a:r>
-              <a:rPr lang="en-US" dirty="0"/>
+            <a:pPr marL="285750" indent="-285750">
+              <a:buFont typeface="Arial" panose="020B0604020202020204" pitchFamily="34" charset="0"/>
+              <a:buChar char="•"/>
+            </a:pPr>
+            <a:r>
+              <a:rPr lang="en-US" sz="1800" dirty="0"/>
               <a:t>Firstly, we can see that the pre-processing of the data resulted in higher scores across the board.</a:t>
             </a:r>
           </a:p>
           <a:p>
-            <a:pPr marL="0" indent="0">
-              <a:buNone/>
+            <a:pPr marL="285750" indent="-285750">
+              <a:buFont typeface="Arial" panose="020B0604020202020204" pitchFamily="34" charset="0"/>
+              <a:buChar char="•"/>
+            </a:pPr>
+            <a:r>
+              <a:rPr lang="en-US" sz="1800" dirty="0"/>
+              <a:t>Notably, the intermediate models performance jumped from 57% to 85%, reinforcing the importance of pre-processing.</a:t>
+            </a:r>
+          </a:p>
+          <a:p>
+            <a:pPr marL="285750" indent="-285750">
+              <a:buFont typeface="Arial" panose="020B0604020202020204" pitchFamily="34" charset="0"/>
+              <a:buChar char="•"/>
             </a:pPr>
             <a:endParaRPr lang="en-US" dirty="0"/>
-          </a:p>
-          <a:p>
-            <a:r>
-              <a:rPr lang="en-US" dirty="0"/>
-              <a:t>Notably, the intermediate models performance jumped from 57% to 85%, reinforcing the importance of pre-processing.</a:t>
-            </a:r>
           </a:p>
           <a:p>
             <a:endParaRPr lang="en-US" dirty="0"/>
@@ -12215,7 +12226,7 @@
 </p:sld>
 </file>
 
-<file path=ppt/slides/slide26.xml><?xml version="1.0" encoding="utf-8"?>
+<file path=ppt/slides/slide25.xml><?xml version="1.0" encoding="utf-8"?>
 <p:sld xmlns:a="http://schemas.openxmlformats.org/drawingml/2006/main" xmlns:r="http://schemas.openxmlformats.org/officeDocument/2006/relationships" xmlns:p="http://schemas.openxmlformats.org/presentationml/2006/main">
   <p:cSld>
     <p:spTree>
@@ -12321,7 +12332,7 @@
 </p:sld>
 </file>
 
-<file path=ppt/slides/slide27.xml><?xml version="1.0" encoding="utf-8"?>
+<file path=ppt/slides/slide26.xml><?xml version="1.0" encoding="utf-8"?>
 <p:sld xmlns:a="http://schemas.openxmlformats.org/drawingml/2006/main" xmlns:r="http://schemas.openxmlformats.org/officeDocument/2006/relationships" xmlns:p="http://schemas.openxmlformats.org/presentationml/2006/main">
   <p:cSld>
     <p:spTree>
@@ -12520,7 +12531,7 @@
 </p:sld>
 </file>
 
-<file path=ppt/slides/slide28.xml><?xml version="1.0" encoding="utf-8"?>
+<file path=ppt/slides/slide27.xml><?xml version="1.0" encoding="utf-8"?>
 <p:sld xmlns:a="http://schemas.openxmlformats.org/drawingml/2006/main" xmlns:r="http://schemas.openxmlformats.org/officeDocument/2006/relationships" xmlns:p="http://schemas.openxmlformats.org/presentationml/2006/main">
   <p:cSld>
     <p:spTree>
@@ -12700,7 +12711,7 @@
 </p:sld>
 </file>
 
-<file path=ppt/slides/slide29.xml><?xml version="1.0" encoding="utf-8"?>
+<file path=ppt/slides/slide28.xml><?xml version="1.0" encoding="utf-8"?>
 <p:sld xmlns:a="http://schemas.openxmlformats.org/drawingml/2006/main" xmlns:r="http://schemas.openxmlformats.org/officeDocument/2006/relationships" xmlns:p="http://schemas.openxmlformats.org/presentationml/2006/main">
   <p:cSld>
     <p:spTree>
@@ -12766,274 +12777,7 @@
 </p:sld>
 </file>
 
-<file path=ppt/slides/slide3.xml><?xml version="1.0" encoding="utf-8"?>
-<p:sld xmlns:a="http://schemas.openxmlformats.org/drawingml/2006/main" xmlns:r="http://schemas.openxmlformats.org/officeDocument/2006/relationships" xmlns:p="http://schemas.openxmlformats.org/presentationml/2006/main">
-  <p:cSld>
-    <p:spTree>
-      <p:nvGrpSpPr>
-        <p:cNvPr id="1" name=""/>
-        <p:cNvGrpSpPr/>
-        <p:nvPr/>
-      </p:nvGrpSpPr>
-      <p:grpSpPr>
-        <a:xfrm>
-          <a:off x="0" y="0"/>
-          <a:ext cx="0" cy="0"/>
-          <a:chOff x="0" y="0"/>
-          <a:chExt cx="0" cy="0"/>
-        </a:xfrm>
-      </p:grpSpPr>
-      <p:sp>
-        <p:nvSpPr>
-          <p:cNvPr id="2" name="Title 1">
-            <a:extLst>
-              <a:ext uri="{FF2B5EF4-FFF2-40B4-BE49-F238E27FC236}">
-                <a16:creationId xmlns:a16="http://schemas.microsoft.com/office/drawing/2014/main" id="{459E9280-2EFC-EAAD-B90B-757337875FC3}"/>
-              </a:ext>
-            </a:extLst>
-          </p:cNvPr>
-          <p:cNvSpPr>
-            <a:spLocks noGrp="1"/>
-          </p:cNvSpPr>
-          <p:nvPr>
-            <p:ph type="title"/>
-          </p:nvPr>
-        </p:nvSpPr>
-        <p:spPr/>
-        <p:txBody>
-          <a:bodyPr>
-            <a:normAutofit/>
-          </a:bodyPr>
-          <a:lstStyle/>
-          <a:p>
-            <a:pPr algn="ctr"/>
-            <a:r>
-              <a:rPr lang="en-US" sz="6000" dirty="0"/>
-              <a:t>What is online toxicity?</a:t>
-            </a:r>
-          </a:p>
-        </p:txBody>
-      </p:sp>
-      <p:sp>
-        <p:nvSpPr>
-          <p:cNvPr id="3" name="Content Placeholder 2">
-            <a:extLst>
-              <a:ext uri="{FF2B5EF4-FFF2-40B4-BE49-F238E27FC236}">
-                <a16:creationId xmlns:a16="http://schemas.microsoft.com/office/drawing/2014/main" id="{EDA5BC2A-DC20-55AB-BA01-DDD37249D73C}"/>
-              </a:ext>
-            </a:extLst>
-          </p:cNvPr>
-          <p:cNvSpPr>
-            <a:spLocks noGrp="1"/>
-          </p:cNvSpPr>
-          <p:nvPr>
-            <p:ph idx="1"/>
-          </p:nvPr>
-        </p:nvSpPr>
-        <p:spPr/>
-        <p:txBody>
-          <a:bodyPr>
-            <a:normAutofit/>
-          </a:bodyPr>
-          <a:lstStyle/>
-          <a:p>
-            <a:pPr marL="0" indent="0">
-              <a:buNone/>
-            </a:pPr>
-            <a:r>
-              <a:rPr lang="en-US" dirty="0"/>
-              <a:t>Toxicity refers to rude, aggressive, and degrading behaviors between users.</a:t>
-            </a:r>
-          </a:p>
-          <a:p>
-            <a:pPr marL="0" indent="0">
-              <a:buNone/>
-            </a:pPr>
-            <a:r>
-              <a:rPr lang="en-US" dirty="0"/>
-              <a:t>For example:</a:t>
-            </a:r>
-          </a:p>
-          <a:p>
-            <a:pPr lvl="1"/>
-            <a:r>
-              <a:rPr lang="el-GR" sz="2800" dirty="0"/>
-              <a:t>“ #masterchefgr_xeftiles </a:t>
-            </a:r>
-            <a:r>
-              <a:rPr lang="el-GR" sz="2800" dirty="0" err="1"/>
-              <a:t>αμε</a:t>
-            </a:r>
-            <a:r>
-              <a:rPr lang="el-GR" sz="2800" dirty="0"/>
-              <a:t> στον </a:t>
-            </a:r>
-            <a:r>
-              <a:rPr lang="el-GR" sz="2800" dirty="0" err="1"/>
-              <a:t>αγυριστο</a:t>
-            </a:r>
-            <a:r>
-              <a:rPr lang="el-GR" sz="2800" dirty="0"/>
-              <a:t> με τα </a:t>
-            </a:r>
-            <a:r>
-              <a:rPr lang="el-GR" sz="2800" dirty="0" err="1"/>
-              <a:t>μαγειρεματα</a:t>
-            </a:r>
-            <a:r>
-              <a:rPr lang="el-GR" sz="2800" dirty="0"/>
-              <a:t> σας....η </a:t>
-            </a:r>
-            <a:r>
-              <a:rPr lang="el-GR" sz="2800" dirty="0" err="1"/>
-              <a:t>ντροπη</a:t>
-            </a:r>
-            <a:r>
-              <a:rPr lang="el-GR" sz="2800" dirty="0"/>
-              <a:t> της </a:t>
-            </a:r>
-            <a:r>
-              <a:rPr lang="el-GR" sz="2800" dirty="0" err="1"/>
-              <a:t>τηλεορασης</a:t>
-            </a:r>
-            <a:r>
-              <a:rPr lang="el-GR" sz="2800" dirty="0"/>
-              <a:t> </a:t>
-            </a:r>
-            <a:r>
-              <a:rPr lang="el-GR" sz="2800" dirty="0" err="1"/>
-              <a:t>φετος</a:t>
-            </a:r>
-            <a:r>
-              <a:rPr lang="el-GR" sz="2800" dirty="0"/>
-              <a:t>... </a:t>
-            </a:r>
-            <a:r>
-              <a:rPr lang="el-GR" sz="2800" dirty="0" err="1"/>
-              <a:t>ξεφτιλα</a:t>
-            </a:r>
-            <a:r>
-              <a:rPr lang="el-GR" sz="2800" dirty="0"/>
-              <a:t> ”</a:t>
-            </a:r>
-            <a:endParaRPr lang="en-US" sz="2800" dirty="0"/>
-          </a:p>
-          <a:p>
-            <a:pPr lvl="1"/>
-            <a:r>
-              <a:rPr lang="el-GR" sz="2800" dirty="0"/>
-              <a:t>“σα </a:t>
-            </a:r>
-            <a:r>
-              <a:rPr lang="el-GR" sz="2800" dirty="0" err="1"/>
-              <a:t>μοσχαρι</a:t>
-            </a:r>
-            <a:r>
-              <a:rPr lang="el-GR" sz="2800" dirty="0"/>
-              <a:t> </a:t>
-            </a:r>
-            <a:r>
-              <a:rPr lang="el-GR" sz="2800" dirty="0" err="1"/>
-              <a:t>εχει</a:t>
-            </a:r>
-            <a:r>
-              <a:rPr lang="el-GR" sz="2800" dirty="0"/>
-              <a:t> </a:t>
-            </a:r>
-            <a:r>
-              <a:rPr lang="el-GR" sz="2800" dirty="0" err="1"/>
-              <a:t>γινει</a:t>
-            </a:r>
-            <a:r>
-              <a:rPr lang="el-GR" sz="2800" dirty="0"/>
-              <a:t> τι </a:t>
-            </a:r>
-            <a:r>
-              <a:rPr lang="el-GR" sz="2800" dirty="0" err="1"/>
-              <a:t>διαολο</a:t>
-            </a:r>
-            <a:r>
-              <a:rPr lang="el-GR" sz="2800" dirty="0"/>
-              <a:t> </a:t>
-            </a:r>
-            <a:r>
-              <a:rPr lang="el-GR" sz="2800" dirty="0" err="1"/>
-              <a:t>τρωνε</a:t>
-            </a:r>
-            <a:r>
-              <a:rPr lang="el-GR" sz="2800" dirty="0"/>
-              <a:t> στο </a:t>
-            </a:r>
-            <a:r>
-              <a:rPr lang="el-GR" sz="2800" dirty="0" err="1"/>
-              <a:t>μαξιμου</a:t>
-            </a:r>
-            <a:r>
-              <a:rPr lang="el-GR" sz="2800" dirty="0"/>
-              <a:t>;”</a:t>
-            </a:r>
-            <a:endParaRPr lang="en-US" sz="2800" dirty="0"/>
-          </a:p>
-          <a:p>
-            <a:pPr lvl="1"/>
-            <a:r>
-              <a:rPr lang="el-GR" sz="2800" dirty="0"/>
-              <a:t>“</a:t>
-            </a:r>
-            <a:r>
-              <a:rPr lang="el-GR" sz="2800" dirty="0" err="1"/>
-              <a:t>ασημινα</a:t>
-            </a:r>
-            <a:r>
-              <a:rPr lang="el-GR" sz="2800" dirty="0"/>
-              <a:t>.... δε μου πας </a:t>
-            </a:r>
-            <a:r>
-              <a:rPr lang="el-GR" sz="2800" dirty="0" err="1"/>
-              <a:t>κατα</a:t>
-            </a:r>
-            <a:r>
-              <a:rPr lang="el-GR" sz="2800" dirty="0"/>
-              <a:t> το </a:t>
-            </a:r>
-            <a:r>
-              <a:rPr lang="el-GR" sz="2800" dirty="0" err="1"/>
-              <a:t>γεροδιαολο</a:t>
-            </a:r>
-            <a:r>
-              <a:rPr lang="el-GR" sz="2800" dirty="0"/>
-              <a:t>; </a:t>
-            </a:r>
-            <a:r>
-              <a:rPr lang="el-GR" sz="2800" dirty="0" err="1"/>
-              <a:t>αχρηστη</a:t>
-            </a:r>
-            <a:r>
-              <a:rPr lang="el-GR" sz="2800" dirty="0"/>
-              <a:t> #gntmgr”</a:t>
-            </a:r>
-            <a:endParaRPr lang="en-US" sz="2800" dirty="0"/>
-          </a:p>
-          <a:p>
-            <a:pPr lvl="1"/>
-            <a:endParaRPr lang="en-US" dirty="0"/>
-          </a:p>
-        </p:txBody>
-      </p:sp>
-    </p:spTree>
-    <p:extLst>
-      <p:ext uri="{BB962C8B-B14F-4D97-AF65-F5344CB8AC3E}">
-        <p14:creationId xmlns:p14="http://schemas.microsoft.com/office/powerpoint/2010/main" val="1164314194"/>
-      </p:ext>
-    </p:extLst>
-  </p:cSld>
-  <p:clrMapOvr>
-    <a:masterClrMapping/>
-  </p:clrMapOvr>
-</p:sld>
-</file>
-
-<file path=ppt/slides/slide30.xml><?xml version="1.0" encoding="utf-8"?>
+<file path=ppt/slides/slide29.xml><?xml version="1.0" encoding="utf-8"?>
 <p:sld xmlns:a="http://schemas.openxmlformats.org/drawingml/2006/main" xmlns:r="http://schemas.openxmlformats.org/officeDocument/2006/relationships" xmlns:p="http://schemas.openxmlformats.org/presentationml/2006/main">
   <p:cSld>
     <p:spTree>
@@ -13209,7 +12953,274 @@
 </p:sld>
 </file>
 
-<file path=ppt/slides/slide31.xml><?xml version="1.0" encoding="utf-8"?>
+<file path=ppt/slides/slide3.xml><?xml version="1.0" encoding="utf-8"?>
+<p:sld xmlns:a="http://schemas.openxmlformats.org/drawingml/2006/main" xmlns:r="http://schemas.openxmlformats.org/officeDocument/2006/relationships" xmlns:p="http://schemas.openxmlformats.org/presentationml/2006/main">
+  <p:cSld>
+    <p:spTree>
+      <p:nvGrpSpPr>
+        <p:cNvPr id="1" name=""/>
+        <p:cNvGrpSpPr/>
+        <p:nvPr/>
+      </p:nvGrpSpPr>
+      <p:grpSpPr>
+        <a:xfrm>
+          <a:off x="0" y="0"/>
+          <a:ext cx="0" cy="0"/>
+          <a:chOff x="0" y="0"/>
+          <a:chExt cx="0" cy="0"/>
+        </a:xfrm>
+      </p:grpSpPr>
+      <p:sp>
+        <p:nvSpPr>
+          <p:cNvPr id="2" name="Title 1">
+            <a:extLst>
+              <a:ext uri="{FF2B5EF4-FFF2-40B4-BE49-F238E27FC236}">
+                <a16:creationId xmlns:a16="http://schemas.microsoft.com/office/drawing/2014/main" id="{459E9280-2EFC-EAAD-B90B-757337875FC3}"/>
+              </a:ext>
+            </a:extLst>
+          </p:cNvPr>
+          <p:cNvSpPr>
+            <a:spLocks noGrp="1"/>
+          </p:cNvSpPr>
+          <p:nvPr>
+            <p:ph type="title"/>
+          </p:nvPr>
+        </p:nvSpPr>
+        <p:spPr/>
+        <p:txBody>
+          <a:bodyPr>
+            <a:normAutofit/>
+          </a:bodyPr>
+          <a:lstStyle/>
+          <a:p>
+            <a:pPr algn="ctr"/>
+            <a:r>
+              <a:rPr lang="en-US" sz="6000" dirty="0"/>
+              <a:t>What is online toxicity?</a:t>
+            </a:r>
+          </a:p>
+        </p:txBody>
+      </p:sp>
+      <p:sp>
+        <p:nvSpPr>
+          <p:cNvPr id="3" name="Content Placeholder 2">
+            <a:extLst>
+              <a:ext uri="{FF2B5EF4-FFF2-40B4-BE49-F238E27FC236}">
+                <a16:creationId xmlns:a16="http://schemas.microsoft.com/office/drawing/2014/main" id="{EDA5BC2A-DC20-55AB-BA01-DDD37249D73C}"/>
+              </a:ext>
+            </a:extLst>
+          </p:cNvPr>
+          <p:cNvSpPr>
+            <a:spLocks noGrp="1"/>
+          </p:cNvSpPr>
+          <p:nvPr>
+            <p:ph idx="1"/>
+          </p:nvPr>
+        </p:nvSpPr>
+        <p:spPr/>
+        <p:txBody>
+          <a:bodyPr>
+            <a:normAutofit/>
+          </a:bodyPr>
+          <a:lstStyle/>
+          <a:p>
+            <a:pPr marL="0" indent="0">
+              <a:buNone/>
+            </a:pPr>
+            <a:r>
+              <a:rPr lang="en-US" dirty="0"/>
+              <a:t>Toxicity refers to rude, aggressive, and degrading behaviors between users.</a:t>
+            </a:r>
+          </a:p>
+          <a:p>
+            <a:pPr marL="0" indent="0">
+              <a:buNone/>
+            </a:pPr>
+            <a:r>
+              <a:rPr lang="en-US" dirty="0"/>
+              <a:t>For example:</a:t>
+            </a:r>
+          </a:p>
+          <a:p>
+            <a:pPr lvl="1"/>
+            <a:r>
+              <a:rPr lang="el-GR" sz="2800" dirty="0"/>
+              <a:t>“ #masterchefgr_xeftiles </a:t>
+            </a:r>
+            <a:r>
+              <a:rPr lang="el-GR" sz="2800" dirty="0" err="1"/>
+              <a:t>αμε</a:t>
+            </a:r>
+            <a:r>
+              <a:rPr lang="el-GR" sz="2800" dirty="0"/>
+              <a:t> στον </a:t>
+            </a:r>
+            <a:r>
+              <a:rPr lang="el-GR" sz="2800" dirty="0" err="1"/>
+              <a:t>αγυριστο</a:t>
+            </a:r>
+            <a:r>
+              <a:rPr lang="el-GR" sz="2800" dirty="0"/>
+              <a:t> με τα </a:t>
+            </a:r>
+            <a:r>
+              <a:rPr lang="el-GR" sz="2800" dirty="0" err="1"/>
+              <a:t>μαγειρεματα</a:t>
+            </a:r>
+            <a:r>
+              <a:rPr lang="el-GR" sz="2800" dirty="0"/>
+              <a:t> σας....η </a:t>
+            </a:r>
+            <a:r>
+              <a:rPr lang="el-GR" sz="2800" dirty="0" err="1"/>
+              <a:t>ντροπη</a:t>
+            </a:r>
+            <a:r>
+              <a:rPr lang="el-GR" sz="2800" dirty="0"/>
+              <a:t> της </a:t>
+            </a:r>
+            <a:r>
+              <a:rPr lang="el-GR" sz="2800" dirty="0" err="1"/>
+              <a:t>τηλεορασης</a:t>
+            </a:r>
+            <a:r>
+              <a:rPr lang="el-GR" sz="2800" dirty="0"/>
+              <a:t> </a:t>
+            </a:r>
+            <a:r>
+              <a:rPr lang="el-GR" sz="2800" dirty="0" err="1"/>
+              <a:t>φετος</a:t>
+            </a:r>
+            <a:r>
+              <a:rPr lang="el-GR" sz="2800" dirty="0"/>
+              <a:t>... </a:t>
+            </a:r>
+            <a:r>
+              <a:rPr lang="el-GR" sz="2800" dirty="0" err="1"/>
+              <a:t>ξεφτιλα</a:t>
+            </a:r>
+            <a:r>
+              <a:rPr lang="el-GR" sz="2800" dirty="0"/>
+              <a:t> ”</a:t>
+            </a:r>
+            <a:endParaRPr lang="en-US" sz="2800" dirty="0"/>
+          </a:p>
+          <a:p>
+            <a:pPr lvl="1"/>
+            <a:r>
+              <a:rPr lang="el-GR" sz="2800" dirty="0"/>
+              <a:t>“σα </a:t>
+            </a:r>
+            <a:r>
+              <a:rPr lang="el-GR" sz="2800" dirty="0" err="1"/>
+              <a:t>μοσχαρι</a:t>
+            </a:r>
+            <a:r>
+              <a:rPr lang="el-GR" sz="2800" dirty="0"/>
+              <a:t> </a:t>
+            </a:r>
+            <a:r>
+              <a:rPr lang="el-GR" sz="2800" dirty="0" err="1"/>
+              <a:t>εχει</a:t>
+            </a:r>
+            <a:r>
+              <a:rPr lang="el-GR" sz="2800" dirty="0"/>
+              <a:t> </a:t>
+            </a:r>
+            <a:r>
+              <a:rPr lang="el-GR" sz="2800" dirty="0" err="1"/>
+              <a:t>γινει</a:t>
+            </a:r>
+            <a:r>
+              <a:rPr lang="el-GR" sz="2800" dirty="0"/>
+              <a:t> τι </a:t>
+            </a:r>
+            <a:r>
+              <a:rPr lang="el-GR" sz="2800" dirty="0" err="1"/>
+              <a:t>διαολο</a:t>
+            </a:r>
+            <a:r>
+              <a:rPr lang="el-GR" sz="2800" dirty="0"/>
+              <a:t> </a:t>
+            </a:r>
+            <a:r>
+              <a:rPr lang="el-GR" sz="2800" dirty="0" err="1"/>
+              <a:t>τρωνε</a:t>
+            </a:r>
+            <a:r>
+              <a:rPr lang="el-GR" sz="2800" dirty="0"/>
+              <a:t> στο </a:t>
+            </a:r>
+            <a:r>
+              <a:rPr lang="el-GR" sz="2800" dirty="0" err="1"/>
+              <a:t>μαξιμου</a:t>
+            </a:r>
+            <a:r>
+              <a:rPr lang="el-GR" sz="2800" dirty="0"/>
+              <a:t>;”</a:t>
+            </a:r>
+            <a:endParaRPr lang="en-US" sz="2800" dirty="0"/>
+          </a:p>
+          <a:p>
+            <a:pPr lvl="1"/>
+            <a:r>
+              <a:rPr lang="el-GR" sz="2800" dirty="0"/>
+              <a:t>“</a:t>
+            </a:r>
+            <a:r>
+              <a:rPr lang="el-GR" sz="2800" dirty="0" err="1"/>
+              <a:t>ασημινα</a:t>
+            </a:r>
+            <a:r>
+              <a:rPr lang="el-GR" sz="2800" dirty="0"/>
+              <a:t>.... δε μου πας </a:t>
+            </a:r>
+            <a:r>
+              <a:rPr lang="el-GR" sz="2800" dirty="0" err="1"/>
+              <a:t>κατα</a:t>
+            </a:r>
+            <a:r>
+              <a:rPr lang="el-GR" sz="2800" dirty="0"/>
+              <a:t> το </a:t>
+            </a:r>
+            <a:r>
+              <a:rPr lang="el-GR" sz="2800" dirty="0" err="1"/>
+              <a:t>γεροδιαολο</a:t>
+            </a:r>
+            <a:r>
+              <a:rPr lang="el-GR" sz="2800" dirty="0"/>
+              <a:t>; </a:t>
+            </a:r>
+            <a:r>
+              <a:rPr lang="el-GR" sz="2800" dirty="0" err="1"/>
+              <a:t>αχρηστη</a:t>
+            </a:r>
+            <a:r>
+              <a:rPr lang="el-GR" sz="2800" dirty="0"/>
+              <a:t> #gntmgr”</a:t>
+            </a:r>
+            <a:endParaRPr lang="en-US" sz="2800" dirty="0"/>
+          </a:p>
+          <a:p>
+            <a:pPr lvl="1"/>
+            <a:endParaRPr lang="en-US" dirty="0"/>
+          </a:p>
+        </p:txBody>
+      </p:sp>
+    </p:spTree>
+    <p:extLst>
+      <p:ext uri="{BB962C8B-B14F-4D97-AF65-F5344CB8AC3E}">
+        <p14:creationId xmlns:p14="http://schemas.microsoft.com/office/powerpoint/2010/main" val="1164314194"/>
+      </p:ext>
+    </p:extLst>
+  </p:cSld>
+  <p:clrMapOvr>
+    <a:masterClrMapping/>
+  </p:clrMapOvr>
+</p:sld>
+</file>
+
+<file path=ppt/slides/slide30.xml><?xml version="1.0" encoding="utf-8"?>
 <p:sld xmlns:a="http://schemas.openxmlformats.org/drawingml/2006/main" xmlns:r="http://schemas.openxmlformats.org/officeDocument/2006/relationships" xmlns:p="http://schemas.openxmlformats.org/presentationml/2006/main">
   <p:cSld>
     <p:spTree>
@@ -13316,7 +13327,7 @@
 </p:sld>
 </file>
 
-<file path=ppt/slides/slide32.xml><?xml version="1.0" encoding="utf-8"?>
+<file path=ppt/slides/slide31.xml><?xml version="1.0" encoding="utf-8"?>
 <p:sld xmlns:a="http://schemas.openxmlformats.org/drawingml/2006/main" xmlns:r="http://schemas.openxmlformats.org/officeDocument/2006/relationships" xmlns:p="http://schemas.openxmlformats.org/presentationml/2006/main">
   <p:cSld>
     <p:spTree>
@@ -13515,7 +13526,7 @@
 </p:sld>
 </file>
 
-<file path=ppt/slides/slide33.xml><?xml version="1.0" encoding="utf-8"?>
+<file path=ppt/slides/slide32.xml><?xml version="1.0" encoding="utf-8"?>
 <p:sld xmlns:a="http://schemas.openxmlformats.org/drawingml/2006/main" xmlns:r="http://schemas.openxmlformats.org/officeDocument/2006/relationships" xmlns:p="http://schemas.openxmlformats.org/presentationml/2006/main">
   <p:cSld>
     <p:spTree>
@@ -13644,7 +13655,7 @@
 </p:sld>
 </file>
 
-<file path=ppt/slides/slide34.xml><?xml version="1.0" encoding="utf-8"?>
+<file path=ppt/slides/slide33.xml><?xml version="1.0" encoding="utf-8"?>
 <p:sld xmlns:a="http://schemas.openxmlformats.org/drawingml/2006/main" xmlns:r="http://schemas.openxmlformats.org/officeDocument/2006/relationships" xmlns:p="http://schemas.openxmlformats.org/presentationml/2006/main">
   <p:cSld>
     <p:spTree>
@@ -13757,7 +13768,7 @@
 </p:sld>
 </file>
 
-<file path=ppt/slides/slide35.xml><?xml version="1.0" encoding="utf-8"?>
+<file path=ppt/slides/slide34.xml><?xml version="1.0" encoding="utf-8"?>
 <p:sld xmlns:a="http://schemas.openxmlformats.org/drawingml/2006/main" xmlns:r="http://schemas.openxmlformats.org/officeDocument/2006/relationships" xmlns:p="http://schemas.openxmlformats.org/presentationml/2006/main">
   <p:cSld>
     <p:spTree>
@@ -13823,7 +13834,7 @@
 </p:sld>
 </file>
 
-<file path=ppt/slides/slide36.xml><?xml version="1.0" encoding="utf-8"?>
+<file path=ppt/slides/slide35.xml><?xml version="1.0" encoding="utf-8"?>
 <p:sld xmlns:a="http://schemas.openxmlformats.org/drawingml/2006/main" xmlns:r="http://schemas.openxmlformats.org/officeDocument/2006/relationships" xmlns:p="http://schemas.openxmlformats.org/presentationml/2006/main">
   <p:cSld>
     <p:spTree>
@@ -13951,7 +13962,7 @@
 </p:sld>
 </file>
 
-<file path=ppt/slides/slide37.xml><?xml version="1.0" encoding="utf-8"?>
+<file path=ppt/slides/slide36.xml><?xml version="1.0" encoding="utf-8"?>
 <p:sld xmlns:a="http://schemas.openxmlformats.org/drawingml/2006/main" xmlns:r="http://schemas.openxmlformats.org/officeDocument/2006/relationships" xmlns:p="http://schemas.openxmlformats.org/presentationml/2006/main">
   <p:cSld>
     <p:spTree>
@@ -14072,7 +14083,7 @@
 </p:sld>
 </file>
 
-<file path=ppt/slides/slide38.xml><?xml version="1.0" encoding="utf-8"?>
+<file path=ppt/slides/slide37.xml><?xml version="1.0" encoding="utf-8"?>
 <p:sld xmlns:a="http://schemas.openxmlformats.org/drawingml/2006/main" xmlns:r="http://schemas.openxmlformats.org/officeDocument/2006/relationships" xmlns:p="http://schemas.openxmlformats.org/presentationml/2006/main">
   <p:cSld>
     <p:spTree>

--- a/Toxicity analysis in Greek Text.pptx
+++ b/Toxicity analysis in Greek Text.pptx
@@ -27,21 +27,24 @@
     <p:sldId id="275" r:id="rId21"/>
     <p:sldId id="276" r:id="rId22"/>
     <p:sldId id="280" r:id="rId23"/>
-    <p:sldId id="277" r:id="rId24"/>
-    <p:sldId id="281" r:id="rId25"/>
-    <p:sldId id="285" r:id="rId26"/>
-    <p:sldId id="284" r:id="rId27"/>
-    <p:sldId id="286" r:id="rId28"/>
-    <p:sldId id="287" r:id="rId29"/>
-    <p:sldId id="288" r:id="rId30"/>
-    <p:sldId id="289" r:id="rId31"/>
-    <p:sldId id="290" r:id="rId32"/>
-    <p:sldId id="291" r:id="rId33"/>
-    <p:sldId id="292" r:id="rId34"/>
-    <p:sldId id="293" r:id="rId35"/>
-    <p:sldId id="294" r:id="rId36"/>
-    <p:sldId id="295" r:id="rId37"/>
-    <p:sldId id="296" r:id="rId38"/>
+    <p:sldId id="297" r:id="rId24"/>
+    <p:sldId id="298" r:id="rId25"/>
+    <p:sldId id="299" r:id="rId26"/>
+    <p:sldId id="277" r:id="rId27"/>
+    <p:sldId id="281" r:id="rId28"/>
+    <p:sldId id="285" r:id="rId29"/>
+    <p:sldId id="284" r:id="rId30"/>
+    <p:sldId id="286" r:id="rId31"/>
+    <p:sldId id="287" r:id="rId32"/>
+    <p:sldId id="288" r:id="rId33"/>
+    <p:sldId id="289" r:id="rId34"/>
+    <p:sldId id="290" r:id="rId35"/>
+    <p:sldId id="291" r:id="rId36"/>
+    <p:sldId id="292" r:id="rId37"/>
+    <p:sldId id="293" r:id="rId38"/>
+    <p:sldId id="294" r:id="rId39"/>
+    <p:sldId id="295" r:id="rId40"/>
+    <p:sldId id="296" r:id="rId41"/>
   </p:sldIdLst>
   <p:sldSz cx="12192000" cy="6858000"/>
   <p:notesSz cx="6858000" cy="9144000"/>
@@ -7130,7 +7133,7 @@
           <a:p>
             <a:fld id="{3A0D4510-12A4-45D4-A475-E15EB597DE64}" type="datetimeFigureOut">
               <a:rPr lang="en-US" smtClean="0"/>
-              <a:t>11-Feb-26</a:t>
+              <a:t>13-Feb-26</a:t>
             </a:fld>
             <a:endParaRPr lang="en-US"/>
           </a:p>
@@ -7328,7 +7331,7 @@
           <a:p>
             <a:fld id="{3A0D4510-12A4-45D4-A475-E15EB597DE64}" type="datetimeFigureOut">
               <a:rPr lang="en-US" smtClean="0"/>
-              <a:t>11-Feb-26</a:t>
+              <a:t>13-Feb-26</a:t>
             </a:fld>
             <a:endParaRPr lang="en-US"/>
           </a:p>
@@ -7536,7 +7539,7 @@
           <a:p>
             <a:fld id="{3A0D4510-12A4-45D4-A475-E15EB597DE64}" type="datetimeFigureOut">
               <a:rPr lang="en-US" smtClean="0"/>
-              <a:t>11-Feb-26</a:t>
+              <a:t>13-Feb-26</a:t>
             </a:fld>
             <a:endParaRPr lang="en-US"/>
           </a:p>
@@ -7734,7 +7737,7 @@
           <a:p>
             <a:fld id="{3A0D4510-12A4-45D4-A475-E15EB597DE64}" type="datetimeFigureOut">
               <a:rPr lang="en-US" smtClean="0"/>
-              <a:t>11-Feb-26</a:t>
+              <a:t>13-Feb-26</a:t>
             </a:fld>
             <a:endParaRPr lang="en-US"/>
           </a:p>
@@ -8009,7 +8012,7 @@
           <a:p>
             <a:fld id="{3A0D4510-12A4-45D4-A475-E15EB597DE64}" type="datetimeFigureOut">
               <a:rPr lang="en-US" smtClean="0"/>
-              <a:t>11-Feb-26</a:t>
+              <a:t>13-Feb-26</a:t>
             </a:fld>
             <a:endParaRPr lang="en-US"/>
           </a:p>
@@ -8274,7 +8277,7 @@
           <a:p>
             <a:fld id="{3A0D4510-12A4-45D4-A475-E15EB597DE64}" type="datetimeFigureOut">
               <a:rPr lang="en-US" smtClean="0"/>
-              <a:t>11-Feb-26</a:t>
+              <a:t>13-Feb-26</a:t>
             </a:fld>
             <a:endParaRPr lang="en-US"/>
           </a:p>
@@ -8686,7 +8689,7 @@
           <a:p>
             <a:fld id="{3A0D4510-12A4-45D4-A475-E15EB597DE64}" type="datetimeFigureOut">
               <a:rPr lang="en-US" smtClean="0"/>
-              <a:t>11-Feb-26</a:t>
+              <a:t>13-Feb-26</a:t>
             </a:fld>
             <a:endParaRPr lang="en-US"/>
           </a:p>
@@ -8827,7 +8830,7 @@
           <a:p>
             <a:fld id="{3A0D4510-12A4-45D4-A475-E15EB597DE64}" type="datetimeFigureOut">
               <a:rPr lang="en-US" smtClean="0"/>
-              <a:t>11-Feb-26</a:t>
+              <a:t>13-Feb-26</a:t>
             </a:fld>
             <a:endParaRPr lang="en-US"/>
           </a:p>
@@ -8940,7 +8943,7 @@
           <a:p>
             <a:fld id="{3A0D4510-12A4-45D4-A475-E15EB597DE64}" type="datetimeFigureOut">
               <a:rPr lang="en-US" smtClean="0"/>
-              <a:t>11-Feb-26</a:t>
+              <a:t>13-Feb-26</a:t>
             </a:fld>
             <a:endParaRPr lang="en-US"/>
           </a:p>
@@ -9251,7 +9254,7 @@
           <a:p>
             <a:fld id="{3A0D4510-12A4-45D4-A475-E15EB597DE64}" type="datetimeFigureOut">
               <a:rPr lang="en-US" smtClean="0"/>
-              <a:t>11-Feb-26</a:t>
+              <a:t>13-Feb-26</a:t>
             </a:fld>
             <a:endParaRPr lang="en-US"/>
           </a:p>
@@ -9539,7 +9542,7 @@
           <a:p>
             <a:fld id="{3A0D4510-12A4-45D4-A475-E15EB597DE64}" type="datetimeFigureOut">
               <a:rPr lang="en-US" smtClean="0"/>
-              <a:t>11-Feb-26</a:t>
+              <a:t>13-Feb-26</a:t>
             </a:fld>
             <a:endParaRPr lang="en-US"/>
           </a:p>
@@ -9780,7 +9783,7 @@
           <a:p>
             <a:fld id="{3A0D4510-12A4-45D4-A475-E15EB597DE64}" type="datetimeFigureOut">
               <a:rPr lang="en-US" smtClean="0"/>
-              <a:t>11-Feb-26</a:t>
+              <a:t>13-Feb-26</a:t>
             </a:fld>
             <a:endParaRPr lang="en-US"/>
           </a:p>
@@ -11990,6 +11993,2879 @@
 <file path=ppt/slides/slide23.xml><?xml version="1.0" encoding="utf-8"?>
 <p:sld xmlns:a="http://schemas.openxmlformats.org/drawingml/2006/main" xmlns:r="http://schemas.openxmlformats.org/officeDocument/2006/relationships" xmlns:p="http://schemas.openxmlformats.org/presentationml/2006/main">
   <p:cSld>
+    <p:bg>
+      <p:bgPr>
+        <a:solidFill>
+          <a:schemeClr val="bg1"/>
+        </a:solidFill>
+        <a:effectLst/>
+      </p:bgPr>
+    </p:bg>
+    <p:spTree>
+      <p:nvGrpSpPr>
+        <p:cNvPr id="1" name=""/>
+        <p:cNvGrpSpPr/>
+        <p:nvPr/>
+      </p:nvGrpSpPr>
+      <p:grpSpPr>
+        <a:xfrm>
+          <a:off x="0" y="0"/>
+          <a:ext cx="0" cy="0"/>
+          <a:chOff x="0" y="0"/>
+          <a:chExt cx="0" cy="0"/>
+        </a:xfrm>
+      </p:grpSpPr>
+      <p:sp useBgFill="1">
+        <p:nvSpPr>
+          <p:cNvPr id="11" name="Rectangle 10">
+            <a:extLst>
+              <a:ext uri="{FF2B5EF4-FFF2-40B4-BE49-F238E27FC236}">
+                <a16:creationId xmlns:a16="http://schemas.microsoft.com/office/drawing/2014/main" id="{BCED4D40-4B67-4331-AC48-79B82B4A47D8}"/>
+              </a:ext>
+              <a:ext uri="{C183D7F6-B498-43B3-948B-1728B52AA6E4}">
+                <adec:decorative xmlns:adec="http://schemas.microsoft.com/office/drawing/2017/decorative" val="1"/>
+              </a:ext>
+            </a:extLst>
+          </p:cNvPr>
+          <p:cNvSpPr>
+            <a:spLocks noGrp="1" noRot="1" noChangeAspect="1" noMove="1" noResize="1" noEditPoints="1" noAdjustHandles="1" noChangeArrowheads="1" noChangeShapeType="1" noTextEdit="1"/>
+          </p:cNvSpPr>
+          <p:nvPr>
+            <p:extLst>
+              <p:ext uri="{386F3935-93C4-4BCD-93E2-E3B085C9AB24}">
+                <p16:designElem xmlns:p16="http://schemas.microsoft.com/office/powerpoint/2015/main" val="1"/>
+              </p:ext>
+            </p:extLst>
+          </p:nvPr>
+        </p:nvSpPr>
+        <p:spPr>
+          <a:xfrm>
+            <a:off x="0" y="0"/>
+            <a:ext cx="12192000" cy="6858000"/>
+          </a:xfrm>
+          <a:prstGeom prst="rect">
+            <a:avLst/>
+          </a:prstGeom>
+          <a:ln>
+            <a:noFill/>
+          </a:ln>
+        </p:spPr>
+        <p:style>
+          <a:lnRef idx="2">
+            <a:schemeClr val="accent1">
+              <a:shade val="50000"/>
+            </a:schemeClr>
+          </a:lnRef>
+          <a:fillRef idx="1">
+            <a:schemeClr val="accent1"/>
+          </a:fillRef>
+          <a:effectRef idx="0">
+            <a:schemeClr val="accent1"/>
+          </a:effectRef>
+          <a:fontRef idx="minor">
+            <a:schemeClr val="lt1"/>
+          </a:fontRef>
+        </p:style>
+        <p:txBody>
+          <a:bodyPr rtlCol="0" anchor="ctr"/>
+          <a:lstStyle/>
+          <a:p>
+            <a:pPr algn="ctr"/>
+            <a:endParaRPr lang="en-US"/>
+          </a:p>
+        </p:txBody>
+      </p:sp>
+      <p:sp>
+        <p:nvSpPr>
+          <p:cNvPr id="6" name="Title 5">
+            <a:extLst>
+              <a:ext uri="{FF2B5EF4-FFF2-40B4-BE49-F238E27FC236}">
+                <a16:creationId xmlns:a16="http://schemas.microsoft.com/office/drawing/2014/main" id="{00F88F61-B3E7-F529-F564-CA072241E994}"/>
+              </a:ext>
+            </a:extLst>
+          </p:cNvPr>
+          <p:cNvSpPr>
+            <a:spLocks noGrp="1"/>
+          </p:cNvSpPr>
+          <p:nvPr>
+            <p:ph type="title"/>
+          </p:nvPr>
+        </p:nvSpPr>
+        <p:spPr>
+          <a:xfrm>
+            <a:off x="638881" y="417576"/>
+            <a:ext cx="10909640" cy="1249394"/>
+          </a:xfrm>
+        </p:spPr>
+        <p:txBody>
+          <a:bodyPr vert="horz" lIns="91440" tIns="45720" rIns="91440" bIns="45720" rtlCol="0" anchor="ctr">
+            <a:normAutofit fontScale="90000"/>
+          </a:bodyPr>
+          <a:lstStyle/>
+          <a:p>
+            <a:pPr algn="ctr"/>
+            <a:r>
+              <a:rPr lang="en-US" sz="6600" kern="1200" dirty="0">
+                <a:solidFill>
+                  <a:schemeClr val="tx1"/>
+                </a:solidFill>
+                <a:latin typeface="+mj-lt"/>
+                <a:ea typeface="+mj-ea"/>
+                <a:cs typeface="+mj-cs"/>
+              </a:rPr>
+              <a:t>Baseline model confusion matrix</a:t>
+            </a:r>
+          </a:p>
+        </p:txBody>
+      </p:sp>
+      <p:sp>
+        <p:nvSpPr>
+          <p:cNvPr id="13" name="sketch line">
+            <a:extLst>
+              <a:ext uri="{FF2B5EF4-FFF2-40B4-BE49-F238E27FC236}">
+                <a16:creationId xmlns:a16="http://schemas.microsoft.com/office/drawing/2014/main" id="{670CEDEF-4F34-412E-84EE-329C1E936AF5}"/>
+              </a:ext>
+              <a:ext uri="{C183D7F6-B498-43B3-948B-1728B52AA6E4}">
+                <adec:decorative xmlns:adec="http://schemas.microsoft.com/office/drawing/2017/decorative" val="1"/>
+              </a:ext>
+            </a:extLst>
+          </p:cNvPr>
+          <p:cNvSpPr>
+            <a:spLocks noGrp="1" noRot="1" noChangeAspect="1" noMove="1" noResize="1" noEditPoints="1" noAdjustHandles="1" noChangeArrowheads="1" noChangeShapeType="1" noTextEdit="1"/>
+          </p:cNvSpPr>
+          <p:nvPr>
+            <p:extLst>
+              <p:ext uri="{386F3935-93C4-4BCD-93E2-E3B085C9AB24}">
+                <p16:designElem xmlns:p16="http://schemas.microsoft.com/office/powerpoint/2015/main" val="1"/>
+              </p:ext>
+            </p:extLst>
+          </p:nvPr>
+        </p:nvSpPr>
+        <p:spPr>
+          <a:xfrm>
+            <a:off x="3807702" y="1733454"/>
+            <a:ext cx="4572000" cy="18288"/>
+          </a:xfrm>
+          <a:custGeom>
+            <a:avLst/>
+            <a:gdLst>
+              <a:gd name="csX0" fmla="*/ 0 w 4572000"/>
+              <a:gd name="csY0" fmla="*/ 0 h 18288"/>
+              <a:gd name="csX1" fmla="*/ 515983 w 4572000"/>
+              <a:gd name="csY1" fmla="*/ 0 h 18288"/>
+              <a:gd name="csX2" fmla="*/ 1031966 w 4572000"/>
+              <a:gd name="csY2" fmla="*/ 0 h 18288"/>
+              <a:gd name="csX3" fmla="*/ 1639389 w 4572000"/>
+              <a:gd name="csY3" fmla="*/ 0 h 18288"/>
+              <a:gd name="csX4" fmla="*/ 2383971 w 4572000"/>
+              <a:gd name="csY4" fmla="*/ 0 h 18288"/>
+              <a:gd name="csX5" fmla="*/ 2945674 w 4572000"/>
+              <a:gd name="csY5" fmla="*/ 0 h 18288"/>
+              <a:gd name="csX6" fmla="*/ 3507377 w 4572000"/>
+              <a:gd name="csY6" fmla="*/ 0 h 18288"/>
+              <a:gd name="csX7" fmla="*/ 4572000 w 4572000"/>
+              <a:gd name="csY7" fmla="*/ 0 h 18288"/>
+              <a:gd name="csX8" fmla="*/ 4572000 w 4572000"/>
+              <a:gd name="csY8" fmla="*/ 18288 h 18288"/>
+              <a:gd name="csX9" fmla="*/ 3873137 w 4572000"/>
+              <a:gd name="csY9" fmla="*/ 18288 h 18288"/>
+              <a:gd name="csX10" fmla="*/ 3311434 w 4572000"/>
+              <a:gd name="csY10" fmla="*/ 18288 h 18288"/>
+              <a:gd name="csX11" fmla="*/ 2749731 w 4572000"/>
+              <a:gd name="csY11" fmla="*/ 18288 h 18288"/>
+              <a:gd name="csX12" fmla="*/ 2050869 w 4572000"/>
+              <a:gd name="csY12" fmla="*/ 18288 h 18288"/>
+              <a:gd name="csX13" fmla="*/ 1306286 w 4572000"/>
+              <a:gd name="csY13" fmla="*/ 18288 h 18288"/>
+              <a:gd name="csX14" fmla="*/ 790303 w 4572000"/>
+              <a:gd name="csY14" fmla="*/ 18288 h 18288"/>
+              <a:gd name="csX15" fmla="*/ 0 w 4572000"/>
+              <a:gd name="csY15" fmla="*/ 18288 h 18288"/>
+              <a:gd name="csX16" fmla="*/ 0 w 4572000"/>
+              <a:gd name="csY16" fmla="*/ 0 h 18288"/>
+            </a:gdLst>
+            <a:ahLst/>
+            <a:cxnLst>
+              <a:cxn ang="0">
+                <a:pos x="csX0" y="csY0"/>
+              </a:cxn>
+              <a:cxn ang="0">
+                <a:pos x="csX1" y="csY1"/>
+              </a:cxn>
+              <a:cxn ang="0">
+                <a:pos x="csX2" y="csY2"/>
+              </a:cxn>
+              <a:cxn ang="0">
+                <a:pos x="csX3" y="csY3"/>
+              </a:cxn>
+              <a:cxn ang="0">
+                <a:pos x="csX4" y="csY4"/>
+              </a:cxn>
+              <a:cxn ang="0">
+                <a:pos x="csX5" y="csY5"/>
+              </a:cxn>
+              <a:cxn ang="0">
+                <a:pos x="csX6" y="csY6"/>
+              </a:cxn>
+              <a:cxn ang="0">
+                <a:pos x="csX7" y="csY7"/>
+              </a:cxn>
+              <a:cxn ang="0">
+                <a:pos x="csX8" y="csY8"/>
+              </a:cxn>
+              <a:cxn ang="0">
+                <a:pos x="csX9" y="csY9"/>
+              </a:cxn>
+              <a:cxn ang="0">
+                <a:pos x="csX10" y="csY10"/>
+              </a:cxn>
+              <a:cxn ang="0">
+                <a:pos x="csX11" y="csY11"/>
+              </a:cxn>
+              <a:cxn ang="0">
+                <a:pos x="csX12" y="csY12"/>
+              </a:cxn>
+              <a:cxn ang="0">
+                <a:pos x="csX13" y="csY13"/>
+              </a:cxn>
+              <a:cxn ang="0">
+                <a:pos x="csX14" y="csY14"/>
+              </a:cxn>
+              <a:cxn ang="0">
+                <a:pos x="csX15" y="csY15"/>
+              </a:cxn>
+              <a:cxn ang="0">
+                <a:pos x="csX16" y="csY16"/>
+              </a:cxn>
+            </a:cxnLst>
+            <a:rect l="l" t="t" r="r" b="b"/>
+            <a:pathLst>
+              <a:path w="4572000" h="18288" fill="none" extrusionOk="0">
+                <a:moveTo>
+                  <a:pt x="0" y="0"/>
+                </a:moveTo>
+                <a:cubicBezTo>
+                  <a:pt x="105156" y="-20963"/>
+                  <a:pt x="340432" y="822"/>
+                  <a:pt x="515983" y="0"/>
+                </a:cubicBezTo>
+                <a:cubicBezTo>
+                  <a:pt x="691534" y="-822"/>
+                  <a:pt x="850679" y="16479"/>
+                  <a:pt x="1031966" y="0"/>
+                </a:cubicBezTo>
+                <a:cubicBezTo>
+                  <a:pt x="1213253" y="-16479"/>
+                  <a:pt x="1443646" y="-18730"/>
+                  <a:pt x="1639389" y="0"/>
+                </a:cubicBezTo>
+                <a:cubicBezTo>
+                  <a:pt x="1835132" y="18730"/>
+                  <a:pt x="2159975" y="18531"/>
+                  <a:pt x="2383971" y="0"/>
+                </a:cubicBezTo>
+                <a:cubicBezTo>
+                  <a:pt x="2607967" y="-18531"/>
+                  <a:pt x="2719096" y="-12030"/>
+                  <a:pt x="2945674" y="0"/>
+                </a:cubicBezTo>
+                <a:cubicBezTo>
+                  <a:pt x="3172252" y="12030"/>
+                  <a:pt x="3269167" y="27666"/>
+                  <a:pt x="3507377" y="0"/>
+                </a:cubicBezTo>
+                <a:cubicBezTo>
+                  <a:pt x="3745587" y="-27666"/>
+                  <a:pt x="4116741" y="18705"/>
+                  <a:pt x="4572000" y="0"/>
+                </a:cubicBezTo>
+                <a:cubicBezTo>
+                  <a:pt x="4572895" y="8974"/>
+                  <a:pt x="4571454" y="9359"/>
+                  <a:pt x="4572000" y="18288"/>
+                </a:cubicBezTo>
+                <a:cubicBezTo>
+                  <a:pt x="4374698" y="3942"/>
+                  <a:pt x="4098874" y="-11042"/>
+                  <a:pt x="3873137" y="18288"/>
+                </a:cubicBezTo>
+                <a:cubicBezTo>
+                  <a:pt x="3647400" y="47618"/>
+                  <a:pt x="3517055" y="5421"/>
+                  <a:pt x="3311434" y="18288"/>
+                </a:cubicBezTo>
+                <a:cubicBezTo>
+                  <a:pt x="3105813" y="31155"/>
+                  <a:pt x="3025168" y="17856"/>
+                  <a:pt x="2749731" y="18288"/>
+                </a:cubicBezTo>
+                <a:cubicBezTo>
+                  <a:pt x="2474294" y="18720"/>
+                  <a:pt x="2291766" y="-14168"/>
+                  <a:pt x="2050869" y="18288"/>
+                </a:cubicBezTo>
+                <a:cubicBezTo>
+                  <a:pt x="1809972" y="50744"/>
+                  <a:pt x="1540276" y="46798"/>
+                  <a:pt x="1306286" y="18288"/>
+                </a:cubicBezTo>
+                <a:cubicBezTo>
+                  <a:pt x="1072296" y="-10222"/>
+                  <a:pt x="972445" y="19645"/>
+                  <a:pt x="790303" y="18288"/>
+                </a:cubicBezTo>
+                <a:cubicBezTo>
+                  <a:pt x="608161" y="16931"/>
+                  <a:pt x="200981" y="8241"/>
+                  <a:pt x="0" y="18288"/>
+                </a:cubicBezTo>
+                <a:cubicBezTo>
+                  <a:pt x="-229" y="14222"/>
+                  <a:pt x="509" y="5816"/>
+                  <a:pt x="0" y="0"/>
+                </a:cubicBezTo>
+                <a:close/>
+              </a:path>
+              <a:path w="4572000" h="18288" stroke="0" extrusionOk="0">
+                <a:moveTo>
+                  <a:pt x="0" y="0"/>
+                </a:moveTo>
+                <a:cubicBezTo>
+                  <a:pt x="143285" y="-9565"/>
+                  <a:pt x="327959" y="-11498"/>
+                  <a:pt x="561703" y="0"/>
+                </a:cubicBezTo>
+                <a:cubicBezTo>
+                  <a:pt x="795447" y="11498"/>
+                  <a:pt x="838260" y="18255"/>
+                  <a:pt x="1077686" y="0"/>
+                </a:cubicBezTo>
+                <a:cubicBezTo>
+                  <a:pt x="1317112" y="-18255"/>
+                  <a:pt x="1437472" y="23514"/>
+                  <a:pt x="1639389" y="0"/>
+                </a:cubicBezTo>
+                <a:cubicBezTo>
+                  <a:pt x="1841306" y="-23514"/>
+                  <a:pt x="2037142" y="-12551"/>
+                  <a:pt x="2292531" y="0"/>
+                </a:cubicBezTo>
+                <a:cubicBezTo>
+                  <a:pt x="2547920" y="12551"/>
+                  <a:pt x="2810436" y="-20352"/>
+                  <a:pt x="2991394" y="0"/>
+                </a:cubicBezTo>
+                <a:cubicBezTo>
+                  <a:pt x="3172352" y="20352"/>
+                  <a:pt x="3530025" y="-13347"/>
+                  <a:pt x="3735977" y="0"/>
+                </a:cubicBezTo>
+                <a:cubicBezTo>
+                  <a:pt x="3941929" y="13347"/>
+                  <a:pt x="4161497" y="34086"/>
+                  <a:pt x="4572000" y="0"/>
+                </a:cubicBezTo>
+                <a:cubicBezTo>
+                  <a:pt x="4571545" y="6162"/>
+                  <a:pt x="4571903" y="11775"/>
+                  <a:pt x="4572000" y="18288"/>
+                </a:cubicBezTo>
+                <a:cubicBezTo>
+                  <a:pt x="4228040" y="36490"/>
+                  <a:pt x="4199736" y="42557"/>
+                  <a:pt x="3873137" y="18288"/>
+                </a:cubicBezTo>
+                <a:cubicBezTo>
+                  <a:pt x="3546538" y="-5981"/>
+                  <a:pt x="3472124" y="16809"/>
+                  <a:pt x="3128554" y="18288"/>
+                </a:cubicBezTo>
+                <a:cubicBezTo>
+                  <a:pt x="2784984" y="19767"/>
+                  <a:pt x="2735896" y="-17781"/>
+                  <a:pt x="2383971" y="18288"/>
+                </a:cubicBezTo>
+                <a:cubicBezTo>
+                  <a:pt x="2032046" y="54357"/>
+                  <a:pt x="2019324" y="2920"/>
+                  <a:pt x="1867989" y="18288"/>
+                </a:cubicBezTo>
+                <a:cubicBezTo>
+                  <a:pt x="1716654" y="33656"/>
+                  <a:pt x="1418675" y="32575"/>
+                  <a:pt x="1169126" y="18288"/>
+                </a:cubicBezTo>
+                <a:cubicBezTo>
+                  <a:pt x="919577" y="4001"/>
+                  <a:pt x="798537" y="16165"/>
+                  <a:pt x="561703" y="18288"/>
+                </a:cubicBezTo>
+                <a:cubicBezTo>
+                  <a:pt x="324869" y="20411"/>
+                  <a:pt x="221395" y="-912"/>
+                  <a:pt x="0" y="18288"/>
+                </a:cubicBezTo>
+                <a:cubicBezTo>
+                  <a:pt x="766" y="10800"/>
+                  <a:pt x="-457" y="8180"/>
+                  <a:pt x="0" y="0"/>
+                </a:cubicBezTo>
+                <a:close/>
+              </a:path>
+            </a:pathLst>
+          </a:custGeom>
+          <a:solidFill>
+            <a:schemeClr val="accent2"/>
+          </a:solidFill>
+          <a:ln w="41275" cap="rnd">
+            <a:solidFill>
+              <a:schemeClr val="accent2"/>
+            </a:solidFill>
+            <a:round/>
+            <a:extLst>
+              <a:ext uri="{C807C97D-BFC1-408E-A445-0C87EB9F89A2}">
+                <ask:lineSketchStyleProps xmlns:ask="http://schemas.microsoft.com/office/drawing/2018/sketchyshapes" sd="2727557108">
+                  <a:prstGeom prst="rect">
+                    <a:avLst/>
+                  </a:prstGeom>
+                  <ask:type>
+                    <ask:lineSketchFreehand/>
+                  </ask:type>
+                </ask:lineSketchStyleProps>
+              </a:ext>
+            </a:extLst>
+          </a:ln>
+        </p:spPr>
+        <p:style>
+          <a:lnRef idx="2">
+            <a:schemeClr val="accent1">
+              <a:shade val="50000"/>
+            </a:schemeClr>
+          </a:lnRef>
+          <a:fillRef idx="1">
+            <a:schemeClr val="accent1"/>
+          </a:fillRef>
+          <a:effectRef idx="0">
+            <a:schemeClr val="accent1"/>
+          </a:effectRef>
+          <a:fontRef idx="minor">
+            <a:schemeClr val="lt1"/>
+          </a:fontRef>
+        </p:style>
+        <p:txBody>
+          <a:bodyPr rtlCol="0" anchor="ctr"/>
+          <a:lstStyle/>
+          <a:p>
+            <a:pPr algn="ctr"/>
+            <a:endParaRPr lang="en-US"/>
+          </a:p>
+        </p:txBody>
+      </p:sp>
+      <p:graphicFrame>
+        <p:nvGraphicFramePr>
+          <p:cNvPr id="5" name="Content Placeholder 4">
+            <a:extLst>
+              <a:ext uri="{FF2B5EF4-FFF2-40B4-BE49-F238E27FC236}">
+                <a16:creationId xmlns:a16="http://schemas.microsoft.com/office/drawing/2014/main" id="{318C9CFE-995A-CA8A-2778-D83AB0566572}"/>
+              </a:ext>
+            </a:extLst>
+          </p:cNvPr>
+          <p:cNvGraphicFramePr>
+            <a:graphicFrameLocks noGrp="1"/>
+          </p:cNvGraphicFramePr>
+          <p:nvPr>
+            <p:ph idx="1"/>
+            <p:extLst>
+              <p:ext uri="{D42A27DB-BD31-4B8C-83A1-F6EECF244321}">
+                <p14:modId xmlns:p14="http://schemas.microsoft.com/office/powerpoint/2010/main" val="431326579"/>
+              </p:ext>
+            </p:extLst>
+          </p:nvPr>
+        </p:nvGraphicFramePr>
+        <p:xfrm>
+          <a:off x="320040" y="3098478"/>
+          <a:ext cx="11548873" cy="2656341"/>
+        </p:xfrm>
+        <a:graphic>
+          <a:graphicData uri="http://schemas.openxmlformats.org/drawingml/2006/table">
+            <a:tbl>
+              <a:tblPr firstRow="1" bandRow="1">
+                <a:solidFill>
+                  <a:schemeClr val="bg1"/>
+                </a:solidFill>
+                <a:tableStyleId>{5C22544A-7EE6-4342-B048-85BDC9FD1C3A}</a:tableStyleId>
+              </a:tblPr>
+              <a:tblGrid>
+                <a:gridCol w="2869908">
+                  <a:extLst>
+                    <a:ext uri="{9D8B030D-6E8A-4147-A177-3AD203B41FA5}">
+                      <a16:colId xmlns:a16="http://schemas.microsoft.com/office/drawing/2014/main" val="1589278202"/>
+                    </a:ext>
+                  </a:extLst>
+                </a:gridCol>
+                <a:gridCol w="4600921">
+                  <a:extLst>
+                    <a:ext uri="{9D8B030D-6E8A-4147-A177-3AD203B41FA5}">
+                      <a16:colId xmlns:a16="http://schemas.microsoft.com/office/drawing/2014/main" val="24455531"/>
+                    </a:ext>
+                  </a:extLst>
+                </a:gridCol>
+                <a:gridCol w="4078044">
+                  <a:extLst>
+                    <a:ext uri="{9D8B030D-6E8A-4147-A177-3AD203B41FA5}">
+                      <a16:colId xmlns:a16="http://schemas.microsoft.com/office/drawing/2014/main" val="3430836541"/>
+                    </a:ext>
+                  </a:extLst>
+                </a:gridCol>
+              </a:tblGrid>
+              <a:tr h="885447">
+                <a:tc>
+                  <a:txBody>
+                    <a:bodyPr/>
+                    <a:lstStyle/>
+                    <a:p>
+                      <a:endParaRPr lang="en-US" sz="2900" b="0" cap="none" spc="0">
+                        <a:solidFill>
+                          <a:schemeClr val="bg1"/>
+                        </a:solidFill>
+                      </a:endParaRPr>
+                    </a:p>
+                  </a:txBody>
+                  <a:tcPr marL="243186" marR="187066" marT="187066" marB="187066" anchor="ctr">
+                    <a:lnL w="19050" cap="flat" cmpd="sng" algn="ctr">
+                      <a:solidFill>
+                        <a:schemeClr val="tx1"/>
+                      </a:solidFill>
+                      <a:prstDash val="solid"/>
+                    </a:lnL>
+                    <a:lnR w="12700" cmpd="sng">
+                      <a:noFill/>
+                    </a:lnR>
+                    <a:lnT w="19050" cap="flat" cmpd="sng" algn="ctr">
+                      <a:solidFill>
+                        <a:schemeClr val="tx1"/>
+                      </a:solidFill>
+                      <a:prstDash val="solid"/>
+                    </a:lnT>
+                    <a:lnB w="38100" cmpd="sng">
+                      <a:noFill/>
+                    </a:lnB>
+                    <a:solidFill>
+                      <a:schemeClr val="tx1"/>
+                    </a:solidFill>
+                  </a:tcPr>
+                </a:tc>
+                <a:tc>
+                  <a:txBody>
+                    <a:bodyPr/>
+                    <a:lstStyle/>
+                    <a:p>
+                      <a:pPr algn="ctr"/>
+                      <a:r>
+                        <a:rPr lang="en-US" sz="2900" b="0" cap="none" spc="0">
+                          <a:solidFill>
+                            <a:schemeClr val="bg1"/>
+                          </a:solidFill>
+                        </a:rPr>
+                        <a:t>Labeled as not offensive</a:t>
+                      </a:r>
+                    </a:p>
+                  </a:txBody>
+                  <a:tcPr marL="243186" marR="187066" marT="187066" marB="187066" anchor="ctr">
+                    <a:lnL w="12700" cmpd="sng">
+                      <a:noFill/>
+                    </a:lnL>
+                    <a:lnR w="12700" cmpd="sng">
+                      <a:noFill/>
+                    </a:lnR>
+                    <a:lnT w="19050" cap="flat" cmpd="sng" algn="ctr">
+                      <a:solidFill>
+                        <a:schemeClr val="tx1"/>
+                      </a:solidFill>
+                      <a:prstDash val="solid"/>
+                    </a:lnT>
+                    <a:lnB w="38100" cmpd="sng">
+                      <a:noFill/>
+                    </a:lnB>
+                    <a:solidFill>
+                      <a:schemeClr val="tx1"/>
+                    </a:solidFill>
+                  </a:tcPr>
+                </a:tc>
+                <a:tc>
+                  <a:txBody>
+                    <a:bodyPr/>
+                    <a:lstStyle/>
+                    <a:p>
+                      <a:pPr algn="ctr"/>
+                      <a:r>
+                        <a:rPr lang="en-US" sz="2900" b="0" cap="none" spc="0">
+                          <a:solidFill>
+                            <a:schemeClr val="bg1"/>
+                          </a:solidFill>
+                        </a:rPr>
+                        <a:t>Labeled as Offensive</a:t>
+                      </a:r>
+                    </a:p>
+                  </a:txBody>
+                  <a:tcPr marL="243186" marR="187066" marT="187066" marB="187066" anchor="ctr">
+                    <a:lnL w="12700" cmpd="sng">
+                      <a:noFill/>
+                    </a:lnL>
+                    <a:lnR w="12700" cmpd="sng">
+                      <a:noFill/>
+                    </a:lnR>
+                    <a:lnT w="19050" cap="flat" cmpd="sng" algn="ctr">
+                      <a:solidFill>
+                        <a:schemeClr val="tx1"/>
+                      </a:solidFill>
+                      <a:prstDash val="solid"/>
+                    </a:lnT>
+                    <a:lnB w="38100" cmpd="sng">
+                      <a:noFill/>
+                    </a:lnB>
+                    <a:solidFill>
+                      <a:schemeClr val="tx1"/>
+                    </a:solidFill>
+                  </a:tcPr>
+                </a:tc>
+                <a:extLst>
+                  <a:ext uri="{0D108BD9-81ED-4DB2-BD59-A6C34878D82A}">
+                    <a16:rowId xmlns:a16="http://schemas.microsoft.com/office/drawing/2014/main" val="1344967089"/>
+                  </a:ext>
+                </a:extLst>
+              </a:tr>
+              <a:tr h="885447">
+                <a:tc>
+                  <a:txBody>
+                    <a:bodyPr/>
+                    <a:lstStyle/>
+                    <a:p>
+                      <a:r>
+                        <a:rPr lang="en-US" sz="2900" cap="none" spc="0">
+                          <a:solidFill>
+                            <a:schemeClr val="tx1"/>
+                          </a:solidFill>
+                        </a:rPr>
+                        <a:t>Not Offensive</a:t>
+                      </a:r>
+                    </a:p>
+                  </a:txBody>
+                  <a:tcPr marL="243186" marR="187066" marT="187066" marB="187066">
+                    <a:lnL w="19050" cap="flat" cmpd="sng" algn="ctr">
+                      <a:solidFill>
+                        <a:schemeClr val="tx1"/>
+                      </a:solidFill>
+                      <a:prstDash val="solid"/>
+                    </a:lnL>
+                    <a:lnR w="19050" cap="flat" cmpd="sng" algn="ctr">
+                      <a:solidFill>
+                        <a:schemeClr val="tx1"/>
+                      </a:solidFill>
+                      <a:prstDash val="solid"/>
+                    </a:lnR>
+                    <a:lnT w="38100" cmpd="sng">
+                      <a:noFill/>
+                    </a:lnT>
+                    <a:lnB w="6350" cap="flat" cmpd="sng" algn="ctr">
+                      <a:solidFill>
+                        <a:schemeClr val="tx1">
+                          <a:lumMod val="50000"/>
+                          <a:lumOff val="50000"/>
+                        </a:schemeClr>
+                      </a:solidFill>
+                      <a:prstDash val="solid"/>
+                    </a:lnB>
+                    <a:noFill/>
+                  </a:tcPr>
+                </a:tc>
+                <a:tc>
+                  <a:txBody>
+                    <a:bodyPr/>
+                    <a:lstStyle/>
+                    <a:p>
+                      <a:pPr algn="ctr"/>
+                      <a:r>
+                        <a:rPr lang="en-US" sz="2900" cap="none" spc="0" dirty="0">
+                          <a:solidFill>
+                            <a:schemeClr val="tx1"/>
+                          </a:solidFill>
+                        </a:rPr>
+                        <a:t>1286</a:t>
+                      </a:r>
+                    </a:p>
+                  </a:txBody>
+                  <a:tcPr marL="243186" marR="187066" marT="187066" marB="187066">
+                    <a:lnL w="19050" cap="flat" cmpd="sng" algn="ctr">
+                      <a:solidFill>
+                        <a:schemeClr val="tx1"/>
+                      </a:solidFill>
+                      <a:prstDash val="solid"/>
+                    </a:lnL>
+                    <a:lnR w="19050" cap="flat" cmpd="sng" algn="ctr">
+                      <a:solidFill>
+                        <a:schemeClr val="tx1"/>
+                      </a:solidFill>
+                      <a:prstDash val="solid"/>
+                    </a:lnR>
+                    <a:lnT w="38100" cmpd="sng">
+                      <a:noFill/>
+                    </a:lnT>
+                    <a:lnB w="6350" cap="flat" cmpd="sng" algn="ctr">
+                      <a:solidFill>
+                        <a:schemeClr val="tx1">
+                          <a:lumMod val="50000"/>
+                          <a:lumOff val="50000"/>
+                        </a:schemeClr>
+                      </a:solidFill>
+                      <a:prstDash val="solid"/>
+                    </a:lnB>
+                    <a:noFill/>
+                  </a:tcPr>
+                </a:tc>
+                <a:tc>
+                  <a:txBody>
+                    <a:bodyPr/>
+                    <a:lstStyle/>
+                    <a:p>
+                      <a:pPr algn="ctr"/>
+                      <a:r>
+                        <a:rPr lang="en-US" sz="2900" cap="none" spc="0" dirty="0">
+                          <a:solidFill>
+                            <a:schemeClr val="tx1"/>
+                          </a:solidFill>
+                        </a:rPr>
+                        <a:t>16</a:t>
+                      </a:r>
+                    </a:p>
+                  </a:txBody>
+                  <a:tcPr marL="243186" marR="187066" marT="187066" marB="187066">
+                    <a:lnL w="19050" cap="flat" cmpd="sng" algn="ctr">
+                      <a:solidFill>
+                        <a:schemeClr val="tx1"/>
+                      </a:solidFill>
+                      <a:prstDash val="solid"/>
+                    </a:lnL>
+                    <a:lnR w="19050" cap="flat" cmpd="sng" algn="ctr">
+                      <a:solidFill>
+                        <a:schemeClr val="tx1"/>
+                      </a:solidFill>
+                      <a:prstDash val="solid"/>
+                    </a:lnR>
+                    <a:lnT w="38100" cmpd="sng">
+                      <a:noFill/>
+                    </a:lnT>
+                    <a:lnB w="6350" cap="flat" cmpd="sng" algn="ctr">
+                      <a:solidFill>
+                        <a:schemeClr val="tx1">
+                          <a:lumMod val="50000"/>
+                          <a:lumOff val="50000"/>
+                        </a:schemeClr>
+                      </a:solidFill>
+                      <a:prstDash val="solid"/>
+                    </a:lnB>
+                    <a:noFill/>
+                  </a:tcPr>
+                </a:tc>
+                <a:extLst>
+                  <a:ext uri="{0D108BD9-81ED-4DB2-BD59-A6C34878D82A}">
+                    <a16:rowId xmlns:a16="http://schemas.microsoft.com/office/drawing/2014/main" val="96665879"/>
+                  </a:ext>
+                </a:extLst>
+              </a:tr>
+              <a:tr h="885447">
+                <a:tc>
+                  <a:txBody>
+                    <a:bodyPr/>
+                    <a:lstStyle/>
+                    <a:p>
+                      <a:r>
+                        <a:rPr lang="en-US" sz="2900" cap="none" spc="0">
+                          <a:solidFill>
+                            <a:schemeClr val="tx1"/>
+                          </a:solidFill>
+                        </a:rPr>
+                        <a:t>Offensive</a:t>
+                      </a:r>
+                    </a:p>
+                  </a:txBody>
+                  <a:tcPr marL="243186" marR="187066" marT="187066" marB="187066">
+                    <a:lnL w="19050" cap="flat" cmpd="sng" algn="ctr">
+                      <a:solidFill>
+                        <a:schemeClr val="tx1"/>
+                      </a:solidFill>
+                      <a:prstDash val="solid"/>
+                    </a:lnL>
+                    <a:lnR w="19050" cap="flat" cmpd="sng" algn="ctr">
+                      <a:solidFill>
+                        <a:schemeClr val="tx1"/>
+                      </a:solidFill>
+                      <a:prstDash val="solid"/>
+                    </a:lnR>
+                    <a:lnT w="6350" cap="flat" cmpd="sng" algn="ctr">
+                      <a:solidFill>
+                        <a:schemeClr val="tx1">
+                          <a:lumMod val="50000"/>
+                          <a:lumOff val="50000"/>
+                        </a:schemeClr>
+                      </a:solidFill>
+                      <a:prstDash val="solid"/>
+                    </a:lnT>
+                    <a:lnB w="12700" cmpd="sng">
+                      <a:noFill/>
+                      <a:prstDash val="solid"/>
+                    </a:lnB>
+                    <a:solidFill>
+                      <a:schemeClr val="bg1">
+                        <a:lumMod val="85000"/>
+                      </a:schemeClr>
+                    </a:solidFill>
+                  </a:tcPr>
+                </a:tc>
+                <a:tc>
+                  <a:txBody>
+                    <a:bodyPr/>
+                    <a:lstStyle/>
+                    <a:p>
+                      <a:pPr algn="ctr"/>
+                      <a:r>
+                        <a:rPr lang="en-US" sz="2900" cap="none" spc="0" dirty="0">
+                          <a:solidFill>
+                            <a:schemeClr val="tx1"/>
+                          </a:solidFill>
+                        </a:rPr>
+                        <a:t>63</a:t>
+                      </a:r>
+                    </a:p>
+                  </a:txBody>
+                  <a:tcPr marL="243186" marR="187066" marT="187066" marB="187066">
+                    <a:lnL w="19050" cap="flat" cmpd="sng" algn="ctr">
+                      <a:solidFill>
+                        <a:schemeClr val="tx1"/>
+                      </a:solidFill>
+                      <a:prstDash val="solid"/>
+                    </a:lnL>
+                    <a:lnR w="19050" cap="flat" cmpd="sng" algn="ctr">
+                      <a:solidFill>
+                        <a:schemeClr val="tx1"/>
+                      </a:solidFill>
+                      <a:prstDash val="solid"/>
+                    </a:lnR>
+                    <a:lnT w="6350" cap="flat" cmpd="sng" algn="ctr">
+                      <a:solidFill>
+                        <a:schemeClr val="tx1">
+                          <a:lumMod val="50000"/>
+                          <a:lumOff val="50000"/>
+                        </a:schemeClr>
+                      </a:solidFill>
+                      <a:prstDash val="solid"/>
+                    </a:lnT>
+                    <a:lnB w="12700" cmpd="sng">
+                      <a:noFill/>
+                      <a:prstDash val="solid"/>
+                    </a:lnB>
+                    <a:solidFill>
+                      <a:schemeClr val="bg1">
+                        <a:lumMod val="85000"/>
+                      </a:schemeClr>
+                    </a:solidFill>
+                  </a:tcPr>
+                </a:tc>
+                <a:tc>
+                  <a:txBody>
+                    <a:bodyPr/>
+                    <a:lstStyle/>
+                    <a:p>
+                      <a:pPr algn="ctr"/>
+                      <a:r>
+                        <a:rPr lang="en-US" sz="2900" cap="none" spc="0" dirty="0">
+                          <a:solidFill>
+                            <a:schemeClr val="tx1"/>
+                          </a:solidFill>
+                        </a:rPr>
+                        <a:t>179</a:t>
+                      </a:r>
+                    </a:p>
+                  </a:txBody>
+                  <a:tcPr marL="243186" marR="187066" marT="187066" marB="187066">
+                    <a:lnL w="19050" cap="flat" cmpd="sng" algn="ctr">
+                      <a:solidFill>
+                        <a:schemeClr val="tx1"/>
+                      </a:solidFill>
+                      <a:prstDash val="solid"/>
+                    </a:lnL>
+                    <a:lnR w="12700" cmpd="sng">
+                      <a:noFill/>
+                      <a:prstDash val="solid"/>
+                    </a:lnR>
+                    <a:lnT w="6350" cap="flat" cmpd="sng" algn="ctr">
+                      <a:solidFill>
+                        <a:schemeClr val="tx1">
+                          <a:lumMod val="50000"/>
+                          <a:lumOff val="50000"/>
+                        </a:schemeClr>
+                      </a:solidFill>
+                      <a:prstDash val="solid"/>
+                    </a:lnT>
+                    <a:lnB w="12700" cmpd="sng">
+                      <a:noFill/>
+                      <a:prstDash val="solid"/>
+                    </a:lnB>
+                    <a:solidFill>
+                      <a:schemeClr val="bg1">
+                        <a:lumMod val="85000"/>
+                      </a:schemeClr>
+                    </a:solidFill>
+                  </a:tcPr>
+                </a:tc>
+                <a:extLst>
+                  <a:ext uri="{0D108BD9-81ED-4DB2-BD59-A6C34878D82A}">
+                    <a16:rowId xmlns:a16="http://schemas.microsoft.com/office/drawing/2014/main" val="344236825"/>
+                  </a:ext>
+                </a:extLst>
+              </a:tr>
+            </a:tbl>
+          </a:graphicData>
+        </a:graphic>
+      </p:graphicFrame>
+    </p:spTree>
+    <p:extLst>
+      <p:ext uri="{BB962C8B-B14F-4D97-AF65-F5344CB8AC3E}">
+        <p14:creationId xmlns:p14="http://schemas.microsoft.com/office/powerpoint/2010/main" val="3316719076"/>
+      </p:ext>
+    </p:extLst>
+  </p:cSld>
+  <p:clrMapOvr>
+    <a:masterClrMapping/>
+  </p:clrMapOvr>
+</p:sld>
+</file>
+
+<file path=ppt/slides/slide24.xml><?xml version="1.0" encoding="utf-8"?>
+<p:sld xmlns:a="http://schemas.openxmlformats.org/drawingml/2006/main" xmlns:r="http://schemas.openxmlformats.org/officeDocument/2006/relationships" xmlns:p="http://schemas.openxmlformats.org/presentationml/2006/main">
+  <p:cSld>
+    <p:bg>
+      <p:bgPr>
+        <a:solidFill>
+          <a:schemeClr val="bg1"/>
+        </a:solidFill>
+        <a:effectLst/>
+      </p:bgPr>
+    </p:bg>
+    <p:spTree>
+      <p:nvGrpSpPr>
+        <p:cNvPr id="1" name="">
+          <a:extLst>
+            <a:ext uri="{FF2B5EF4-FFF2-40B4-BE49-F238E27FC236}">
+              <a16:creationId xmlns:a16="http://schemas.microsoft.com/office/drawing/2014/main" id="{4FBC3AC9-0601-A9DE-4C08-D87CE57F2077}"/>
+            </a:ext>
+          </a:extLst>
+        </p:cNvPr>
+        <p:cNvGrpSpPr/>
+        <p:nvPr/>
+      </p:nvGrpSpPr>
+      <p:grpSpPr>
+        <a:xfrm>
+          <a:off x="0" y="0"/>
+          <a:ext cx="0" cy="0"/>
+          <a:chOff x="0" y="0"/>
+          <a:chExt cx="0" cy="0"/>
+        </a:xfrm>
+      </p:grpSpPr>
+      <p:sp useBgFill="1">
+        <p:nvSpPr>
+          <p:cNvPr id="11" name="Rectangle 10">
+            <a:extLst>
+              <a:ext uri="{FF2B5EF4-FFF2-40B4-BE49-F238E27FC236}">
+                <a16:creationId xmlns:a16="http://schemas.microsoft.com/office/drawing/2014/main" id="{1E2DA7D8-9904-6B99-8498-FDF942B90DD2}"/>
+              </a:ext>
+              <a:ext uri="{C183D7F6-B498-43B3-948B-1728B52AA6E4}">
+                <adec:decorative xmlns:adec="http://schemas.microsoft.com/office/drawing/2017/decorative" val="1"/>
+              </a:ext>
+            </a:extLst>
+          </p:cNvPr>
+          <p:cNvSpPr>
+            <a:spLocks noGrp="1" noRot="1" noChangeAspect="1" noMove="1" noResize="1" noEditPoints="1" noAdjustHandles="1" noChangeArrowheads="1" noChangeShapeType="1" noTextEdit="1"/>
+          </p:cNvSpPr>
+          <p:nvPr>
+            <p:extLst>
+              <p:ext uri="{386F3935-93C4-4BCD-93E2-E3B085C9AB24}">
+                <p16:designElem xmlns:p16="http://schemas.microsoft.com/office/powerpoint/2015/main" val="1"/>
+              </p:ext>
+            </p:extLst>
+          </p:nvPr>
+        </p:nvSpPr>
+        <p:spPr>
+          <a:xfrm>
+            <a:off x="0" y="0"/>
+            <a:ext cx="12192000" cy="6858000"/>
+          </a:xfrm>
+          <a:prstGeom prst="rect">
+            <a:avLst/>
+          </a:prstGeom>
+          <a:ln>
+            <a:noFill/>
+          </a:ln>
+        </p:spPr>
+        <p:style>
+          <a:lnRef idx="2">
+            <a:schemeClr val="accent1">
+              <a:shade val="50000"/>
+            </a:schemeClr>
+          </a:lnRef>
+          <a:fillRef idx="1">
+            <a:schemeClr val="accent1"/>
+          </a:fillRef>
+          <a:effectRef idx="0">
+            <a:schemeClr val="accent1"/>
+          </a:effectRef>
+          <a:fontRef idx="minor">
+            <a:schemeClr val="lt1"/>
+          </a:fontRef>
+        </p:style>
+        <p:txBody>
+          <a:bodyPr rtlCol="0" anchor="ctr"/>
+          <a:lstStyle/>
+          <a:p>
+            <a:pPr algn="ctr"/>
+            <a:endParaRPr lang="en-US"/>
+          </a:p>
+        </p:txBody>
+      </p:sp>
+      <p:sp>
+        <p:nvSpPr>
+          <p:cNvPr id="6" name="Title 5">
+            <a:extLst>
+              <a:ext uri="{FF2B5EF4-FFF2-40B4-BE49-F238E27FC236}">
+                <a16:creationId xmlns:a16="http://schemas.microsoft.com/office/drawing/2014/main" id="{4941B96C-37BF-37C3-C167-EE5151B64657}"/>
+              </a:ext>
+            </a:extLst>
+          </p:cNvPr>
+          <p:cNvSpPr>
+            <a:spLocks noGrp="1"/>
+          </p:cNvSpPr>
+          <p:nvPr>
+            <p:ph type="title"/>
+          </p:nvPr>
+        </p:nvSpPr>
+        <p:spPr>
+          <a:xfrm>
+            <a:off x="638881" y="417576"/>
+            <a:ext cx="10909640" cy="1249394"/>
+          </a:xfrm>
+        </p:spPr>
+        <p:txBody>
+          <a:bodyPr vert="horz" lIns="91440" tIns="45720" rIns="91440" bIns="45720" rtlCol="0" anchor="ctr">
+            <a:normAutofit fontScale="90000"/>
+          </a:bodyPr>
+          <a:lstStyle/>
+          <a:p>
+            <a:pPr algn="ctr"/>
+            <a:r>
+              <a:rPr lang="en-US" sz="6600" kern="1200" dirty="0">
+                <a:solidFill>
+                  <a:schemeClr val="tx1"/>
+                </a:solidFill>
+                <a:latin typeface="+mj-lt"/>
+                <a:ea typeface="+mj-ea"/>
+                <a:cs typeface="+mj-cs"/>
+              </a:rPr>
+              <a:t>Intermediate model confusion matrix</a:t>
+            </a:r>
+          </a:p>
+        </p:txBody>
+      </p:sp>
+      <p:sp>
+        <p:nvSpPr>
+          <p:cNvPr id="13" name="sketch line">
+            <a:extLst>
+              <a:ext uri="{FF2B5EF4-FFF2-40B4-BE49-F238E27FC236}">
+                <a16:creationId xmlns:a16="http://schemas.microsoft.com/office/drawing/2014/main" id="{1C36EAD8-0368-730F-0700-AA50AD94E6F1}"/>
+              </a:ext>
+              <a:ext uri="{C183D7F6-B498-43B3-948B-1728B52AA6E4}">
+                <adec:decorative xmlns:adec="http://schemas.microsoft.com/office/drawing/2017/decorative" val="1"/>
+              </a:ext>
+            </a:extLst>
+          </p:cNvPr>
+          <p:cNvSpPr>
+            <a:spLocks noGrp="1" noRot="1" noChangeAspect="1" noMove="1" noResize="1" noEditPoints="1" noAdjustHandles="1" noChangeArrowheads="1" noChangeShapeType="1" noTextEdit="1"/>
+          </p:cNvSpPr>
+          <p:nvPr>
+            <p:extLst>
+              <p:ext uri="{386F3935-93C4-4BCD-93E2-E3B085C9AB24}">
+                <p16:designElem xmlns:p16="http://schemas.microsoft.com/office/powerpoint/2015/main" val="1"/>
+              </p:ext>
+            </p:extLst>
+          </p:nvPr>
+        </p:nvSpPr>
+        <p:spPr>
+          <a:xfrm>
+            <a:off x="3807702" y="1733454"/>
+            <a:ext cx="4572000" cy="18288"/>
+          </a:xfrm>
+          <a:custGeom>
+            <a:avLst/>
+            <a:gdLst>
+              <a:gd name="csX0" fmla="*/ 0 w 4572000"/>
+              <a:gd name="csY0" fmla="*/ 0 h 18288"/>
+              <a:gd name="csX1" fmla="*/ 515983 w 4572000"/>
+              <a:gd name="csY1" fmla="*/ 0 h 18288"/>
+              <a:gd name="csX2" fmla="*/ 1031966 w 4572000"/>
+              <a:gd name="csY2" fmla="*/ 0 h 18288"/>
+              <a:gd name="csX3" fmla="*/ 1639389 w 4572000"/>
+              <a:gd name="csY3" fmla="*/ 0 h 18288"/>
+              <a:gd name="csX4" fmla="*/ 2383971 w 4572000"/>
+              <a:gd name="csY4" fmla="*/ 0 h 18288"/>
+              <a:gd name="csX5" fmla="*/ 2945674 w 4572000"/>
+              <a:gd name="csY5" fmla="*/ 0 h 18288"/>
+              <a:gd name="csX6" fmla="*/ 3507377 w 4572000"/>
+              <a:gd name="csY6" fmla="*/ 0 h 18288"/>
+              <a:gd name="csX7" fmla="*/ 4572000 w 4572000"/>
+              <a:gd name="csY7" fmla="*/ 0 h 18288"/>
+              <a:gd name="csX8" fmla="*/ 4572000 w 4572000"/>
+              <a:gd name="csY8" fmla="*/ 18288 h 18288"/>
+              <a:gd name="csX9" fmla="*/ 3873137 w 4572000"/>
+              <a:gd name="csY9" fmla="*/ 18288 h 18288"/>
+              <a:gd name="csX10" fmla="*/ 3311434 w 4572000"/>
+              <a:gd name="csY10" fmla="*/ 18288 h 18288"/>
+              <a:gd name="csX11" fmla="*/ 2749731 w 4572000"/>
+              <a:gd name="csY11" fmla="*/ 18288 h 18288"/>
+              <a:gd name="csX12" fmla="*/ 2050869 w 4572000"/>
+              <a:gd name="csY12" fmla="*/ 18288 h 18288"/>
+              <a:gd name="csX13" fmla="*/ 1306286 w 4572000"/>
+              <a:gd name="csY13" fmla="*/ 18288 h 18288"/>
+              <a:gd name="csX14" fmla="*/ 790303 w 4572000"/>
+              <a:gd name="csY14" fmla="*/ 18288 h 18288"/>
+              <a:gd name="csX15" fmla="*/ 0 w 4572000"/>
+              <a:gd name="csY15" fmla="*/ 18288 h 18288"/>
+              <a:gd name="csX16" fmla="*/ 0 w 4572000"/>
+              <a:gd name="csY16" fmla="*/ 0 h 18288"/>
+            </a:gdLst>
+            <a:ahLst/>
+            <a:cxnLst>
+              <a:cxn ang="0">
+                <a:pos x="csX0" y="csY0"/>
+              </a:cxn>
+              <a:cxn ang="0">
+                <a:pos x="csX1" y="csY1"/>
+              </a:cxn>
+              <a:cxn ang="0">
+                <a:pos x="csX2" y="csY2"/>
+              </a:cxn>
+              <a:cxn ang="0">
+                <a:pos x="csX3" y="csY3"/>
+              </a:cxn>
+              <a:cxn ang="0">
+                <a:pos x="csX4" y="csY4"/>
+              </a:cxn>
+              <a:cxn ang="0">
+                <a:pos x="csX5" y="csY5"/>
+              </a:cxn>
+              <a:cxn ang="0">
+                <a:pos x="csX6" y="csY6"/>
+              </a:cxn>
+              <a:cxn ang="0">
+                <a:pos x="csX7" y="csY7"/>
+              </a:cxn>
+              <a:cxn ang="0">
+                <a:pos x="csX8" y="csY8"/>
+              </a:cxn>
+              <a:cxn ang="0">
+                <a:pos x="csX9" y="csY9"/>
+              </a:cxn>
+              <a:cxn ang="0">
+                <a:pos x="csX10" y="csY10"/>
+              </a:cxn>
+              <a:cxn ang="0">
+                <a:pos x="csX11" y="csY11"/>
+              </a:cxn>
+              <a:cxn ang="0">
+                <a:pos x="csX12" y="csY12"/>
+              </a:cxn>
+              <a:cxn ang="0">
+                <a:pos x="csX13" y="csY13"/>
+              </a:cxn>
+              <a:cxn ang="0">
+                <a:pos x="csX14" y="csY14"/>
+              </a:cxn>
+              <a:cxn ang="0">
+                <a:pos x="csX15" y="csY15"/>
+              </a:cxn>
+              <a:cxn ang="0">
+                <a:pos x="csX16" y="csY16"/>
+              </a:cxn>
+            </a:cxnLst>
+            <a:rect l="l" t="t" r="r" b="b"/>
+            <a:pathLst>
+              <a:path w="4572000" h="18288" fill="none" extrusionOk="0">
+                <a:moveTo>
+                  <a:pt x="0" y="0"/>
+                </a:moveTo>
+                <a:cubicBezTo>
+                  <a:pt x="105156" y="-20963"/>
+                  <a:pt x="340432" y="822"/>
+                  <a:pt x="515983" y="0"/>
+                </a:cubicBezTo>
+                <a:cubicBezTo>
+                  <a:pt x="691534" y="-822"/>
+                  <a:pt x="850679" y="16479"/>
+                  <a:pt x="1031966" y="0"/>
+                </a:cubicBezTo>
+                <a:cubicBezTo>
+                  <a:pt x="1213253" y="-16479"/>
+                  <a:pt x="1443646" y="-18730"/>
+                  <a:pt x="1639389" y="0"/>
+                </a:cubicBezTo>
+                <a:cubicBezTo>
+                  <a:pt x="1835132" y="18730"/>
+                  <a:pt x="2159975" y="18531"/>
+                  <a:pt x="2383971" y="0"/>
+                </a:cubicBezTo>
+                <a:cubicBezTo>
+                  <a:pt x="2607967" y="-18531"/>
+                  <a:pt x="2719096" y="-12030"/>
+                  <a:pt x="2945674" y="0"/>
+                </a:cubicBezTo>
+                <a:cubicBezTo>
+                  <a:pt x="3172252" y="12030"/>
+                  <a:pt x="3269167" y="27666"/>
+                  <a:pt x="3507377" y="0"/>
+                </a:cubicBezTo>
+                <a:cubicBezTo>
+                  <a:pt x="3745587" y="-27666"/>
+                  <a:pt x="4116741" y="18705"/>
+                  <a:pt x="4572000" y="0"/>
+                </a:cubicBezTo>
+                <a:cubicBezTo>
+                  <a:pt x="4572895" y="8974"/>
+                  <a:pt x="4571454" y="9359"/>
+                  <a:pt x="4572000" y="18288"/>
+                </a:cubicBezTo>
+                <a:cubicBezTo>
+                  <a:pt x="4374698" y="3942"/>
+                  <a:pt x="4098874" y="-11042"/>
+                  <a:pt x="3873137" y="18288"/>
+                </a:cubicBezTo>
+                <a:cubicBezTo>
+                  <a:pt x="3647400" y="47618"/>
+                  <a:pt x="3517055" y="5421"/>
+                  <a:pt x="3311434" y="18288"/>
+                </a:cubicBezTo>
+                <a:cubicBezTo>
+                  <a:pt x="3105813" y="31155"/>
+                  <a:pt x="3025168" y="17856"/>
+                  <a:pt x="2749731" y="18288"/>
+                </a:cubicBezTo>
+                <a:cubicBezTo>
+                  <a:pt x="2474294" y="18720"/>
+                  <a:pt x="2291766" y="-14168"/>
+                  <a:pt x="2050869" y="18288"/>
+                </a:cubicBezTo>
+                <a:cubicBezTo>
+                  <a:pt x="1809972" y="50744"/>
+                  <a:pt x="1540276" y="46798"/>
+                  <a:pt x="1306286" y="18288"/>
+                </a:cubicBezTo>
+                <a:cubicBezTo>
+                  <a:pt x="1072296" y="-10222"/>
+                  <a:pt x="972445" y="19645"/>
+                  <a:pt x="790303" y="18288"/>
+                </a:cubicBezTo>
+                <a:cubicBezTo>
+                  <a:pt x="608161" y="16931"/>
+                  <a:pt x="200981" y="8241"/>
+                  <a:pt x="0" y="18288"/>
+                </a:cubicBezTo>
+                <a:cubicBezTo>
+                  <a:pt x="-229" y="14222"/>
+                  <a:pt x="509" y="5816"/>
+                  <a:pt x="0" y="0"/>
+                </a:cubicBezTo>
+                <a:close/>
+              </a:path>
+              <a:path w="4572000" h="18288" stroke="0" extrusionOk="0">
+                <a:moveTo>
+                  <a:pt x="0" y="0"/>
+                </a:moveTo>
+                <a:cubicBezTo>
+                  <a:pt x="143285" y="-9565"/>
+                  <a:pt x="327959" y="-11498"/>
+                  <a:pt x="561703" y="0"/>
+                </a:cubicBezTo>
+                <a:cubicBezTo>
+                  <a:pt x="795447" y="11498"/>
+                  <a:pt x="838260" y="18255"/>
+                  <a:pt x="1077686" y="0"/>
+                </a:cubicBezTo>
+                <a:cubicBezTo>
+                  <a:pt x="1317112" y="-18255"/>
+                  <a:pt x="1437472" y="23514"/>
+                  <a:pt x="1639389" y="0"/>
+                </a:cubicBezTo>
+                <a:cubicBezTo>
+                  <a:pt x="1841306" y="-23514"/>
+                  <a:pt x="2037142" y="-12551"/>
+                  <a:pt x="2292531" y="0"/>
+                </a:cubicBezTo>
+                <a:cubicBezTo>
+                  <a:pt x="2547920" y="12551"/>
+                  <a:pt x="2810436" y="-20352"/>
+                  <a:pt x="2991394" y="0"/>
+                </a:cubicBezTo>
+                <a:cubicBezTo>
+                  <a:pt x="3172352" y="20352"/>
+                  <a:pt x="3530025" y="-13347"/>
+                  <a:pt x="3735977" y="0"/>
+                </a:cubicBezTo>
+                <a:cubicBezTo>
+                  <a:pt x="3941929" y="13347"/>
+                  <a:pt x="4161497" y="34086"/>
+                  <a:pt x="4572000" y="0"/>
+                </a:cubicBezTo>
+                <a:cubicBezTo>
+                  <a:pt x="4571545" y="6162"/>
+                  <a:pt x="4571903" y="11775"/>
+                  <a:pt x="4572000" y="18288"/>
+                </a:cubicBezTo>
+                <a:cubicBezTo>
+                  <a:pt x="4228040" y="36490"/>
+                  <a:pt x="4199736" y="42557"/>
+                  <a:pt x="3873137" y="18288"/>
+                </a:cubicBezTo>
+                <a:cubicBezTo>
+                  <a:pt x="3546538" y="-5981"/>
+                  <a:pt x="3472124" y="16809"/>
+                  <a:pt x="3128554" y="18288"/>
+                </a:cubicBezTo>
+                <a:cubicBezTo>
+                  <a:pt x="2784984" y="19767"/>
+                  <a:pt x="2735896" y="-17781"/>
+                  <a:pt x="2383971" y="18288"/>
+                </a:cubicBezTo>
+                <a:cubicBezTo>
+                  <a:pt x="2032046" y="54357"/>
+                  <a:pt x="2019324" y="2920"/>
+                  <a:pt x="1867989" y="18288"/>
+                </a:cubicBezTo>
+                <a:cubicBezTo>
+                  <a:pt x="1716654" y="33656"/>
+                  <a:pt x="1418675" y="32575"/>
+                  <a:pt x="1169126" y="18288"/>
+                </a:cubicBezTo>
+                <a:cubicBezTo>
+                  <a:pt x="919577" y="4001"/>
+                  <a:pt x="798537" y="16165"/>
+                  <a:pt x="561703" y="18288"/>
+                </a:cubicBezTo>
+                <a:cubicBezTo>
+                  <a:pt x="324869" y="20411"/>
+                  <a:pt x="221395" y="-912"/>
+                  <a:pt x="0" y="18288"/>
+                </a:cubicBezTo>
+                <a:cubicBezTo>
+                  <a:pt x="766" y="10800"/>
+                  <a:pt x="-457" y="8180"/>
+                  <a:pt x="0" y="0"/>
+                </a:cubicBezTo>
+                <a:close/>
+              </a:path>
+            </a:pathLst>
+          </a:custGeom>
+          <a:solidFill>
+            <a:schemeClr val="accent2"/>
+          </a:solidFill>
+          <a:ln w="41275" cap="rnd">
+            <a:solidFill>
+              <a:schemeClr val="accent2"/>
+            </a:solidFill>
+            <a:round/>
+            <a:extLst>
+              <a:ext uri="{C807C97D-BFC1-408E-A445-0C87EB9F89A2}">
+                <ask:lineSketchStyleProps xmlns:ask="http://schemas.microsoft.com/office/drawing/2018/sketchyshapes" sd="2727557108">
+                  <a:prstGeom prst="rect">
+                    <a:avLst/>
+                  </a:prstGeom>
+                  <ask:type>
+                    <ask:lineSketchFreehand/>
+                  </ask:type>
+                </ask:lineSketchStyleProps>
+              </a:ext>
+            </a:extLst>
+          </a:ln>
+        </p:spPr>
+        <p:style>
+          <a:lnRef idx="2">
+            <a:schemeClr val="accent1">
+              <a:shade val="50000"/>
+            </a:schemeClr>
+          </a:lnRef>
+          <a:fillRef idx="1">
+            <a:schemeClr val="accent1"/>
+          </a:fillRef>
+          <a:effectRef idx="0">
+            <a:schemeClr val="accent1"/>
+          </a:effectRef>
+          <a:fontRef idx="minor">
+            <a:schemeClr val="lt1"/>
+          </a:fontRef>
+        </p:style>
+        <p:txBody>
+          <a:bodyPr rtlCol="0" anchor="ctr"/>
+          <a:lstStyle/>
+          <a:p>
+            <a:pPr algn="ctr"/>
+            <a:endParaRPr lang="en-US"/>
+          </a:p>
+        </p:txBody>
+      </p:sp>
+      <p:graphicFrame>
+        <p:nvGraphicFramePr>
+          <p:cNvPr id="5" name="Content Placeholder 4">
+            <a:extLst>
+              <a:ext uri="{FF2B5EF4-FFF2-40B4-BE49-F238E27FC236}">
+                <a16:creationId xmlns:a16="http://schemas.microsoft.com/office/drawing/2014/main" id="{E8EAF014-4888-0FC6-AD38-CB3E44FDC728}"/>
+              </a:ext>
+            </a:extLst>
+          </p:cNvPr>
+          <p:cNvGraphicFramePr>
+            <a:graphicFrameLocks noGrp="1"/>
+          </p:cNvGraphicFramePr>
+          <p:nvPr>
+            <p:ph idx="1"/>
+            <p:extLst>
+              <p:ext uri="{D42A27DB-BD31-4B8C-83A1-F6EECF244321}">
+                <p14:modId xmlns:p14="http://schemas.microsoft.com/office/powerpoint/2010/main" val="3847206008"/>
+              </p:ext>
+            </p:extLst>
+          </p:nvPr>
+        </p:nvGraphicFramePr>
+        <p:xfrm>
+          <a:off x="320040" y="3098478"/>
+          <a:ext cx="11548873" cy="2656341"/>
+        </p:xfrm>
+        <a:graphic>
+          <a:graphicData uri="http://schemas.openxmlformats.org/drawingml/2006/table">
+            <a:tbl>
+              <a:tblPr firstRow="1" bandRow="1">
+                <a:solidFill>
+                  <a:schemeClr val="bg1"/>
+                </a:solidFill>
+                <a:tableStyleId>{5C22544A-7EE6-4342-B048-85BDC9FD1C3A}</a:tableStyleId>
+              </a:tblPr>
+              <a:tblGrid>
+                <a:gridCol w="2869908">
+                  <a:extLst>
+                    <a:ext uri="{9D8B030D-6E8A-4147-A177-3AD203B41FA5}">
+                      <a16:colId xmlns:a16="http://schemas.microsoft.com/office/drawing/2014/main" val="1589278202"/>
+                    </a:ext>
+                  </a:extLst>
+                </a:gridCol>
+                <a:gridCol w="4600921">
+                  <a:extLst>
+                    <a:ext uri="{9D8B030D-6E8A-4147-A177-3AD203B41FA5}">
+                      <a16:colId xmlns:a16="http://schemas.microsoft.com/office/drawing/2014/main" val="24455531"/>
+                    </a:ext>
+                  </a:extLst>
+                </a:gridCol>
+                <a:gridCol w="4078044">
+                  <a:extLst>
+                    <a:ext uri="{9D8B030D-6E8A-4147-A177-3AD203B41FA5}">
+                      <a16:colId xmlns:a16="http://schemas.microsoft.com/office/drawing/2014/main" val="3430836541"/>
+                    </a:ext>
+                  </a:extLst>
+                </a:gridCol>
+              </a:tblGrid>
+              <a:tr h="885447">
+                <a:tc>
+                  <a:txBody>
+                    <a:bodyPr/>
+                    <a:lstStyle/>
+                    <a:p>
+                      <a:endParaRPr lang="en-US" sz="2900" b="0" cap="none" spc="0">
+                        <a:solidFill>
+                          <a:schemeClr val="bg1"/>
+                        </a:solidFill>
+                      </a:endParaRPr>
+                    </a:p>
+                  </a:txBody>
+                  <a:tcPr marL="243186" marR="187066" marT="187066" marB="187066" anchor="ctr">
+                    <a:lnL w="19050" cap="flat" cmpd="sng" algn="ctr">
+                      <a:solidFill>
+                        <a:schemeClr val="tx1"/>
+                      </a:solidFill>
+                      <a:prstDash val="solid"/>
+                    </a:lnL>
+                    <a:lnR w="12700" cmpd="sng">
+                      <a:noFill/>
+                    </a:lnR>
+                    <a:lnT w="19050" cap="flat" cmpd="sng" algn="ctr">
+                      <a:solidFill>
+                        <a:schemeClr val="tx1"/>
+                      </a:solidFill>
+                      <a:prstDash val="solid"/>
+                    </a:lnT>
+                    <a:lnB w="38100" cmpd="sng">
+                      <a:noFill/>
+                    </a:lnB>
+                    <a:solidFill>
+                      <a:schemeClr val="tx1"/>
+                    </a:solidFill>
+                  </a:tcPr>
+                </a:tc>
+                <a:tc>
+                  <a:txBody>
+                    <a:bodyPr/>
+                    <a:lstStyle/>
+                    <a:p>
+                      <a:pPr algn="ctr"/>
+                      <a:r>
+                        <a:rPr lang="en-US" sz="2900" b="0" cap="none" spc="0">
+                          <a:solidFill>
+                            <a:schemeClr val="bg1"/>
+                          </a:solidFill>
+                        </a:rPr>
+                        <a:t>Labeled as not offensive</a:t>
+                      </a:r>
+                    </a:p>
+                  </a:txBody>
+                  <a:tcPr marL="243186" marR="187066" marT="187066" marB="187066" anchor="ctr">
+                    <a:lnL w="12700" cmpd="sng">
+                      <a:noFill/>
+                    </a:lnL>
+                    <a:lnR w="12700" cmpd="sng">
+                      <a:noFill/>
+                    </a:lnR>
+                    <a:lnT w="19050" cap="flat" cmpd="sng" algn="ctr">
+                      <a:solidFill>
+                        <a:schemeClr val="tx1"/>
+                      </a:solidFill>
+                      <a:prstDash val="solid"/>
+                    </a:lnT>
+                    <a:lnB w="38100" cmpd="sng">
+                      <a:noFill/>
+                    </a:lnB>
+                    <a:solidFill>
+                      <a:schemeClr val="tx1"/>
+                    </a:solidFill>
+                  </a:tcPr>
+                </a:tc>
+                <a:tc>
+                  <a:txBody>
+                    <a:bodyPr/>
+                    <a:lstStyle/>
+                    <a:p>
+                      <a:pPr algn="ctr"/>
+                      <a:r>
+                        <a:rPr lang="en-US" sz="2900" b="0" cap="none" spc="0">
+                          <a:solidFill>
+                            <a:schemeClr val="bg1"/>
+                          </a:solidFill>
+                        </a:rPr>
+                        <a:t>Labeled as Offensive</a:t>
+                      </a:r>
+                    </a:p>
+                  </a:txBody>
+                  <a:tcPr marL="243186" marR="187066" marT="187066" marB="187066" anchor="ctr">
+                    <a:lnL w="12700" cmpd="sng">
+                      <a:noFill/>
+                    </a:lnL>
+                    <a:lnR w="12700" cmpd="sng">
+                      <a:noFill/>
+                    </a:lnR>
+                    <a:lnT w="19050" cap="flat" cmpd="sng" algn="ctr">
+                      <a:solidFill>
+                        <a:schemeClr val="tx1"/>
+                      </a:solidFill>
+                      <a:prstDash val="solid"/>
+                    </a:lnT>
+                    <a:lnB w="38100" cmpd="sng">
+                      <a:noFill/>
+                    </a:lnB>
+                    <a:solidFill>
+                      <a:schemeClr val="tx1"/>
+                    </a:solidFill>
+                  </a:tcPr>
+                </a:tc>
+                <a:extLst>
+                  <a:ext uri="{0D108BD9-81ED-4DB2-BD59-A6C34878D82A}">
+                    <a16:rowId xmlns:a16="http://schemas.microsoft.com/office/drawing/2014/main" val="1344967089"/>
+                  </a:ext>
+                </a:extLst>
+              </a:tr>
+              <a:tr h="885447">
+                <a:tc>
+                  <a:txBody>
+                    <a:bodyPr/>
+                    <a:lstStyle/>
+                    <a:p>
+                      <a:r>
+                        <a:rPr lang="en-US" sz="2900" cap="none" spc="0">
+                          <a:solidFill>
+                            <a:schemeClr val="tx1"/>
+                          </a:solidFill>
+                        </a:rPr>
+                        <a:t>Not Offensive</a:t>
+                      </a:r>
+                    </a:p>
+                  </a:txBody>
+                  <a:tcPr marL="243186" marR="187066" marT="187066" marB="187066">
+                    <a:lnL w="19050" cap="flat" cmpd="sng" algn="ctr">
+                      <a:solidFill>
+                        <a:schemeClr val="tx1"/>
+                      </a:solidFill>
+                      <a:prstDash val="solid"/>
+                    </a:lnL>
+                    <a:lnR w="19050" cap="flat" cmpd="sng" algn="ctr">
+                      <a:solidFill>
+                        <a:schemeClr val="tx1"/>
+                      </a:solidFill>
+                      <a:prstDash val="solid"/>
+                    </a:lnR>
+                    <a:lnT w="38100" cmpd="sng">
+                      <a:noFill/>
+                    </a:lnT>
+                    <a:lnB w="6350" cap="flat" cmpd="sng" algn="ctr">
+                      <a:solidFill>
+                        <a:schemeClr val="tx1">
+                          <a:lumMod val="50000"/>
+                          <a:lumOff val="50000"/>
+                        </a:schemeClr>
+                      </a:solidFill>
+                      <a:prstDash val="solid"/>
+                    </a:lnB>
+                    <a:noFill/>
+                  </a:tcPr>
+                </a:tc>
+                <a:tc>
+                  <a:txBody>
+                    <a:bodyPr/>
+                    <a:lstStyle/>
+                    <a:p>
+                      <a:pPr algn="ctr"/>
+                      <a:r>
+                        <a:rPr lang="en-US" sz="2900" cap="none" spc="0" dirty="0">
+                          <a:solidFill>
+                            <a:schemeClr val="tx1"/>
+                          </a:solidFill>
+                        </a:rPr>
+                        <a:t>1228</a:t>
+                      </a:r>
+                    </a:p>
+                  </a:txBody>
+                  <a:tcPr marL="243186" marR="187066" marT="187066" marB="187066">
+                    <a:lnL w="19050" cap="flat" cmpd="sng" algn="ctr">
+                      <a:solidFill>
+                        <a:schemeClr val="tx1"/>
+                      </a:solidFill>
+                      <a:prstDash val="solid"/>
+                    </a:lnL>
+                    <a:lnR w="19050" cap="flat" cmpd="sng" algn="ctr">
+                      <a:solidFill>
+                        <a:schemeClr val="tx1"/>
+                      </a:solidFill>
+                      <a:prstDash val="solid"/>
+                    </a:lnR>
+                    <a:lnT w="38100" cmpd="sng">
+                      <a:noFill/>
+                    </a:lnT>
+                    <a:lnB w="6350" cap="flat" cmpd="sng" algn="ctr">
+                      <a:solidFill>
+                        <a:schemeClr val="tx1">
+                          <a:lumMod val="50000"/>
+                          <a:lumOff val="50000"/>
+                        </a:schemeClr>
+                      </a:solidFill>
+                      <a:prstDash val="solid"/>
+                    </a:lnB>
+                    <a:noFill/>
+                  </a:tcPr>
+                </a:tc>
+                <a:tc>
+                  <a:txBody>
+                    <a:bodyPr/>
+                    <a:lstStyle/>
+                    <a:p>
+                      <a:pPr algn="ctr"/>
+                      <a:r>
+                        <a:rPr lang="en-US" sz="2900" cap="none" spc="0" dirty="0">
+                          <a:solidFill>
+                            <a:schemeClr val="tx1"/>
+                          </a:solidFill>
+                        </a:rPr>
+                        <a:t>74</a:t>
+                      </a:r>
+                    </a:p>
+                  </a:txBody>
+                  <a:tcPr marL="243186" marR="187066" marT="187066" marB="187066">
+                    <a:lnL w="19050" cap="flat" cmpd="sng" algn="ctr">
+                      <a:solidFill>
+                        <a:schemeClr val="tx1"/>
+                      </a:solidFill>
+                      <a:prstDash val="solid"/>
+                    </a:lnL>
+                    <a:lnR w="19050" cap="flat" cmpd="sng" algn="ctr">
+                      <a:solidFill>
+                        <a:schemeClr val="tx1"/>
+                      </a:solidFill>
+                      <a:prstDash val="solid"/>
+                    </a:lnR>
+                    <a:lnT w="38100" cmpd="sng">
+                      <a:noFill/>
+                    </a:lnT>
+                    <a:lnB w="6350" cap="flat" cmpd="sng" algn="ctr">
+                      <a:solidFill>
+                        <a:schemeClr val="tx1">
+                          <a:lumMod val="50000"/>
+                          <a:lumOff val="50000"/>
+                        </a:schemeClr>
+                      </a:solidFill>
+                      <a:prstDash val="solid"/>
+                    </a:lnB>
+                    <a:noFill/>
+                  </a:tcPr>
+                </a:tc>
+                <a:extLst>
+                  <a:ext uri="{0D108BD9-81ED-4DB2-BD59-A6C34878D82A}">
+                    <a16:rowId xmlns:a16="http://schemas.microsoft.com/office/drawing/2014/main" val="96665879"/>
+                  </a:ext>
+                </a:extLst>
+              </a:tr>
+              <a:tr h="885447">
+                <a:tc>
+                  <a:txBody>
+                    <a:bodyPr/>
+                    <a:lstStyle/>
+                    <a:p>
+                      <a:r>
+                        <a:rPr lang="en-US" sz="2900" cap="none" spc="0">
+                          <a:solidFill>
+                            <a:schemeClr val="tx1"/>
+                          </a:solidFill>
+                        </a:rPr>
+                        <a:t>Offensive</a:t>
+                      </a:r>
+                    </a:p>
+                  </a:txBody>
+                  <a:tcPr marL="243186" marR="187066" marT="187066" marB="187066">
+                    <a:lnL w="19050" cap="flat" cmpd="sng" algn="ctr">
+                      <a:solidFill>
+                        <a:schemeClr val="tx1"/>
+                      </a:solidFill>
+                      <a:prstDash val="solid"/>
+                    </a:lnL>
+                    <a:lnR w="19050" cap="flat" cmpd="sng" algn="ctr">
+                      <a:solidFill>
+                        <a:schemeClr val="tx1"/>
+                      </a:solidFill>
+                      <a:prstDash val="solid"/>
+                    </a:lnR>
+                    <a:lnT w="6350" cap="flat" cmpd="sng" algn="ctr">
+                      <a:solidFill>
+                        <a:schemeClr val="tx1">
+                          <a:lumMod val="50000"/>
+                          <a:lumOff val="50000"/>
+                        </a:schemeClr>
+                      </a:solidFill>
+                      <a:prstDash val="solid"/>
+                    </a:lnT>
+                    <a:lnB w="12700" cmpd="sng">
+                      <a:noFill/>
+                      <a:prstDash val="solid"/>
+                    </a:lnB>
+                    <a:solidFill>
+                      <a:schemeClr val="bg1">
+                        <a:lumMod val="85000"/>
+                      </a:schemeClr>
+                    </a:solidFill>
+                  </a:tcPr>
+                </a:tc>
+                <a:tc>
+                  <a:txBody>
+                    <a:bodyPr/>
+                    <a:lstStyle/>
+                    <a:p>
+                      <a:pPr algn="ctr"/>
+                      <a:r>
+                        <a:rPr lang="en-US" sz="2900" cap="none" spc="0" dirty="0">
+                          <a:solidFill>
+                            <a:schemeClr val="tx1"/>
+                          </a:solidFill>
+                        </a:rPr>
+                        <a:t>56</a:t>
+                      </a:r>
+                    </a:p>
+                  </a:txBody>
+                  <a:tcPr marL="243186" marR="187066" marT="187066" marB="187066">
+                    <a:lnL w="19050" cap="flat" cmpd="sng" algn="ctr">
+                      <a:solidFill>
+                        <a:schemeClr val="tx1"/>
+                      </a:solidFill>
+                      <a:prstDash val="solid"/>
+                    </a:lnL>
+                    <a:lnR w="19050" cap="flat" cmpd="sng" algn="ctr">
+                      <a:solidFill>
+                        <a:schemeClr val="tx1"/>
+                      </a:solidFill>
+                      <a:prstDash val="solid"/>
+                    </a:lnR>
+                    <a:lnT w="6350" cap="flat" cmpd="sng" algn="ctr">
+                      <a:solidFill>
+                        <a:schemeClr val="tx1">
+                          <a:lumMod val="50000"/>
+                          <a:lumOff val="50000"/>
+                        </a:schemeClr>
+                      </a:solidFill>
+                      <a:prstDash val="solid"/>
+                    </a:lnT>
+                    <a:lnB w="12700" cmpd="sng">
+                      <a:noFill/>
+                      <a:prstDash val="solid"/>
+                    </a:lnB>
+                    <a:solidFill>
+                      <a:schemeClr val="bg1">
+                        <a:lumMod val="85000"/>
+                      </a:schemeClr>
+                    </a:solidFill>
+                  </a:tcPr>
+                </a:tc>
+                <a:tc>
+                  <a:txBody>
+                    <a:bodyPr/>
+                    <a:lstStyle/>
+                    <a:p>
+                      <a:pPr algn="ctr"/>
+                      <a:r>
+                        <a:rPr lang="en-US" sz="2900" cap="none" spc="0" dirty="0">
+                          <a:solidFill>
+                            <a:schemeClr val="tx1"/>
+                          </a:solidFill>
+                        </a:rPr>
+                        <a:t>186</a:t>
+                      </a:r>
+                    </a:p>
+                  </a:txBody>
+                  <a:tcPr marL="243186" marR="187066" marT="187066" marB="187066">
+                    <a:lnL w="19050" cap="flat" cmpd="sng" algn="ctr">
+                      <a:solidFill>
+                        <a:schemeClr val="tx1"/>
+                      </a:solidFill>
+                      <a:prstDash val="solid"/>
+                    </a:lnL>
+                    <a:lnR w="12700" cmpd="sng">
+                      <a:noFill/>
+                      <a:prstDash val="solid"/>
+                    </a:lnR>
+                    <a:lnT w="6350" cap="flat" cmpd="sng" algn="ctr">
+                      <a:solidFill>
+                        <a:schemeClr val="tx1">
+                          <a:lumMod val="50000"/>
+                          <a:lumOff val="50000"/>
+                        </a:schemeClr>
+                      </a:solidFill>
+                      <a:prstDash val="solid"/>
+                    </a:lnT>
+                    <a:lnB w="12700" cmpd="sng">
+                      <a:noFill/>
+                      <a:prstDash val="solid"/>
+                    </a:lnB>
+                    <a:solidFill>
+                      <a:schemeClr val="bg1">
+                        <a:lumMod val="85000"/>
+                      </a:schemeClr>
+                    </a:solidFill>
+                  </a:tcPr>
+                </a:tc>
+                <a:extLst>
+                  <a:ext uri="{0D108BD9-81ED-4DB2-BD59-A6C34878D82A}">
+                    <a16:rowId xmlns:a16="http://schemas.microsoft.com/office/drawing/2014/main" val="344236825"/>
+                  </a:ext>
+                </a:extLst>
+              </a:tr>
+            </a:tbl>
+          </a:graphicData>
+        </a:graphic>
+      </p:graphicFrame>
+    </p:spTree>
+    <p:extLst>
+      <p:ext uri="{BB962C8B-B14F-4D97-AF65-F5344CB8AC3E}">
+        <p14:creationId xmlns:p14="http://schemas.microsoft.com/office/powerpoint/2010/main" val="3917351418"/>
+      </p:ext>
+    </p:extLst>
+  </p:cSld>
+  <p:clrMapOvr>
+    <a:masterClrMapping/>
+  </p:clrMapOvr>
+</p:sld>
+</file>
+
+<file path=ppt/slides/slide25.xml><?xml version="1.0" encoding="utf-8"?>
+<p:sld xmlns:a="http://schemas.openxmlformats.org/drawingml/2006/main" xmlns:r="http://schemas.openxmlformats.org/officeDocument/2006/relationships" xmlns:p="http://schemas.openxmlformats.org/presentationml/2006/main">
+  <p:cSld>
+    <p:bg>
+      <p:bgPr>
+        <a:solidFill>
+          <a:schemeClr val="bg1"/>
+        </a:solidFill>
+        <a:effectLst/>
+      </p:bgPr>
+    </p:bg>
+    <p:spTree>
+      <p:nvGrpSpPr>
+        <p:cNvPr id="1" name="">
+          <a:extLst>
+            <a:ext uri="{FF2B5EF4-FFF2-40B4-BE49-F238E27FC236}">
+              <a16:creationId xmlns:a16="http://schemas.microsoft.com/office/drawing/2014/main" id="{BDB93024-A5C4-3D2E-2983-98A116A6ED55}"/>
+            </a:ext>
+          </a:extLst>
+        </p:cNvPr>
+        <p:cNvGrpSpPr/>
+        <p:nvPr/>
+      </p:nvGrpSpPr>
+      <p:grpSpPr>
+        <a:xfrm>
+          <a:off x="0" y="0"/>
+          <a:ext cx="0" cy="0"/>
+          <a:chOff x="0" y="0"/>
+          <a:chExt cx="0" cy="0"/>
+        </a:xfrm>
+      </p:grpSpPr>
+      <p:sp useBgFill="1">
+        <p:nvSpPr>
+          <p:cNvPr id="11" name="Rectangle 10">
+            <a:extLst>
+              <a:ext uri="{FF2B5EF4-FFF2-40B4-BE49-F238E27FC236}">
+                <a16:creationId xmlns:a16="http://schemas.microsoft.com/office/drawing/2014/main" id="{E3F125F8-ACD8-D5C5-7550-0815127ECEEA}"/>
+              </a:ext>
+              <a:ext uri="{C183D7F6-B498-43B3-948B-1728B52AA6E4}">
+                <adec:decorative xmlns:adec="http://schemas.microsoft.com/office/drawing/2017/decorative" val="1"/>
+              </a:ext>
+            </a:extLst>
+          </p:cNvPr>
+          <p:cNvSpPr>
+            <a:spLocks noGrp="1" noRot="1" noChangeAspect="1" noMove="1" noResize="1" noEditPoints="1" noAdjustHandles="1" noChangeArrowheads="1" noChangeShapeType="1" noTextEdit="1"/>
+          </p:cNvSpPr>
+          <p:nvPr>
+            <p:extLst>
+              <p:ext uri="{386F3935-93C4-4BCD-93E2-E3B085C9AB24}">
+                <p16:designElem xmlns:p16="http://schemas.microsoft.com/office/powerpoint/2015/main" val="1"/>
+              </p:ext>
+            </p:extLst>
+          </p:nvPr>
+        </p:nvSpPr>
+        <p:spPr>
+          <a:xfrm>
+            <a:off x="0" y="0"/>
+            <a:ext cx="12192000" cy="6858000"/>
+          </a:xfrm>
+          <a:prstGeom prst="rect">
+            <a:avLst/>
+          </a:prstGeom>
+          <a:ln>
+            <a:noFill/>
+          </a:ln>
+        </p:spPr>
+        <p:style>
+          <a:lnRef idx="2">
+            <a:schemeClr val="accent1">
+              <a:shade val="50000"/>
+            </a:schemeClr>
+          </a:lnRef>
+          <a:fillRef idx="1">
+            <a:schemeClr val="accent1"/>
+          </a:fillRef>
+          <a:effectRef idx="0">
+            <a:schemeClr val="accent1"/>
+          </a:effectRef>
+          <a:fontRef idx="minor">
+            <a:schemeClr val="lt1"/>
+          </a:fontRef>
+        </p:style>
+        <p:txBody>
+          <a:bodyPr rtlCol="0" anchor="ctr"/>
+          <a:lstStyle/>
+          <a:p>
+            <a:pPr algn="ctr"/>
+            <a:endParaRPr lang="en-US"/>
+          </a:p>
+        </p:txBody>
+      </p:sp>
+      <p:sp>
+        <p:nvSpPr>
+          <p:cNvPr id="6" name="Title 5">
+            <a:extLst>
+              <a:ext uri="{FF2B5EF4-FFF2-40B4-BE49-F238E27FC236}">
+                <a16:creationId xmlns:a16="http://schemas.microsoft.com/office/drawing/2014/main" id="{E17C9D5E-352D-1CC1-E624-EB46AFFF6ED6}"/>
+              </a:ext>
+            </a:extLst>
+          </p:cNvPr>
+          <p:cNvSpPr>
+            <a:spLocks noGrp="1"/>
+          </p:cNvSpPr>
+          <p:nvPr>
+            <p:ph type="title"/>
+          </p:nvPr>
+        </p:nvSpPr>
+        <p:spPr>
+          <a:xfrm>
+            <a:off x="638881" y="417576"/>
+            <a:ext cx="10909640" cy="1249394"/>
+          </a:xfrm>
+        </p:spPr>
+        <p:txBody>
+          <a:bodyPr vert="horz" lIns="91440" tIns="45720" rIns="91440" bIns="45720" rtlCol="0" anchor="ctr">
+            <a:normAutofit fontScale="90000"/>
+          </a:bodyPr>
+          <a:lstStyle/>
+          <a:p>
+            <a:pPr algn="ctr"/>
+            <a:r>
+              <a:rPr lang="en-US" sz="6600" kern="1200">
+                <a:solidFill>
+                  <a:schemeClr val="tx1"/>
+                </a:solidFill>
+                <a:latin typeface="+mj-lt"/>
+                <a:ea typeface="+mj-ea"/>
+                <a:cs typeface="+mj-cs"/>
+              </a:rPr>
+              <a:t>Advanced model confusion matrix</a:t>
+            </a:r>
+            <a:endParaRPr lang="en-US" sz="6600" kern="1200" dirty="0">
+              <a:solidFill>
+                <a:schemeClr val="tx1"/>
+              </a:solidFill>
+              <a:latin typeface="+mj-lt"/>
+              <a:ea typeface="+mj-ea"/>
+              <a:cs typeface="+mj-cs"/>
+            </a:endParaRPr>
+          </a:p>
+        </p:txBody>
+      </p:sp>
+      <p:sp>
+        <p:nvSpPr>
+          <p:cNvPr id="13" name="sketch line">
+            <a:extLst>
+              <a:ext uri="{FF2B5EF4-FFF2-40B4-BE49-F238E27FC236}">
+                <a16:creationId xmlns:a16="http://schemas.microsoft.com/office/drawing/2014/main" id="{209A1F18-0678-F594-1A2E-CA013D5BB828}"/>
+              </a:ext>
+              <a:ext uri="{C183D7F6-B498-43B3-948B-1728B52AA6E4}">
+                <adec:decorative xmlns:adec="http://schemas.microsoft.com/office/drawing/2017/decorative" val="1"/>
+              </a:ext>
+            </a:extLst>
+          </p:cNvPr>
+          <p:cNvSpPr>
+            <a:spLocks noGrp="1" noRot="1" noChangeAspect="1" noMove="1" noResize="1" noEditPoints="1" noAdjustHandles="1" noChangeArrowheads="1" noChangeShapeType="1" noTextEdit="1"/>
+          </p:cNvSpPr>
+          <p:nvPr>
+            <p:extLst>
+              <p:ext uri="{386F3935-93C4-4BCD-93E2-E3B085C9AB24}">
+                <p16:designElem xmlns:p16="http://schemas.microsoft.com/office/powerpoint/2015/main" val="1"/>
+              </p:ext>
+            </p:extLst>
+          </p:nvPr>
+        </p:nvSpPr>
+        <p:spPr>
+          <a:xfrm>
+            <a:off x="3807702" y="1733454"/>
+            <a:ext cx="4572000" cy="18288"/>
+          </a:xfrm>
+          <a:custGeom>
+            <a:avLst/>
+            <a:gdLst>
+              <a:gd name="csX0" fmla="*/ 0 w 4572000"/>
+              <a:gd name="csY0" fmla="*/ 0 h 18288"/>
+              <a:gd name="csX1" fmla="*/ 515983 w 4572000"/>
+              <a:gd name="csY1" fmla="*/ 0 h 18288"/>
+              <a:gd name="csX2" fmla="*/ 1031966 w 4572000"/>
+              <a:gd name="csY2" fmla="*/ 0 h 18288"/>
+              <a:gd name="csX3" fmla="*/ 1639389 w 4572000"/>
+              <a:gd name="csY3" fmla="*/ 0 h 18288"/>
+              <a:gd name="csX4" fmla="*/ 2383971 w 4572000"/>
+              <a:gd name="csY4" fmla="*/ 0 h 18288"/>
+              <a:gd name="csX5" fmla="*/ 2945674 w 4572000"/>
+              <a:gd name="csY5" fmla="*/ 0 h 18288"/>
+              <a:gd name="csX6" fmla="*/ 3507377 w 4572000"/>
+              <a:gd name="csY6" fmla="*/ 0 h 18288"/>
+              <a:gd name="csX7" fmla="*/ 4572000 w 4572000"/>
+              <a:gd name="csY7" fmla="*/ 0 h 18288"/>
+              <a:gd name="csX8" fmla="*/ 4572000 w 4572000"/>
+              <a:gd name="csY8" fmla="*/ 18288 h 18288"/>
+              <a:gd name="csX9" fmla="*/ 3873137 w 4572000"/>
+              <a:gd name="csY9" fmla="*/ 18288 h 18288"/>
+              <a:gd name="csX10" fmla="*/ 3311434 w 4572000"/>
+              <a:gd name="csY10" fmla="*/ 18288 h 18288"/>
+              <a:gd name="csX11" fmla="*/ 2749731 w 4572000"/>
+              <a:gd name="csY11" fmla="*/ 18288 h 18288"/>
+              <a:gd name="csX12" fmla="*/ 2050869 w 4572000"/>
+              <a:gd name="csY12" fmla="*/ 18288 h 18288"/>
+              <a:gd name="csX13" fmla="*/ 1306286 w 4572000"/>
+              <a:gd name="csY13" fmla="*/ 18288 h 18288"/>
+              <a:gd name="csX14" fmla="*/ 790303 w 4572000"/>
+              <a:gd name="csY14" fmla="*/ 18288 h 18288"/>
+              <a:gd name="csX15" fmla="*/ 0 w 4572000"/>
+              <a:gd name="csY15" fmla="*/ 18288 h 18288"/>
+              <a:gd name="csX16" fmla="*/ 0 w 4572000"/>
+              <a:gd name="csY16" fmla="*/ 0 h 18288"/>
+            </a:gdLst>
+            <a:ahLst/>
+            <a:cxnLst>
+              <a:cxn ang="0">
+                <a:pos x="csX0" y="csY0"/>
+              </a:cxn>
+              <a:cxn ang="0">
+                <a:pos x="csX1" y="csY1"/>
+              </a:cxn>
+              <a:cxn ang="0">
+                <a:pos x="csX2" y="csY2"/>
+              </a:cxn>
+              <a:cxn ang="0">
+                <a:pos x="csX3" y="csY3"/>
+              </a:cxn>
+              <a:cxn ang="0">
+                <a:pos x="csX4" y="csY4"/>
+              </a:cxn>
+              <a:cxn ang="0">
+                <a:pos x="csX5" y="csY5"/>
+              </a:cxn>
+              <a:cxn ang="0">
+                <a:pos x="csX6" y="csY6"/>
+              </a:cxn>
+              <a:cxn ang="0">
+                <a:pos x="csX7" y="csY7"/>
+              </a:cxn>
+              <a:cxn ang="0">
+                <a:pos x="csX8" y="csY8"/>
+              </a:cxn>
+              <a:cxn ang="0">
+                <a:pos x="csX9" y="csY9"/>
+              </a:cxn>
+              <a:cxn ang="0">
+                <a:pos x="csX10" y="csY10"/>
+              </a:cxn>
+              <a:cxn ang="0">
+                <a:pos x="csX11" y="csY11"/>
+              </a:cxn>
+              <a:cxn ang="0">
+                <a:pos x="csX12" y="csY12"/>
+              </a:cxn>
+              <a:cxn ang="0">
+                <a:pos x="csX13" y="csY13"/>
+              </a:cxn>
+              <a:cxn ang="0">
+                <a:pos x="csX14" y="csY14"/>
+              </a:cxn>
+              <a:cxn ang="0">
+                <a:pos x="csX15" y="csY15"/>
+              </a:cxn>
+              <a:cxn ang="0">
+                <a:pos x="csX16" y="csY16"/>
+              </a:cxn>
+            </a:cxnLst>
+            <a:rect l="l" t="t" r="r" b="b"/>
+            <a:pathLst>
+              <a:path w="4572000" h="18288" fill="none" extrusionOk="0">
+                <a:moveTo>
+                  <a:pt x="0" y="0"/>
+                </a:moveTo>
+                <a:cubicBezTo>
+                  <a:pt x="105156" y="-20963"/>
+                  <a:pt x="340432" y="822"/>
+                  <a:pt x="515983" y="0"/>
+                </a:cubicBezTo>
+                <a:cubicBezTo>
+                  <a:pt x="691534" y="-822"/>
+                  <a:pt x="850679" y="16479"/>
+                  <a:pt x="1031966" y="0"/>
+                </a:cubicBezTo>
+                <a:cubicBezTo>
+                  <a:pt x="1213253" y="-16479"/>
+                  <a:pt x="1443646" y="-18730"/>
+                  <a:pt x="1639389" y="0"/>
+                </a:cubicBezTo>
+                <a:cubicBezTo>
+                  <a:pt x="1835132" y="18730"/>
+                  <a:pt x="2159975" y="18531"/>
+                  <a:pt x="2383971" y="0"/>
+                </a:cubicBezTo>
+                <a:cubicBezTo>
+                  <a:pt x="2607967" y="-18531"/>
+                  <a:pt x="2719096" y="-12030"/>
+                  <a:pt x="2945674" y="0"/>
+                </a:cubicBezTo>
+                <a:cubicBezTo>
+                  <a:pt x="3172252" y="12030"/>
+                  <a:pt x="3269167" y="27666"/>
+                  <a:pt x="3507377" y="0"/>
+                </a:cubicBezTo>
+                <a:cubicBezTo>
+                  <a:pt x="3745587" y="-27666"/>
+                  <a:pt x="4116741" y="18705"/>
+                  <a:pt x="4572000" y="0"/>
+                </a:cubicBezTo>
+                <a:cubicBezTo>
+                  <a:pt x="4572895" y="8974"/>
+                  <a:pt x="4571454" y="9359"/>
+                  <a:pt x="4572000" y="18288"/>
+                </a:cubicBezTo>
+                <a:cubicBezTo>
+                  <a:pt x="4374698" y="3942"/>
+                  <a:pt x="4098874" y="-11042"/>
+                  <a:pt x="3873137" y="18288"/>
+                </a:cubicBezTo>
+                <a:cubicBezTo>
+                  <a:pt x="3647400" y="47618"/>
+                  <a:pt x="3517055" y="5421"/>
+                  <a:pt x="3311434" y="18288"/>
+                </a:cubicBezTo>
+                <a:cubicBezTo>
+                  <a:pt x="3105813" y="31155"/>
+                  <a:pt x="3025168" y="17856"/>
+                  <a:pt x="2749731" y="18288"/>
+                </a:cubicBezTo>
+                <a:cubicBezTo>
+                  <a:pt x="2474294" y="18720"/>
+                  <a:pt x="2291766" y="-14168"/>
+                  <a:pt x="2050869" y="18288"/>
+                </a:cubicBezTo>
+                <a:cubicBezTo>
+                  <a:pt x="1809972" y="50744"/>
+                  <a:pt x="1540276" y="46798"/>
+                  <a:pt x="1306286" y="18288"/>
+                </a:cubicBezTo>
+                <a:cubicBezTo>
+                  <a:pt x="1072296" y="-10222"/>
+                  <a:pt x="972445" y="19645"/>
+                  <a:pt x="790303" y="18288"/>
+                </a:cubicBezTo>
+                <a:cubicBezTo>
+                  <a:pt x="608161" y="16931"/>
+                  <a:pt x="200981" y="8241"/>
+                  <a:pt x="0" y="18288"/>
+                </a:cubicBezTo>
+                <a:cubicBezTo>
+                  <a:pt x="-229" y="14222"/>
+                  <a:pt x="509" y="5816"/>
+                  <a:pt x="0" y="0"/>
+                </a:cubicBezTo>
+                <a:close/>
+              </a:path>
+              <a:path w="4572000" h="18288" stroke="0" extrusionOk="0">
+                <a:moveTo>
+                  <a:pt x="0" y="0"/>
+                </a:moveTo>
+                <a:cubicBezTo>
+                  <a:pt x="143285" y="-9565"/>
+                  <a:pt x="327959" y="-11498"/>
+                  <a:pt x="561703" y="0"/>
+                </a:cubicBezTo>
+                <a:cubicBezTo>
+                  <a:pt x="795447" y="11498"/>
+                  <a:pt x="838260" y="18255"/>
+                  <a:pt x="1077686" y="0"/>
+                </a:cubicBezTo>
+                <a:cubicBezTo>
+                  <a:pt x="1317112" y="-18255"/>
+                  <a:pt x="1437472" y="23514"/>
+                  <a:pt x="1639389" y="0"/>
+                </a:cubicBezTo>
+                <a:cubicBezTo>
+                  <a:pt x="1841306" y="-23514"/>
+                  <a:pt x="2037142" y="-12551"/>
+                  <a:pt x="2292531" y="0"/>
+                </a:cubicBezTo>
+                <a:cubicBezTo>
+                  <a:pt x="2547920" y="12551"/>
+                  <a:pt x="2810436" y="-20352"/>
+                  <a:pt x="2991394" y="0"/>
+                </a:cubicBezTo>
+                <a:cubicBezTo>
+                  <a:pt x="3172352" y="20352"/>
+                  <a:pt x="3530025" y="-13347"/>
+                  <a:pt x="3735977" y="0"/>
+                </a:cubicBezTo>
+                <a:cubicBezTo>
+                  <a:pt x="3941929" y="13347"/>
+                  <a:pt x="4161497" y="34086"/>
+                  <a:pt x="4572000" y="0"/>
+                </a:cubicBezTo>
+                <a:cubicBezTo>
+                  <a:pt x="4571545" y="6162"/>
+                  <a:pt x="4571903" y="11775"/>
+                  <a:pt x="4572000" y="18288"/>
+                </a:cubicBezTo>
+                <a:cubicBezTo>
+                  <a:pt x="4228040" y="36490"/>
+                  <a:pt x="4199736" y="42557"/>
+                  <a:pt x="3873137" y="18288"/>
+                </a:cubicBezTo>
+                <a:cubicBezTo>
+                  <a:pt x="3546538" y="-5981"/>
+                  <a:pt x="3472124" y="16809"/>
+                  <a:pt x="3128554" y="18288"/>
+                </a:cubicBezTo>
+                <a:cubicBezTo>
+                  <a:pt x="2784984" y="19767"/>
+                  <a:pt x="2735896" y="-17781"/>
+                  <a:pt x="2383971" y="18288"/>
+                </a:cubicBezTo>
+                <a:cubicBezTo>
+                  <a:pt x="2032046" y="54357"/>
+                  <a:pt x="2019324" y="2920"/>
+                  <a:pt x="1867989" y="18288"/>
+                </a:cubicBezTo>
+                <a:cubicBezTo>
+                  <a:pt x="1716654" y="33656"/>
+                  <a:pt x="1418675" y="32575"/>
+                  <a:pt x="1169126" y="18288"/>
+                </a:cubicBezTo>
+                <a:cubicBezTo>
+                  <a:pt x="919577" y="4001"/>
+                  <a:pt x="798537" y="16165"/>
+                  <a:pt x="561703" y="18288"/>
+                </a:cubicBezTo>
+                <a:cubicBezTo>
+                  <a:pt x="324869" y="20411"/>
+                  <a:pt x="221395" y="-912"/>
+                  <a:pt x="0" y="18288"/>
+                </a:cubicBezTo>
+                <a:cubicBezTo>
+                  <a:pt x="766" y="10800"/>
+                  <a:pt x="-457" y="8180"/>
+                  <a:pt x="0" y="0"/>
+                </a:cubicBezTo>
+                <a:close/>
+              </a:path>
+            </a:pathLst>
+          </a:custGeom>
+          <a:solidFill>
+            <a:schemeClr val="accent2"/>
+          </a:solidFill>
+          <a:ln w="41275" cap="rnd">
+            <a:solidFill>
+              <a:schemeClr val="accent2"/>
+            </a:solidFill>
+            <a:round/>
+            <a:extLst>
+              <a:ext uri="{C807C97D-BFC1-408E-A445-0C87EB9F89A2}">
+                <ask:lineSketchStyleProps xmlns:ask="http://schemas.microsoft.com/office/drawing/2018/sketchyshapes" sd="2727557108">
+                  <a:prstGeom prst="rect">
+                    <a:avLst/>
+                  </a:prstGeom>
+                  <ask:type>
+                    <ask:lineSketchFreehand/>
+                  </ask:type>
+                </ask:lineSketchStyleProps>
+              </a:ext>
+            </a:extLst>
+          </a:ln>
+        </p:spPr>
+        <p:style>
+          <a:lnRef idx="2">
+            <a:schemeClr val="accent1">
+              <a:shade val="50000"/>
+            </a:schemeClr>
+          </a:lnRef>
+          <a:fillRef idx="1">
+            <a:schemeClr val="accent1"/>
+          </a:fillRef>
+          <a:effectRef idx="0">
+            <a:schemeClr val="accent1"/>
+          </a:effectRef>
+          <a:fontRef idx="minor">
+            <a:schemeClr val="lt1"/>
+          </a:fontRef>
+        </p:style>
+        <p:txBody>
+          <a:bodyPr rtlCol="0" anchor="ctr"/>
+          <a:lstStyle/>
+          <a:p>
+            <a:pPr algn="ctr"/>
+            <a:endParaRPr lang="en-US"/>
+          </a:p>
+        </p:txBody>
+      </p:sp>
+      <p:graphicFrame>
+        <p:nvGraphicFramePr>
+          <p:cNvPr id="5" name="Content Placeholder 4">
+            <a:extLst>
+              <a:ext uri="{FF2B5EF4-FFF2-40B4-BE49-F238E27FC236}">
+                <a16:creationId xmlns:a16="http://schemas.microsoft.com/office/drawing/2014/main" id="{03A9C5D4-479F-EAF6-8030-AD9FFBBD3496}"/>
+              </a:ext>
+            </a:extLst>
+          </p:cNvPr>
+          <p:cNvGraphicFramePr>
+            <a:graphicFrameLocks noGrp="1"/>
+          </p:cNvGraphicFramePr>
+          <p:nvPr>
+            <p:ph idx="1"/>
+            <p:extLst>
+              <p:ext uri="{D42A27DB-BD31-4B8C-83A1-F6EECF244321}">
+                <p14:modId xmlns:p14="http://schemas.microsoft.com/office/powerpoint/2010/main" val="4073930956"/>
+              </p:ext>
+            </p:extLst>
+          </p:nvPr>
+        </p:nvGraphicFramePr>
+        <p:xfrm>
+          <a:off x="320040" y="3098478"/>
+          <a:ext cx="11548873" cy="2656341"/>
+        </p:xfrm>
+        <a:graphic>
+          <a:graphicData uri="http://schemas.openxmlformats.org/drawingml/2006/table">
+            <a:tbl>
+              <a:tblPr firstRow="1" bandRow="1">
+                <a:solidFill>
+                  <a:schemeClr val="bg1"/>
+                </a:solidFill>
+                <a:tableStyleId>{5C22544A-7EE6-4342-B048-85BDC9FD1C3A}</a:tableStyleId>
+              </a:tblPr>
+              <a:tblGrid>
+                <a:gridCol w="2869908">
+                  <a:extLst>
+                    <a:ext uri="{9D8B030D-6E8A-4147-A177-3AD203B41FA5}">
+                      <a16:colId xmlns:a16="http://schemas.microsoft.com/office/drawing/2014/main" val="1589278202"/>
+                    </a:ext>
+                  </a:extLst>
+                </a:gridCol>
+                <a:gridCol w="4600921">
+                  <a:extLst>
+                    <a:ext uri="{9D8B030D-6E8A-4147-A177-3AD203B41FA5}">
+                      <a16:colId xmlns:a16="http://schemas.microsoft.com/office/drawing/2014/main" val="24455531"/>
+                    </a:ext>
+                  </a:extLst>
+                </a:gridCol>
+                <a:gridCol w="4078044">
+                  <a:extLst>
+                    <a:ext uri="{9D8B030D-6E8A-4147-A177-3AD203B41FA5}">
+                      <a16:colId xmlns:a16="http://schemas.microsoft.com/office/drawing/2014/main" val="3430836541"/>
+                    </a:ext>
+                  </a:extLst>
+                </a:gridCol>
+              </a:tblGrid>
+              <a:tr h="885447">
+                <a:tc>
+                  <a:txBody>
+                    <a:bodyPr/>
+                    <a:lstStyle/>
+                    <a:p>
+                      <a:endParaRPr lang="en-US" sz="2900" b="0" cap="none" spc="0">
+                        <a:solidFill>
+                          <a:schemeClr val="bg1"/>
+                        </a:solidFill>
+                      </a:endParaRPr>
+                    </a:p>
+                  </a:txBody>
+                  <a:tcPr marL="243186" marR="187066" marT="187066" marB="187066" anchor="ctr">
+                    <a:lnL w="19050" cap="flat" cmpd="sng" algn="ctr">
+                      <a:solidFill>
+                        <a:schemeClr val="tx1"/>
+                      </a:solidFill>
+                      <a:prstDash val="solid"/>
+                    </a:lnL>
+                    <a:lnR w="12700" cmpd="sng">
+                      <a:noFill/>
+                    </a:lnR>
+                    <a:lnT w="19050" cap="flat" cmpd="sng" algn="ctr">
+                      <a:solidFill>
+                        <a:schemeClr val="tx1"/>
+                      </a:solidFill>
+                      <a:prstDash val="solid"/>
+                    </a:lnT>
+                    <a:lnB w="38100" cmpd="sng">
+                      <a:noFill/>
+                    </a:lnB>
+                    <a:solidFill>
+                      <a:schemeClr val="tx1"/>
+                    </a:solidFill>
+                  </a:tcPr>
+                </a:tc>
+                <a:tc>
+                  <a:txBody>
+                    <a:bodyPr/>
+                    <a:lstStyle/>
+                    <a:p>
+                      <a:pPr algn="ctr"/>
+                      <a:r>
+                        <a:rPr lang="en-US" sz="2900" b="0" cap="none" spc="0">
+                          <a:solidFill>
+                            <a:schemeClr val="bg1"/>
+                          </a:solidFill>
+                        </a:rPr>
+                        <a:t>Labeled as not offensive</a:t>
+                      </a:r>
+                    </a:p>
+                  </a:txBody>
+                  <a:tcPr marL="243186" marR="187066" marT="187066" marB="187066" anchor="ctr">
+                    <a:lnL w="12700" cmpd="sng">
+                      <a:noFill/>
+                    </a:lnL>
+                    <a:lnR w="12700" cmpd="sng">
+                      <a:noFill/>
+                    </a:lnR>
+                    <a:lnT w="19050" cap="flat" cmpd="sng" algn="ctr">
+                      <a:solidFill>
+                        <a:schemeClr val="tx1"/>
+                      </a:solidFill>
+                      <a:prstDash val="solid"/>
+                    </a:lnT>
+                    <a:lnB w="38100" cmpd="sng">
+                      <a:noFill/>
+                    </a:lnB>
+                    <a:solidFill>
+                      <a:schemeClr val="tx1"/>
+                    </a:solidFill>
+                  </a:tcPr>
+                </a:tc>
+                <a:tc>
+                  <a:txBody>
+                    <a:bodyPr/>
+                    <a:lstStyle/>
+                    <a:p>
+                      <a:pPr algn="ctr"/>
+                      <a:r>
+                        <a:rPr lang="en-US" sz="2900" b="0" cap="none" spc="0">
+                          <a:solidFill>
+                            <a:schemeClr val="bg1"/>
+                          </a:solidFill>
+                        </a:rPr>
+                        <a:t>Labeled as Offensive</a:t>
+                      </a:r>
+                    </a:p>
+                  </a:txBody>
+                  <a:tcPr marL="243186" marR="187066" marT="187066" marB="187066" anchor="ctr">
+                    <a:lnL w="12700" cmpd="sng">
+                      <a:noFill/>
+                    </a:lnL>
+                    <a:lnR w="12700" cmpd="sng">
+                      <a:noFill/>
+                    </a:lnR>
+                    <a:lnT w="19050" cap="flat" cmpd="sng" algn="ctr">
+                      <a:solidFill>
+                        <a:schemeClr val="tx1"/>
+                      </a:solidFill>
+                      <a:prstDash val="solid"/>
+                    </a:lnT>
+                    <a:lnB w="38100" cmpd="sng">
+                      <a:noFill/>
+                    </a:lnB>
+                    <a:solidFill>
+                      <a:schemeClr val="tx1"/>
+                    </a:solidFill>
+                  </a:tcPr>
+                </a:tc>
+                <a:extLst>
+                  <a:ext uri="{0D108BD9-81ED-4DB2-BD59-A6C34878D82A}">
+                    <a16:rowId xmlns:a16="http://schemas.microsoft.com/office/drawing/2014/main" val="1344967089"/>
+                  </a:ext>
+                </a:extLst>
+              </a:tr>
+              <a:tr h="885447">
+                <a:tc>
+                  <a:txBody>
+                    <a:bodyPr/>
+                    <a:lstStyle/>
+                    <a:p>
+                      <a:r>
+                        <a:rPr lang="en-US" sz="2900" cap="none" spc="0">
+                          <a:solidFill>
+                            <a:schemeClr val="tx1"/>
+                          </a:solidFill>
+                        </a:rPr>
+                        <a:t>Not Offensive</a:t>
+                      </a:r>
+                    </a:p>
+                  </a:txBody>
+                  <a:tcPr marL="243186" marR="187066" marT="187066" marB="187066">
+                    <a:lnL w="19050" cap="flat" cmpd="sng" algn="ctr">
+                      <a:solidFill>
+                        <a:schemeClr val="tx1"/>
+                      </a:solidFill>
+                      <a:prstDash val="solid"/>
+                    </a:lnL>
+                    <a:lnR w="19050" cap="flat" cmpd="sng" algn="ctr">
+                      <a:solidFill>
+                        <a:schemeClr val="tx1"/>
+                      </a:solidFill>
+                      <a:prstDash val="solid"/>
+                    </a:lnR>
+                    <a:lnT w="38100" cmpd="sng">
+                      <a:noFill/>
+                    </a:lnT>
+                    <a:lnB w="6350" cap="flat" cmpd="sng" algn="ctr">
+                      <a:solidFill>
+                        <a:schemeClr val="tx1">
+                          <a:lumMod val="50000"/>
+                          <a:lumOff val="50000"/>
+                        </a:schemeClr>
+                      </a:solidFill>
+                      <a:prstDash val="solid"/>
+                    </a:lnB>
+                    <a:noFill/>
+                  </a:tcPr>
+                </a:tc>
+                <a:tc>
+                  <a:txBody>
+                    <a:bodyPr/>
+                    <a:lstStyle/>
+                    <a:p>
+                      <a:pPr algn="ctr"/>
+                      <a:r>
+                        <a:rPr lang="en-US" sz="2900" cap="none" spc="0" dirty="0">
+                          <a:solidFill>
+                            <a:schemeClr val="tx1"/>
+                          </a:solidFill>
+                        </a:rPr>
+                        <a:t>1163</a:t>
+                      </a:r>
+                    </a:p>
+                  </a:txBody>
+                  <a:tcPr marL="243186" marR="187066" marT="187066" marB="187066">
+                    <a:lnL w="19050" cap="flat" cmpd="sng" algn="ctr">
+                      <a:solidFill>
+                        <a:schemeClr val="tx1"/>
+                      </a:solidFill>
+                      <a:prstDash val="solid"/>
+                    </a:lnL>
+                    <a:lnR w="19050" cap="flat" cmpd="sng" algn="ctr">
+                      <a:solidFill>
+                        <a:schemeClr val="tx1"/>
+                      </a:solidFill>
+                      <a:prstDash val="solid"/>
+                    </a:lnR>
+                    <a:lnT w="38100" cmpd="sng">
+                      <a:noFill/>
+                    </a:lnT>
+                    <a:lnB w="6350" cap="flat" cmpd="sng" algn="ctr">
+                      <a:solidFill>
+                        <a:schemeClr val="tx1">
+                          <a:lumMod val="50000"/>
+                          <a:lumOff val="50000"/>
+                        </a:schemeClr>
+                      </a:solidFill>
+                      <a:prstDash val="solid"/>
+                    </a:lnB>
+                    <a:noFill/>
+                  </a:tcPr>
+                </a:tc>
+                <a:tc>
+                  <a:txBody>
+                    <a:bodyPr/>
+                    <a:lstStyle/>
+                    <a:p>
+                      <a:pPr algn="ctr"/>
+                      <a:r>
+                        <a:rPr lang="en-US" sz="2900" cap="none" spc="0" dirty="0">
+                          <a:solidFill>
+                            <a:schemeClr val="tx1"/>
+                          </a:solidFill>
+                        </a:rPr>
+                        <a:t>139</a:t>
+                      </a:r>
+                    </a:p>
+                  </a:txBody>
+                  <a:tcPr marL="243186" marR="187066" marT="187066" marB="187066">
+                    <a:lnL w="19050" cap="flat" cmpd="sng" algn="ctr">
+                      <a:solidFill>
+                        <a:schemeClr val="tx1"/>
+                      </a:solidFill>
+                      <a:prstDash val="solid"/>
+                    </a:lnL>
+                    <a:lnR w="19050" cap="flat" cmpd="sng" algn="ctr">
+                      <a:solidFill>
+                        <a:schemeClr val="tx1"/>
+                      </a:solidFill>
+                      <a:prstDash val="solid"/>
+                    </a:lnR>
+                    <a:lnT w="38100" cmpd="sng">
+                      <a:noFill/>
+                    </a:lnT>
+                    <a:lnB w="6350" cap="flat" cmpd="sng" algn="ctr">
+                      <a:solidFill>
+                        <a:schemeClr val="tx1">
+                          <a:lumMod val="50000"/>
+                          <a:lumOff val="50000"/>
+                        </a:schemeClr>
+                      </a:solidFill>
+                      <a:prstDash val="solid"/>
+                    </a:lnB>
+                    <a:noFill/>
+                  </a:tcPr>
+                </a:tc>
+                <a:extLst>
+                  <a:ext uri="{0D108BD9-81ED-4DB2-BD59-A6C34878D82A}">
+                    <a16:rowId xmlns:a16="http://schemas.microsoft.com/office/drawing/2014/main" val="96665879"/>
+                  </a:ext>
+                </a:extLst>
+              </a:tr>
+              <a:tr h="885447">
+                <a:tc>
+                  <a:txBody>
+                    <a:bodyPr/>
+                    <a:lstStyle/>
+                    <a:p>
+                      <a:r>
+                        <a:rPr lang="en-US" sz="2900" cap="none" spc="0">
+                          <a:solidFill>
+                            <a:schemeClr val="tx1"/>
+                          </a:solidFill>
+                        </a:rPr>
+                        <a:t>Offensive</a:t>
+                      </a:r>
+                    </a:p>
+                  </a:txBody>
+                  <a:tcPr marL="243186" marR="187066" marT="187066" marB="187066">
+                    <a:lnL w="19050" cap="flat" cmpd="sng" algn="ctr">
+                      <a:solidFill>
+                        <a:schemeClr val="tx1"/>
+                      </a:solidFill>
+                      <a:prstDash val="solid"/>
+                    </a:lnL>
+                    <a:lnR w="19050" cap="flat" cmpd="sng" algn="ctr">
+                      <a:solidFill>
+                        <a:schemeClr val="tx1"/>
+                      </a:solidFill>
+                      <a:prstDash val="solid"/>
+                    </a:lnR>
+                    <a:lnT w="6350" cap="flat" cmpd="sng" algn="ctr">
+                      <a:solidFill>
+                        <a:schemeClr val="tx1">
+                          <a:lumMod val="50000"/>
+                          <a:lumOff val="50000"/>
+                        </a:schemeClr>
+                      </a:solidFill>
+                      <a:prstDash val="solid"/>
+                    </a:lnT>
+                    <a:lnB w="12700" cmpd="sng">
+                      <a:noFill/>
+                      <a:prstDash val="solid"/>
+                    </a:lnB>
+                    <a:solidFill>
+                      <a:schemeClr val="bg1">
+                        <a:lumMod val="85000"/>
+                      </a:schemeClr>
+                    </a:solidFill>
+                  </a:tcPr>
+                </a:tc>
+                <a:tc>
+                  <a:txBody>
+                    <a:bodyPr/>
+                    <a:lstStyle/>
+                    <a:p>
+                      <a:pPr algn="ctr"/>
+                      <a:r>
+                        <a:rPr lang="en-US" sz="2900" cap="none" spc="0" dirty="0">
+                          <a:solidFill>
+                            <a:schemeClr val="tx1"/>
+                          </a:solidFill>
+                        </a:rPr>
+                        <a:t>17</a:t>
+                      </a:r>
+                    </a:p>
+                  </a:txBody>
+                  <a:tcPr marL="243186" marR="187066" marT="187066" marB="187066">
+                    <a:lnL w="19050" cap="flat" cmpd="sng" algn="ctr">
+                      <a:solidFill>
+                        <a:schemeClr val="tx1"/>
+                      </a:solidFill>
+                      <a:prstDash val="solid"/>
+                    </a:lnL>
+                    <a:lnR w="19050" cap="flat" cmpd="sng" algn="ctr">
+                      <a:solidFill>
+                        <a:schemeClr val="tx1"/>
+                      </a:solidFill>
+                      <a:prstDash val="solid"/>
+                    </a:lnR>
+                    <a:lnT w="6350" cap="flat" cmpd="sng" algn="ctr">
+                      <a:solidFill>
+                        <a:schemeClr val="tx1">
+                          <a:lumMod val="50000"/>
+                          <a:lumOff val="50000"/>
+                        </a:schemeClr>
+                      </a:solidFill>
+                      <a:prstDash val="solid"/>
+                    </a:lnT>
+                    <a:lnB w="12700" cmpd="sng">
+                      <a:noFill/>
+                      <a:prstDash val="solid"/>
+                    </a:lnB>
+                    <a:solidFill>
+                      <a:schemeClr val="bg1">
+                        <a:lumMod val="85000"/>
+                      </a:schemeClr>
+                    </a:solidFill>
+                  </a:tcPr>
+                </a:tc>
+                <a:tc>
+                  <a:txBody>
+                    <a:bodyPr/>
+                    <a:lstStyle/>
+                    <a:p>
+                      <a:pPr algn="ctr"/>
+                      <a:r>
+                        <a:rPr lang="en-US" sz="2900" cap="none" spc="0" dirty="0">
+                          <a:solidFill>
+                            <a:schemeClr val="tx1"/>
+                          </a:solidFill>
+                        </a:rPr>
+                        <a:t>225</a:t>
+                      </a:r>
+                    </a:p>
+                  </a:txBody>
+                  <a:tcPr marL="243186" marR="187066" marT="187066" marB="187066">
+                    <a:lnL w="19050" cap="flat" cmpd="sng" algn="ctr">
+                      <a:solidFill>
+                        <a:schemeClr val="tx1"/>
+                      </a:solidFill>
+                      <a:prstDash val="solid"/>
+                    </a:lnL>
+                    <a:lnR w="12700" cmpd="sng">
+                      <a:noFill/>
+                      <a:prstDash val="solid"/>
+                    </a:lnR>
+                    <a:lnT w="6350" cap="flat" cmpd="sng" algn="ctr">
+                      <a:solidFill>
+                        <a:schemeClr val="tx1">
+                          <a:lumMod val="50000"/>
+                          <a:lumOff val="50000"/>
+                        </a:schemeClr>
+                      </a:solidFill>
+                      <a:prstDash val="solid"/>
+                    </a:lnT>
+                    <a:lnB w="12700" cmpd="sng">
+                      <a:noFill/>
+                      <a:prstDash val="solid"/>
+                    </a:lnB>
+                    <a:solidFill>
+                      <a:schemeClr val="bg1">
+                        <a:lumMod val="85000"/>
+                      </a:schemeClr>
+                    </a:solidFill>
+                  </a:tcPr>
+                </a:tc>
+                <a:extLst>
+                  <a:ext uri="{0D108BD9-81ED-4DB2-BD59-A6C34878D82A}">
+                    <a16:rowId xmlns:a16="http://schemas.microsoft.com/office/drawing/2014/main" val="344236825"/>
+                  </a:ext>
+                </a:extLst>
+              </a:tr>
+            </a:tbl>
+          </a:graphicData>
+        </a:graphic>
+      </p:graphicFrame>
+    </p:spTree>
+    <p:extLst>
+      <p:ext uri="{BB962C8B-B14F-4D97-AF65-F5344CB8AC3E}">
+        <p14:creationId xmlns:p14="http://schemas.microsoft.com/office/powerpoint/2010/main" val="747810264"/>
+      </p:ext>
+    </p:extLst>
+  </p:cSld>
+  <p:clrMapOvr>
+    <a:masterClrMapping/>
+  </p:clrMapOvr>
+</p:sld>
+</file>
+
+<file path=ppt/slides/slide26.xml><?xml version="1.0" encoding="utf-8"?>
+<p:sld xmlns:a="http://schemas.openxmlformats.org/drawingml/2006/main" xmlns:r="http://schemas.openxmlformats.org/officeDocument/2006/relationships" xmlns:p="http://schemas.openxmlformats.org/presentationml/2006/main">
+  <p:cSld>
     <p:spTree>
       <p:nvGrpSpPr>
         <p:cNvPr id="1" name=""/>
@@ -12077,7 +14953,7 @@
 </p:sld>
 </file>
 
-<file path=ppt/slides/slide24.xml><?xml version="1.0" encoding="utf-8"?>
+<file path=ppt/slides/slide27.xml><?xml version="1.0" encoding="utf-8"?>
 <p:sld xmlns:a="http://schemas.openxmlformats.org/drawingml/2006/main" xmlns:r="http://schemas.openxmlformats.org/officeDocument/2006/relationships" xmlns:p="http://schemas.openxmlformats.org/presentationml/2006/main">
   <p:cSld>
     <p:spTree>
@@ -12226,7 +15102,7 @@
 </p:sld>
 </file>
 
-<file path=ppt/slides/slide25.xml><?xml version="1.0" encoding="utf-8"?>
+<file path=ppt/slides/slide28.xml><?xml version="1.0" encoding="utf-8"?>
 <p:sld xmlns:a="http://schemas.openxmlformats.org/drawingml/2006/main" xmlns:r="http://schemas.openxmlformats.org/officeDocument/2006/relationships" xmlns:p="http://schemas.openxmlformats.org/presentationml/2006/main">
   <p:cSld>
     <p:spTree>
@@ -12332,7 +15208,7 @@
 </p:sld>
 </file>
 
-<file path=ppt/slides/slide26.xml><?xml version="1.0" encoding="utf-8"?>
+<file path=ppt/slides/slide29.xml><?xml version="1.0" encoding="utf-8"?>
 <p:sld xmlns:a="http://schemas.openxmlformats.org/drawingml/2006/main" xmlns:r="http://schemas.openxmlformats.org/officeDocument/2006/relationships" xmlns:p="http://schemas.openxmlformats.org/presentationml/2006/main">
   <p:cSld>
     <p:spTree>
@@ -12531,7 +15407,274 @@
 </p:sld>
 </file>
 
-<file path=ppt/slides/slide27.xml><?xml version="1.0" encoding="utf-8"?>
+<file path=ppt/slides/slide3.xml><?xml version="1.0" encoding="utf-8"?>
+<p:sld xmlns:a="http://schemas.openxmlformats.org/drawingml/2006/main" xmlns:r="http://schemas.openxmlformats.org/officeDocument/2006/relationships" xmlns:p="http://schemas.openxmlformats.org/presentationml/2006/main">
+  <p:cSld>
+    <p:spTree>
+      <p:nvGrpSpPr>
+        <p:cNvPr id="1" name=""/>
+        <p:cNvGrpSpPr/>
+        <p:nvPr/>
+      </p:nvGrpSpPr>
+      <p:grpSpPr>
+        <a:xfrm>
+          <a:off x="0" y="0"/>
+          <a:ext cx="0" cy="0"/>
+          <a:chOff x="0" y="0"/>
+          <a:chExt cx="0" cy="0"/>
+        </a:xfrm>
+      </p:grpSpPr>
+      <p:sp>
+        <p:nvSpPr>
+          <p:cNvPr id="2" name="Title 1">
+            <a:extLst>
+              <a:ext uri="{FF2B5EF4-FFF2-40B4-BE49-F238E27FC236}">
+                <a16:creationId xmlns:a16="http://schemas.microsoft.com/office/drawing/2014/main" id="{459E9280-2EFC-EAAD-B90B-757337875FC3}"/>
+              </a:ext>
+            </a:extLst>
+          </p:cNvPr>
+          <p:cNvSpPr>
+            <a:spLocks noGrp="1"/>
+          </p:cNvSpPr>
+          <p:nvPr>
+            <p:ph type="title"/>
+          </p:nvPr>
+        </p:nvSpPr>
+        <p:spPr/>
+        <p:txBody>
+          <a:bodyPr>
+            <a:normAutofit/>
+          </a:bodyPr>
+          <a:lstStyle/>
+          <a:p>
+            <a:pPr algn="ctr"/>
+            <a:r>
+              <a:rPr lang="en-US" sz="6000" dirty="0"/>
+              <a:t>What is online toxicity?</a:t>
+            </a:r>
+          </a:p>
+        </p:txBody>
+      </p:sp>
+      <p:sp>
+        <p:nvSpPr>
+          <p:cNvPr id="3" name="Content Placeholder 2">
+            <a:extLst>
+              <a:ext uri="{FF2B5EF4-FFF2-40B4-BE49-F238E27FC236}">
+                <a16:creationId xmlns:a16="http://schemas.microsoft.com/office/drawing/2014/main" id="{EDA5BC2A-DC20-55AB-BA01-DDD37249D73C}"/>
+              </a:ext>
+            </a:extLst>
+          </p:cNvPr>
+          <p:cNvSpPr>
+            <a:spLocks noGrp="1"/>
+          </p:cNvSpPr>
+          <p:nvPr>
+            <p:ph idx="1"/>
+          </p:nvPr>
+        </p:nvSpPr>
+        <p:spPr/>
+        <p:txBody>
+          <a:bodyPr>
+            <a:normAutofit/>
+          </a:bodyPr>
+          <a:lstStyle/>
+          <a:p>
+            <a:pPr marL="0" indent="0">
+              <a:buNone/>
+            </a:pPr>
+            <a:r>
+              <a:rPr lang="en-US" dirty="0"/>
+              <a:t>Toxicity refers to rude, aggressive, and degrading behaviors between users.</a:t>
+            </a:r>
+          </a:p>
+          <a:p>
+            <a:pPr marL="0" indent="0">
+              <a:buNone/>
+            </a:pPr>
+            <a:r>
+              <a:rPr lang="en-US" dirty="0"/>
+              <a:t>For example:</a:t>
+            </a:r>
+          </a:p>
+          <a:p>
+            <a:pPr lvl="1"/>
+            <a:r>
+              <a:rPr lang="el-GR" sz="2800" dirty="0"/>
+              <a:t>“ #masterchefgr_xeftiles </a:t>
+            </a:r>
+            <a:r>
+              <a:rPr lang="el-GR" sz="2800" dirty="0" err="1"/>
+              <a:t>αμε</a:t>
+            </a:r>
+            <a:r>
+              <a:rPr lang="el-GR" sz="2800" dirty="0"/>
+              <a:t> στον </a:t>
+            </a:r>
+            <a:r>
+              <a:rPr lang="el-GR" sz="2800" dirty="0" err="1"/>
+              <a:t>αγυριστο</a:t>
+            </a:r>
+            <a:r>
+              <a:rPr lang="el-GR" sz="2800" dirty="0"/>
+              <a:t> με τα </a:t>
+            </a:r>
+            <a:r>
+              <a:rPr lang="el-GR" sz="2800" dirty="0" err="1"/>
+              <a:t>μαγειρεματα</a:t>
+            </a:r>
+            <a:r>
+              <a:rPr lang="el-GR" sz="2800" dirty="0"/>
+              <a:t> σας....η </a:t>
+            </a:r>
+            <a:r>
+              <a:rPr lang="el-GR" sz="2800" dirty="0" err="1"/>
+              <a:t>ντροπη</a:t>
+            </a:r>
+            <a:r>
+              <a:rPr lang="el-GR" sz="2800" dirty="0"/>
+              <a:t> της </a:t>
+            </a:r>
+            <a:r>
+              <a:rPr lang="el-GR" sz="2800" dirty="0" err="1"/>
+              <a:t>τηλεορασης</a:t>
+            </a:r>
+            <a:r>
+              <a:rPr lang="el-GR" sz="2800" dirty="0"/>
+              <a:t> </a:t>
+            </a:r>
+            <a:r>
+              <a:rPr lang="el-GR" sz="2800" dirty="0" err="1"/>
+              <a:t>φετος</a:t>
+            </a:r>
+            <a:r>
+              <a:rPr lang="el-GR" sz="2800" dirty="0"/>
+              <a:t>... </a:t>
+            </a:r>
+            <a:r>
+              <a:rPr lang="el-GR" sz="2800" dirty="0" err="1"/>
+              <a:t>ξεφτιλα</a:t>
+            </a:r>
+            <a:r>
+              <a:rPr lang="el-GR" sz="2800" dirty="0"/>
+              <a:t> ”</a:t>
+            </a:r>
+            <a:endParaRPr lang="en-US" sz="2800" dirty="0"/>
+          </a:p>
+          <a:p>
+            <a:pPr lvl="1"/>
+            <a:r>
+              <a:rPr lang="el-GR" sz="2800" dirty="0"/>
+              <a:t>“σα </a:t>
+            </a:r>
+            <a:r>
+              <a:rPr lang="el-GR" sz="2800" dirty="0" err="1"/>
+              <a:t>μοσχαρι</a:t>
+            </a:r>
+            <a:r>
+              <a:rPr lang="el-GR" sz="2800" dirty="0"/>
+              <a:t> </a:t>
+            </a:r>
+            <a:r>
+              <a:rPr lang="el-GR" sz="2800" dirty="0" err="1"/>
+              <a:t>εχει</a:t>
+            </a:r>
+            <a:r>
+              <a:rPr lang="el-GR" sz="2800" dirty="0"/>
+              <a:t> </a:t>
+            </a:r>
+            <a:r>
+              <a:rPr lang="el-GR" sz="2800" dirty="0" err="1"/>
+              <a:t>γινει</a:t>
+            </a:r>
+            <a:r>
+              <a:rPr lang="el-GR" sz="2800" dirty="0"/>
+              <a:t> τι </a:t>
+            </a:r>
+            <a:r>
+              <a:rPr lang="el-GR" sz="2800" dirty="0" err="1"/>
+              <a:t>διαολο</a:t>
+            </a:r>
+            <a:r>
+              <a:rPr lang="el-GR" sz="2800" dirty="0"/>
+              <a:t> </a:t>
+            </a:r>
+            <a:r>
+              <a:rPr lang="el-GR" sz="2800" dirty="0" err="1"/>
+              <a:t>τρωνε</a:t>
+            </a:r>
+            <a:r>
+              <a:rPr lang="el-GR" sz="2800" dirty="0"/>
+              <a:t> στο </a:t>
+            </a:r>
+            <a:r>
+              <a:rPr lang="el-GR" sz="2800" dirty="0" err="1"/>
+              <a:t>μαξιμου</a:t>
+            </a:r>
+            <a:r>
+              <a:rPr lang="el-GR" sz="2800" dirty="0"/>
+              <a:t>;”</a:t>
+            </a:r>
+            <a:endParaRPr lang="en-US" sz="2800" dirty="0"/>
+          </a:p>
+          <a:p>
+            <a:pPr lvl="1"/>
+            <a:r>
+              <a:rPr lang="el-GR" sz="2800" dirty="0"/>
+              <a:t>“</a:t>
+            </a:r>
+            <a:r>
+              <a:rPr lang="el-GR" sz="2800" dirty="0" err="1"/>
+              <a:t>ασημινα</a:t>
+            </a:r>
+            <a:r>
+              <a:rPr lang="el-GR" sz="2800" dirty="0"/>
+              <a:t>.... δε μου πας </a:t>
+            </a:r>
+            <a:r>
+              <a:rPr lang="el-GR" sz="2800" dirty="0" err="1"/>
+              <a:t>κατα</a:t>
+            </a:r>
+            <a:r>
+              <a:rPr lang="el-GR" sz="2800" dirty="0"/>
+              <a:t> το </a:t>
+            </a:r>
+            <a:r>
+              <a:rPr lang="el-GR" sz="2800" dirty="0" err="1"/>
+              <a:t>γεροδιαολο</a:t>
+            </a:r>
+            <a:r>
+              <a:rPr lang="el-GR" sz="2800" dirty="0"/>
+              <a:t>; </a:t>
+            </a:r>
+            <a:r>
+              <a:rPr lang="el-GR" sz="2800" dirty="0" err="1"/>
+              <a:t>αχρηστη</a:t>
+            </a:r>
+            <a:r>
+              <a:rPr lang="el-GR" sz="2800" dirty="0"/>
+              <a:t> #gntmgr”</a:t>
+            </a:r>
+            <a:endParaRPr lang="en-US" sz="2800" dirty="0"/>
+          </a:p>
+          <a:p>
+            <a:pPr lvl="1"/>
+            <a:endParaRPr lang="en-US" dirty="0"/>
+          </a:p>
+        </p:txBody>
+      </p:sp>
+    </p:spTree>
+    <p:extLst>
+      <p:ext uri="{BB962C8B-B14F-4D97-AF65-F5344CB8AC3E}">
+        <p14:creationId xmlns:p14="http://schemas.microsoft.com/office/powerpoint/2010/main" val="1164314194"/>
+      </p:ext>
+    </p:extLst>
+  </p:cSld>
+  <p:clrMapOvr>
+    <a:masterClrMapping/>
+  </p:clrMapOvr>
+</p:sld>
+</file>
+
+<file path=ppt/slides/slide30.xml><?xml version="1.0" encoding="utf-8"?>
 <p:sld xmlns:a="http://schemas.openxmlformats.org/drawingml/2006/main" xmlns:r="http://schemas.openxmlformats.org/officeDocument/2006/relationships" xmlns:p="http://schemas.openxmlformats.org/presentationml/2006/main">
   <p:cSld>
     <p:spTree>
@@ -12711,7 +15854,7 @@
 </p:sld>
 </file>
 
-<file path=ppt/slides/slide28.xml><?xml version="1.0" encoding="utf-8"?>
+<file path=ppt/slides/slide31.xml><?xml version="1.0" encoding="utf-8"?>
 <p:sld xmlns:a="http://schemas.openxmlformats.org/drawingml/2006/main" xmlns:r="http://schemas.openxmlformats.org/officeDocument/2006/relationships" xmlns:p="http://schemas.openxmlformats.org/presentationml/2006/main">
   <p:cSld>
     <p:spTree>
@@ -12777,7 +15920,7 @@
 </p:sld>
 </file>
 
-<file path=ppt/slides/slide29.xml><?xml version="1.0" encoding="utf-8"?>
+<file path=ppt/slides/slide32.xml><?xml version="1.0" encoding="utf-8"?>
 <p:sld xmlns:a="http://schemas.openxmlformats.org/drawingml/2006/main" xmlns:r="http://schemas.openxmlformats.org/officeDocument/2006/relationships" xmlns:p="http://schemas.openxmlformats.org/presentationml/2006/main">
   <p:cSld>
     <p:spTree>
@@ -12953,274 +16096,7 @@
 </p:sld>
 </file>
 
-<file path=ppt/slides/slide3.xml><?xml version="1.0" encoding="utf-8"?>
-<p:sld xmlns:a="http://schemas.openxmlformats.org/drawingml/2006/main" xmlns:r="http://schemas.openxmlformats.org/officeDocument/2006/relationships" xmlns:p="http://schemas.openxmlformats.org/presentationml/2006/main">
-  <p:cSld>
-    <p:spTree>
-      <p:nvGrpSpPr>
-        <p:cNvPr id="1" name=""/>
-        <p:cNvGrpSpPr/>
-        <p:nvPr/>
-      </p:nvGrpSpPr>
-      <p:grpSpPr>
-        <a:xfrm>
-          <a:off x="0" y="0"/>
-          <a:ext cx="0" cy="0"/>
-          <a:chOff x="0" y="0"/>
-          <a:chExt cx="0" cy="0"/>
-        </a:xfrm>
-      </p:grpSpPr>
-      <p:sp>
-        <p:nvSpPr>
-          <p:cNvPr id="2" name="Title 1">
-            <a:extLst>
-              <a:ext uri="{FF2B5EF4-FFF2-40B4-BE49-F238E27FC236}">
-                <a16:creationId xmlns:a16="http://schemas.microsoft.com/office/drawing/2014/main" id="{459E9280-2EFC-EAAD-B90B-757337875FC3}"/>
-              </a:ext>
-            </a:extLst>
-          </p:cNvPr>
-          <p:cNvSpPr>
-            <a:spLocks noGrp="1"/>
-          </p:cNvSpPr>
-          <p:nvPr>
-            <p:ph type="title"/>
-          </p:nvPr>
-        </p:nvSpPr>
-        <p:spPr/>
-        <p:txBody>
-          <a:bodyPr>
-            <a:normAutofit/>
-          </a:bodyPr>
-          <a:lstStyle/>
-          <a:p>
-            <a:pPr algn="ctr"/>
-            <a:r>
-              <a:rPr lang="en-US" sz="6000" dirty="0"/>
-              <a:t>What is online toxicity?</a:t>
-            </a:r>
-          </a:p>
-        </p:txBody>
-      </p:sp>
-      <p:sp>
-        <p:nvSpPr>
-          <p:cNvPr id="3" name="Content Placeholder 2">
-            <a:extLst>
-              <a:ext uri="{FF2B5EF4-FFF2-40B4-BE49-F238E27FC236}">
-                <a16:creationId xmlns:a16="http://schemas.microsoft.com/office/drawing/2014/main" id="{EDA5BC2A-DC20-55AB-BA01-DDD37249D73C}"/>
-              </a:ext>
-            </a:extLst>
-          </p:cNvPr>
-          <p:cNvSpPr>
-            <a:spLocks noGrp="1"/>
-          </p:cNvSpPr>
-          <p:nvPr>
-            <p:ph idx="1"/>
-          </p:nvPr>
-        </p:nvSpPr>
-        <p:spPr/>
-        <p:txBody>
-          <a:bodyPr>
-            <a:normAutofit/>
-          </a:bodyPr>
-          <a:lstStyle/>
-          <a:p>
-            <a:pPr marL="0" indent="0">
-              <a:buNone/>
-            </a:pPr>
-            <a:r>
-              <a:rPr lang="en-US" dirty="0"/>
-              <a:t>Toxicity refers to rude, aggressive, and degrading behaviors between users.</a:t>
-            </a:r>
-          </a:p>
-          <a:p>
-            <a:pPr marL="0" indent="0">
-              <a:buNone/>
-            </a:pPr>
-            <a:r>
-              <a:rPr lang="en-US" dirty="0"/>
-              <a:t>For example:</a:t>
-            </a:r>
-          </a:p>
-          <a:p>
-            <a:pPr lvl="1"/>
-            <a:r>
-              <a:rPr lang="el-GR" sz="2800" dirty="0"/>
-              <a:t>“ #masterchefgr_xeftiles </a:t>
-            </a:r>
-            <a:r>
-              <a:rPr lang="el-GR" sz="2800" dirty="0" err="1"/>
-              <a:t>αμε</a:t>
-            </a:r>
-            <a:r>
-              <a:rPr lang="el-GR" sz="2800" dirty="0"/>
-              <a:t> στον </a:t>
-            </a:r>
-            <a:r>
-              <a:rPr lang="el-GR" sz="2800" dirty="0" err="1"/>
-              <a:t>αγυριστο</a:t>
-            </a:r>
-            <a:r>
-              <a:rPr lang="el-GR" sz="2800" dirty="0"/>
-              <a:t> με τα </a:t>
-            </a:r>
-            <a:r>
-              <a:rPr lang="el-GR" sz="2800" dirty="0" err="1"/>
-              <a:t>μαγειρεματα</a:t>
-            </a:r>
-            <a:r>
-              <a:rPr lang="el-GR" sz="2800" dirty="0"/>
-              <a:t> σας....η </a:t>
-            </a:r>
-            <a:r>
-              <a:rPr lang="el-GR" sz="2800" dirty="0" err="1"/>
-              <a:t>ντροπη</a:t>
-            </a:r>
-            <a:r>
-              <a:rPr lang="el-GR" sz="2800" dirty="0"/>
-              <a:t> της </a:t>
-            </a:r>
-            <a:r>
-              <a:rPr lang="el-GR" sz="2800" dirty="0" err="1"/>
-              <a:t>τηλεορασης</a:t>
-            </a:r>
-            <a:r>
-              <a:rPr lang="el-GR" sz="2800" dirty="0"/>
-              <a:t> </a:t>
-            </a:r>
-            <a:r>
-              <a:rPr lang="el-GR" sz="2800" dirty="0" err="1"/>
-              <a:t>φετος</a:t>
-            </a:r>
-            <a:r>
-              <a:rPr lang="el-GR" sz="2800" dirty="0"/>
-              <a:t>... </a:t>
-            </a:r>
-            <a:r>
-              <a:rPr lang="el-GR" sz="2800" dirty="0" err="1"/>
-              <a:t>ξεφτιλα</a:t>
-            </a:r>
-            <a:r>
-              <a:rPr lang="el-GR" sz="2800" dirty="0"/>
-              <a:t> ”</a:t>
-            </a:r>
-            <a:endParaRPr lang="en-US" sz="2800" dirty="0"/>
-          </a:p>
-          <a:p>
-            <a:pPr lvl="1"/>
-            <a:r>
-              <a:rPr lang="el-GR" sz="2800" dirty="0"/>
-              <a:t>“σα </a:t>
-            </a:r>
-            <a:r>
-              <a:rPr lang="el-GR" sz="2800" dirty="0" err="1"/>
-              <a:t>μοσχαρι</a:t>
-            </a:r>
-            <a:r>
-              <a:rPr lang="el-GR" sz="2800" dirty="0"/>
-              <a:t> </a:t>
-            </a:r>
-            <a:r>
-              <a:rPr lang="el-GR" sz="2800" dirty="0" err="1"/>
-              <a:t>εχει</a:t>
-            </a:r>
-            <a:r>
-              <a:rPr lang="el-GR" sz="2800" dirty="0"/>
-              <a:t> </a:t>
-            </a:r>
-            <a:r>
-              <a:rPr lang="el-GR" sz="2800" dirty="0" err="1"/>
-              <a:t>γινει</a:t>
-            </a:r>
-            <a:r>
-              <a:rPr lang="el-GR" sz="2800" dirty="0"/>
-              <a:t> τι </a:t>
-            </a:r>
-            <a:r>
-              <a:rPr lang="el-GR" sz="2800" dirty="0" err="1"/>
-              <a:t>διαολο</a:t>
-            </a:r>
-            <a:r>
-              <a:rPr lang="el-GR" sz="2800" dirty="0"/>
-              <a:t> </a:t>
-            </a:r>
-            <a:r>
-              <a:rPr lang="el-GR" sz="2800" dirty="0" err="1"/>
-              <a:t>τρωνε</a:t>
-            </a:r>
-            <a:r>
-              <a:rPr lang="el-GR" sz="2800" dirty="0"/>
-              <a:t> στο </a:t>
-            </a:r>
-            <a:r>
-              <a:rPr lang="el-GR" sz="2800" dirty="0" err="1"/>
-              <a:t>μαξιμου</a:t>
-            </a:r>
-            <a:r>
-              <a:rPr lang="el-GR" sz="2800" dirty="0"/>
-              <a:t>;”</a:t>
-            </a:r>
-            <a:endParaRPr lang="en-US" sz="2800" dirty="0"/>
-          </a:p>
-          <a:p>
-            <a:pPr lvl="1"/>
-            <a:r>
-              <a:rPr lang="el-GR" sz="2800" dirty="0"/>
-              <a:t>“</a:t>
-            </a:r>
-            <a:r>
-              <a:rPr lang="el-GR" sz="2800" dirty="0" err="1"/>
-              <a:t>ασημινα</a:t>
-            </a:r>
-            <a:r>
-              <a:rPr lang="el-GR" sz="2800" dirty="0"/>
-              <a:t>.... δε μου πας </a:t>
-            </a:r>
-            <a:r>
-              <a:rPr lang="el-GR" sz="2800" dirty="0" err="1"/>
-              <a:t>κατα</a:t>
-            </a:r>
-            <a:r>
-              <a:rPr lang="el-GR" sz="2800" dirty="0"/>
-              <a:t> το </a:t>
-            </a:r>
-            <a:r>
-              <a:rPr lang="el-GR" sz="2800" dirty="0" err="1"/>
-              <a:t>γεροδιαολο</a:t>
-            </a:r>
-            <a:r>
-              <a:rPr lang="el-GR" sz="2800" dirty="0"/>
-              <a:t>; </a:t>
-            </a:r>
-            <a:r>
-              <a:rPr lang="el-GR" sz="2800" dirty="0" err="1"/>
-              <a:t>αχρηστη</a:t>
-            </a:r>
-            <a:r>
-              <a:rPr lang="el-GR" sz="2800" dirty="0"/>
-              <a:t> #gntmgr”</a:t>
-            </a:r>
-            <a:endParaRPr lang="en-US" sz="2800" dirty="0"/>
-          </a:p>
-          <a:p>
-            <a:pPr lvl="1"/>
-            <a:endParaRPr lang="en-US" dirty="0"/>
-          </a:p>
-        </p:txBody>
-      </p:sp>
-    </p:spTree>
-    <p:extLst>
-      <p:ext uri="{BB962C8B-B14F-4D97-AF65-F5344CB8AC3E}">
-        <p14:creationId xmlns:p14="http://schemas.microsoft.com/office/powerpoint/2010/main" val="1164314194"/>
-      </p:ext>
-    </p:extLst>
-  </p:cSld>
-  <p:clrMapOvr>
-    <a:masterClrMapping/>
-  </p:clrMapOvr>
-</p:sld>
-</file>
-
-<file path=ppt/slides/slide30.xml><?xml version="1.0" encoding="utf-8"?>
+<file path=ppt/slides/slide33.xml><?xml version="1.0" encoding="utf-8"?>
 <p:sld xmlns:a="http://schemas.openxmlformats.org/drawingml/2006/main" xmlns:r="http://schemas.openxmlformats.org/officeDocument/2006/relationships" xmlns:p="http://schemas.openxmlformats.org/presentationml/2006/main">
   <p:cSld>
     <p:spTree>
@@ -13327,7 +16203,7 @@
 </p:sld>
 </file>
 
-<file path=ppt/slides/slide31.xml><?xml version="1.0" encoding="utf-8"?>
+<file path=ppt/slides/slide34.xml><?xml version="1.0" encoding="utf-8"?>
 <p:sld xmlns:a="http://schemas.openxmlformats.org/drawingml/2006/main" xmlns:r="http://schemas.openxmlformats.org/officeDocument/2006/relationships" xmlns:p="http://schemas.openxmlformats.org/presentationml/2006/main">
   <p:cSld>
     <p:spTree>
@@ -13526,7 +16402,7 @@
 </p:sld>
 </file>
 
-<file path=ppt/slides/slide32.xml><?xml version="1.0" encoding="utf-8"?>
+<file path=ppt/slides/slide35.xml><?xml version="1.0" encoding="utf-8"?>
 <p:sld xmlns:a="http://schemas.openxmlformats.org/drawingml/2006/main" xmlns:r="http://schemas.openxmlformats.org/officeDocument/2006/relationships" xmlns:p="http://schemas.openxmlformats.org/presentationml/2006/main">
   <p:cSld>
     <p:spTree>
@@ -13655,7 +16531,7 @@
 </p:sld>
 </file>
 
-<file path=ppt/slides/slide33.xml><?xml version="1.0" encoding="utf-8"?>
+<file path=ppt/slides/slide36.xml><?xml version="1.0" encoding="utf-8"?>
 <p:sld xmlns:a="http://schemas.openxmlformats.org/drawingml/2006/main" xmlns:r="http://schemas.openxmlformats.org/officeDocument/2006/relationships" xmlns:p="http://schemas.openxmlformats.org/presentationml/2006/main">
   <p:cSld>
     <p:spTree>
@@ -13768,7 +16644,7 @@
 </p:sld>
 </file>
 
-<file path=ppt/slides/slide34.xml><?xml version="1.0" encoding="utf-8"?>
+<file path=ppt/slides/slide37.xml><?xml version="1.0" encoding="utf-8"?>
 <p:sld xmlns:a="http://schemas.openxmlformats.org/drawingml/2006/main" xmlns:r="http://schemas.openxmlformats.org/officeDocument/2006/relationships" xmlns:p="http://schemas.openxmlformats.org/presentationml/2006/main">
   <p:cSld>
     <p:spTree>
@@ -13834,7 +16710,7 @@
 </p:sld>
 </file>
 
-<file path=ppt/slides/slide35.xml><?xml version="1.0" encoding="utf-8"?>
+<file path=ppt/slides/slide38.xml><?xml version="1.0" encoding="utf-8"?>
 <p:sld xmlns:a="http://schemas.openxmlformats.org/drawingml/2006/main" xmlns:r="http://schemas.openxmlformats.org/officeDocument/2006/relationships" xmlns:p="http://schemas.openxmlformats.org/presentationml/2006/main">
   <p:cSld>
     <p:spTree>
@@ -13962,7 +16838,7 @@
 </p:sld>
 </file>
 
-<file path=ppt/slides/slide36.xml><?xml version="1.0" encoding="utf-8"?>
+<file path=ppt/slides/slide39.xml><?xml version="1.0" encoding="utf-8"?>
 <p:sld xmlns:a="http://schemas.openxmlformats.org/drawingml/2006/main" xmlns:r="http://schemas.openxmlformats.org/officeDocument/2006/relationships" xmlns:p="http://schemas.openxmlformats.org/presentationml/2006/main">
   <p:cSld>
     <p:spTree>
@@ -14074,72 +16950,6 @@
     <p:extLst>
       <p:ext uri="{BB962C8B-B14F-4D97-AF65-F5344CB8AC3E}">
         <p14:creationId xmlns:p14="http://schemas.microsoft.com/office/powerpoint/2010/main" val="714007632"/>
-      </p:ext>
-    </p:extLst>
-  </p:cSld>
-  <p:clrMapOvr>
-    <a:masterClrMapping/>
-  </p:clrMapOvr>
-</p:sld>
-</file>
-
-<file path=ppt/slides/slide37.xml><?xml version="1.0" encoding="utf-8"?>
-<p:sld xmlns:a="http://schemas.openxmlformats.org/drawingml/2006/main" xmlns:r="http://schemas.openxmlformats.org/officeDocument/2006/relationships" xmlns:p="http://schemas.openxmlformats.org/presentationml/2006/main">
-  <p:cSld>
-    <p:spTree>
-      <p:nvGrpSpPr>
-        <p:cNvPr id="1" name=""/>
-        <p:cNvGrpSpPr/>
-        <p:nvPr/>
-      </p:nvGrpSpPr>
-      <p:grpSpPr>
-        <a:xfrm>
-          <a:off x="0" y="0"/>
-          <a:ext cx="0" cy="0"/>
-          <a:chOff x="0" y="0"/>
-          <a:chExt cx="0" cy="0"/>
-        </a:xfrm>
-      </p:grpSpPr>
-      <p:sp>
-        <p:nvSpPr>
-          <p:cNvPr id="2" name="Title 1">
-            <a:extLst>
-              <a:ext uri="{FF2B5EF4-FFF2-40B4-BE49-F238E27FC236}">
-                <a16:creationId xmlns:a16="http://schemas.microsoft.com/office/drawing/2014/main" id="{3A5CD93F-9565-B145-D3CD-B1C8190CABE4}"/>
-              </a:ext>
-            </a:extLst>
-          </p:cNvPr>
-          <p:cNvSpPr>
-            <a:spLocks noGrp="1"/>
-          </p:cNvSpPr>
-          <p:nvPr>
-            <p:ph type="title"/>
-          </p:nvPr>
-        </p:nvSpPr>
-        <p:spPr>
-          <a:xfrm>
-            <a:off x="838200" y="2766218"/>
-            <a:ext cx="10515600" cy="1325563"/>
-          </a:xfrm>
-        </p:spPr>
-        <p:txBody>
-          <a:bodyPr>
-            <a:normAutofit/>
-          </a:bodyPr>
-          <a:lstStyle/>
-          <a:p>
-            <a:pPr algn="ctr"/>
-            <a:r>
-              <a:rPr lang="en-US" sz="6000" dirty="0"/>
-              <a:t>Thank you</a:t>
-            </a:r>
-          </a:p>
-        </p:txBody>
-      </p:sp>
-    </p:spTree>
-    <p:extLst>
-      <p:ext uri="{BB962C8B-B14F-4D97-AF65-F5344CB8AC3E}">
-        <p14:creationId xmlns:p14="http://schemas.microsoft.com/office/powerpoint/2010/main" val="2666715051"/>
       </p:ext>
     </p:extLst>
   </p:cSld>
@@ -14254,6 +17064,72 @@
     <p:extLst>
       <p:ext uri="{BB962C8B-B14F-4D97-AF65-F5344CB8AC3E}">
         <p14:creationId xmlns:p14="http://schemas.microsoft.com/office/powerpoint/2010/main" val="2500259186"/>
+      </p:ext>
+    </p:extLst>
+  </p:cSld>
+  <p:clrMapOvr>
+    <a:masterClrMapping/>
+  </p:clrMapOvr>
+</p:sld>
+</file>
+
+<file path=ppt/slides/slide40.xml><?xml version="1.0" encoding="utf-8"?>
+<p:sld xmlns:a="http://schemas.openxmlformats.org/drawingml/2006/main" xmlns:r="http://schemas.openxmlformats.org/officeDocument/2006/relationships" xmlns:p="http://schemas.openxmlformats.org/presentationml/2006/main">
+  <p:cSld>
+    <p:spTree>
+      <p:nvGrpSpPr>
+        <p:cNvPr id="1" name=""/>
+        <p:cNvGrpSpPr/>
+        <p:nvPr/>
+      </p:nvGrpSpPr>
+      <p:grpSpPr>
+        <a:xfrm>
+          <a:off x="0" y="0"/>
+          <a:ext cx="0" cy="0"/>
+          <a:chOff x="0" y="0"/>
+          <a:chExt cx="0" cy="0"/>
+        </a:xfrm>
+      </p:grpSpPr>
+      <p:sp>
+        <p:nvSpPr>
+          <p:cNvPr id="2" name="Title 1">
+            <a:extLst>
+              <a:ext uri="{FF2B5EF4-FFF2-40B4-BE49-F238E27FC236}">
+                <a16:creationId xmlns:a16="http://schemas.microsoft.com/office/drawing/2014/main" id="{3A5CD93F-9565-B145-D3CD-B1C8190CABE4}"/>
+              </a:ext>
+            </a:extLst>
+          </p:cNvPr>
+          <p:cNvSpPr>
+            <a:spLocks noGrp="1"/>
+          </p:cNvSpPr>
+          <p:nvPr>
+            <p:ph type="title"/>
+          </p:nvPr>
+        </p:nvSpPr>
+        <p:spPr>
+          <a:xfrm>
+            <a:off x="838200" y="2766218"/>
+            <a:ext cx="10515600" cy="1325563"/>
+          </a:xfrm>
+        </p:spPr>
+        <p:txBody>
+          <a:bodyPr>
+            <a:normAutofit/>
+          </a:bodyPr>
+          <a:lstStyle/>
+          <a:p>
+            <a:pPr algn="ctr"/>
+            <a:r>
+              <a:rPr lang="en-US" sz="6000" dirty="0"/>
+              <a:t>Thank you</a:t>
+            </a:r>
+          </a:p>
+        </p:txBody>
+      </p:sp>
+    </p:spTree>
+    <p:extLst>
+      <p:ext uri="{BB962C8B-B14F-4D97-AF65-F5344CB8AC3E}">
+        <p14:creationId xmlns:p14="http://schemas.microsoft.com/office/powerpoint/2010/main" val="2666715051"/>
       </p:ext>
     </p:extLst>
   </p:cSld>
